--- a/pregrado/s13/presentacion/S13B.pptx
+++ b/pregrado/s13/presentacion/S13B.pptx
@@ -1,32 +1,36 @@
 
 <file path=ppt/presentation.xml><?xml version="1.0" encoding="utf-8"?>
-<p:presentation xmlns:a="http://schemas.openxmlformats.org/drawingml/2006/main" xmlns:r="http://schemas.openxmlformats.org/officeDocument/2006/relationships" xmlns:p="http://schemas.openxmlformats.org/presentationml/2006/main" saveSubsetFonts="1" autoCompressPictures="0">
+<p:presentation xmlns:a="http://schemas.openxmlformats.org/drawingml/2006/main" xmlns:r="http://schemas.openxmlformats.org/officeDocument/2006/relationships" xmlns:p="http://schemas.openxmlformats.org/presentationml/2006/main" embedTrueTypeFonts="1" saveSubsetFonts="1" autoCompressPictures="0">
   <p:sldMasterIdLst>
     <p:sldMasterId id="2147483648" r:id="rId1"/>
   </p:sldMasterIdLst>
   <p:sldIdLst>
     <p:sldId id="256" r:id="rId7"/>
     <p:sldId id="257" r:id="rId9"/>
-    <p:sldId id="285" r:id="rId21"/>
     <p:sldId id="271" r:id="rId23"/>
     <p:sldId id="272" r:id="rId24"/>
     <p:sldId id="273" r:id="rId25"/>
-    <p:sldId id="286" r:id="rId20"/>
     <p:sldId id="279" r:id="rId31"/>
-    <p:sldId id="280" r:id="rId32"/>
-    <p:sldId id="287" r:id="rId19"/>
     <p:sldId id="275" r:id="rId27"/>
     <p:sldId id="276" r:id="rId28"/>
     <p:sldId id="277" r:id="rId29"/>
     <p:sldId id="278" r:id="rId30"/>
+    <p:sldId id="280" r:id="rId32"/>
     <p:sldId id="281" r:id="rId33"/>
-    <p:sldId id="288" r:id="rId26"/>
-    <p:sldId id="284" r:id="rId22"/>
+    <p:sldId id="282" r:id="rId34"/>
     <p:sldId id="283" r:id="rId35"/>
-    <p:sldId id="282" r:id="rId34"/>
   </p:sldIdLst>
   <p:sldSz cx="12192000" cy="6858000" type="screen16x9"/>
   <p:notesSz cx="6858000" cy="9144000"/>
+  <p:embeddedFontLst>
+    <p:embeddedFont>
+      <p:font typeface="Calibri"/>
+      <p:regular r:id="rId36"/>
+      <p:bold r:id="rId37"/>
+      <p:italic r:id="rId38"/>
+      <p:boldItalic r:id="rId39"/>
+    </p:embeddedFont>
+  </p:embeddedFontLst>
   <p:defaultTextStyle>
     <a:defPPr>
       <a:defRPr lang="en-US"/>
@@ -545,286 +549,6 @@
 </p:notes>
 </file>
 
-<file path=ppt/notesSlides/notesSlide12.xml><?xml version="1.0" encoding="utf-8"?>
-<p:notes xmlns:a="http://schemas.openxmlformats.org/drawingml/2006/main" xmlns:p="http://schemas.openxmlformats.org/presentationml/2006/main" xmlns:r="http://schemas.openxmlformats.org/officeDocument/2006/relationships">
-  <p:cSld>
-    <p:spTree>
-      <p:nvGrpSpPr>
-        <p:cNvPr id="1" name=""/>
-        <p:cNvGrpSpPr/>
-        <p:nvPr/>
-      </p:nvGrpSpPr>
-      <p:grpSpPr>
-        <a:xfrm>
-          <a:off x="0" y="0"/>
-          <a:ext cx="0" cy="0"/>
-          <a:chOff x="0" y="0"/>
-          <a:chExt cx="0" cy="0"/>
-        </a:xfrm>
-      </p:grpSpPr>
-      <p:sp>
-        <p:nvSpPr>
-          <p:cNvPr id="2" name="Slide Image Placeholder 1"/>
-          <p:cNvSpPr>
-            <a:spLocks noGrp="1"/>
-          </p:cNvSpPr>
-          <p:nvPr>
-            <p:ph type="sldImg" idx="2"/>
-          </p:nvPr>
-        </p:nvSpPr>
-        <p:spPr/>
-      </p:sp>
-      <p:sp>
-        <p:nvSpPr>
-          <p:cNvPr id="3" name="Notes Placeholder 2"/>
-          <p:cNvSpPr>
-            <a:spLocks noGrp="1"/>
-          </p:cNvSpPr>
-          <p:nvPr>
-            <p:ph type="body" idx="3" sz="quarter"/>
-          </p:nvPr>
-        </p:nvSpPr>
-        <p:spPr/>
-        <p:txBody>
-          <a:bodyPr/>
-          <a:lstStyle/>
-          <a:p>
-            <a:r>
-              <a:t>Divisor del capítulo 13.8. Se enuncia la pregunta tal como aparece en el sílabo, la ficha, el cuaderno y la guía: es el mismo código en todos. [Viernes, capítulo 13.8]</a:t>
-            </a:r>
-          </a:p>
-        </p:txBody>
-      </p:sp>
-      <p:sp>
-        <p:nvSpPr>
-          <p:cNvPr id="4" name="Slide Number Placeholder 3"/>
-          <p:cNvSpPr>
-            <a:spLocks noGrp="1"/>
-          </p:cNvSpPr>
-          <p:nvPr>
-            <p:ph type="sldNum" idx="5" sz="quarter"/>
-          </p:nvPr>
-        </p:nvSpPr>
-        <p:spPr/>
-      </p:sp>
-    </p:spTree>
-  </p:cSld>
-  <p:clrMapOvr>
-    <a:masterClrMapping/>
-  </p:clrMapOvr>
-</p:notes>
-</file>
-
-<file path=ppt/notesSlides/notesSlide13.xml><?xml version="1.0" encoding="utf-8"?>
-<p:notes xmlns:a="http://schemas.openxmlformats.org/drawingml/2006/main" xmlns:p="http://schemas.openxmlformats.org/presentationml/2006/main" xmlns:r="http://schemas.openxmlformats.org/officeDocument/2006/relationships">
-  <p:cSld>
-    <p:spTree>
-      <p:nvGrpSpPr>
-        <p:cNvPr id="1" name=""/>
-        <p:cNvGrpSpPr/>
-        <p:nvPr/>
-      </p:nvGrpSpPr>
-      <p:grpSpPr>
-        <a:xfrm>
-          <a:off x="0" y="0"/>
-          <a:ext cx="0" cy="0"/>
-          <a:chOff x="0" y="0"/>
-          <a:chExt cx="0" cy="0"/>
-        </a:xfrm>
-      </p:grpSpPr>
-      <p:sp>
-        <p:nvSpPr>
-          <p:cNvPr id="2" name="Slide Image Placeholder 1"/>
-          <p:cNvSpPr>
-            <a:spLocks noGrp="1"/>
-          </p:cNvSpPr>
-          <p:nvPr>
-            <p:ph type="sldImg" idx="2"/>
-          </p:nvPr>
-        </p:nvSpPr>
-        <p:spPr/>
-      </p:sp>
-      <p:sp>
-        <p:nvSpPr>
-          <p:cNvPr id="3" name="Notes Placeholder 2"/>
-          <p:cNvSpPr>
-            <a:spLocks noGrp="1"/>
-          </p:cNvSpPr>
-          <p:nvPr>
-            <p:ph type="body" idx="3" sz="quarter"/>
-          </p:nvPr>
-        </p:nvSpPr>
-        <p:spPr/>
-        <p:txBody>
-          <a:bodyPr/>
-          <a:lstStyle/>
-          <a:p>
-            <a:r>
-              <a:t>Divisor del capítulo 13.7. Se enuncia la pregunta tal como aparece en el sílabo, la ficha, el cuaderno y la guía: es el mismo código en todos. [Viernes, capítulo 13.7]</a:t>
-            </a:r>
-          </a:p>
-        </p:txBody>
-      </p:sp>
-      <p:sp>
-        <p:nvSpPr>
-          <p:cNvPr id="4" name="Slide Number Placeholder 3"/>
-          <p:cNvSpPr>
-            <a:spLocks noGrp="1"/>
-          </p:cNvSpPr>
-          <p:nvPr>
-            <p:ph type="sldNum" idx="5" sz="quarter"/>
-          </p:nvPr>
-        </p:nvSpPr>
-        <p:spPr/>
-      </p:sp>
-    </p:spTree>
-  </p:cSld>
-  <p:clrMapOvr>
-    <a:masterClrMapping/>
-  </p:clrMapOvr>
-</p:notes>
-</file>
-
-<file path=ppt/notesSlides/notesSlide14.xml><?xml version="1.0" encoding="utf-8"?>
-<p:notes xmlns:a="http://schemas.openxmlformats.org/drawingml/2006/main" xmlns:p="http://schemas.openxmlformats.org/presentationml/2006/main" xmlns:r="http://schemas.openxmlformats.org/officeDocument/2006/relationships">
-  <p:cSld>
-    <p:spTree>
-      <p:nvGrpSpPr>
-        <p:cNvPr id="1" name=""/>
-        <p:cNvGrpSpPr/>
-        <p:nvPr/>
-      </p:nvGrpSpPr>
-      <p:grpSpPr>
-        <a:xfrm>
-          <a:off x="0" y="0"/>
-          <a:ext cx="0" cy="0"/>
-          <a:chOff x="0" y="0"/>
-          <a:chExt cx="0" cy="0"/>
-        </a:xfrm>
-      </p:grpSpPr>
-      <p:sp>
-        <p:nvSpPr>
-          <p:cNvPr id="2" name="Slide Image Placeholder 1"/>
-          <p:cNvSpPr>
-            <a:spLocks noGrp="1"/>
-          </p:cNvSpPr>
-          <p:nvPr>
-            <p:ph type="sldImg" idx="2"/>
-          </p:nvPr>
-        </p:nvSpPr>
-        <p:spPr/>
-      </p:sp>
-      <p:sp>
-        <p:nvSpPr>
-          <p:cNvPr id="3" name="Notes Placeholder 2"/>
-          <p:cNvSpPr>
-            <a:spLocks noGrp="1"/>
-          </p:cNvSpPr>
-          <p:nvPr>
-            <p:ph type="body" idx="3" sz="quarter"/>
-          </p:nvPr>
-        </p:nvSpPr>
-        <p:spPr/>
-        <p:txBody>
-          <a:bodyPr/>
-          <a:lstStyle/>
-          <a:p>
-            <a:r>
-              <a:t>Divisor del capítulo 13.6. Se enuncia la pregunta tal como aparece en el sílabo, la ficha, el cuaderno y la guía: es el mismo código en todos. [Viernes, capítulo 13.6]</a:t>
-            </a:r>
-          </a:p>
-        </p:txBody>
-      </p:sp>
-      <p:sp>
-        <p:nvSpPr>
-          <p:cNvPr id="4" name="Slide Number Placeholder 3"/>
-          <p:cNvSpPr>
-            <a:spLocks noGrp="1"/>
-          </p:cNvSpPr>
-          <p:nvPr>
-            <p:ph type="sldNum" idx="5" sz="quarter"/>
-          </p:nvPr>
-        </p:nvSpPr>
-        <p:spPr/>
-      </p:sp>
-    </p:spTree>
-  </p:cSld>
-  <p:clrMapOvr>
-    <a:masterClrMapping/>
-  </p:clrMapOvr>
-</p:notes>
-</file>
-
-<file path=ppt/notesSlides/notesSlide15.xml><?xml version="1.0" encoding="utf-8"?>
-<p:notes xmlns:a="http://schemas.openxmlformats.org/drawingml/2006/main" xmlns:p="http://schemas.openxmlformats.org/presentationml/2006/main" xmlns:r="http://schemas.openxmlformats.org/officeDocument/2006/relationships">
-  <p:cSld>
-    <p:spTree>
-      <p:nvGrpSpPr>
-        <p:cNvPr id="1" name=""/>
-        <p:cNvGrpSpPr/>
-        <p:nvPr/>
-      </p:nvGrpSpPr>
-      <p:grpSpPr>
-        <a:xfrm>
-          <a:off x="0" y="0"/>
-          <a:ext cx="0" cy="0"/>
-          <a:chOff x="0" y="0"/>
-          <a:chExt cx="0" cy="0"/>
-        </a:xfrm>
-      </p:grpSpPr>
-      <p:sp>
-        <p:nvSpPr>
-          <p:cNvPr id="2" name="Slide Image Placeholder 1"/>
-          <p:cNvSpPr>
-            <a:spLocks noGrp="1"/>
-          </p:cNvSpPr>
-          <p:nvPr>
-            <p:ph type="sldImg" idx="2"/>
-          </p:nvPr>
-        </p:nvSpPr>
-        <p:spPr/>
-      </p:sp>
-      <p:sp>
-        <p:nvSpPr>
-          <p:cNvPr id="3" name="Notes Placeholder 2"/>
-          <p:cNvSpPr>
-            <a:spLocks noGrp="1"/>
-          </p:cNvSpPr>
-          <p:nvPr>
-            <p:ph type="body" idx="3" sz="quarter"/>
-          </p:nvPr>
-        </p:nvSpPr>
-        <p:spPr/>
-        <p:txBody>
-          <a:bodyPr/>
-          <a:lstStyle/>
-          <a:p>
-            <a:r>
-              <a:t>GUION: cerrar nombrando la frontera. Cada límite se dice en voz alta y se enlaza con la sesión que sí lo resuelve. No es una advertencia legal: es la competencia que separa a quien reporta un número de quien sabe qué autoriza. [Viernes, capítulo 13.9]</a:t>
-            </a:r>
-          </a:p>
-        </p:txBody>
-      </p:sp>
-      <p:sp>
-        <p:nvSpPr>
-          <p:cNvPr id="4" name="Slide Number Placeholder 3"/>
-          <p:cNvSpPr>
-            <a:spLocks noGrp="1"/>
-          </p:cNvSpPr>
-          <p:nvPr>
-            <p:ph type="sldNum" idx="5" sz="quarter"/>
-          </p:nvPr>
-        </p:nvSpPr>
-        <p:spPr/>
-      </p:sp>
-    </p:spTree>
-  </p:cSld>
-  <p:clrMapOvr>
-    <a:masterClrMapping/>
-  </p:clrMapOvr>
-</p:notes>
-</file>
-
 <file path=ppt/notesSlides/notesSlide16.xml><?xml version="1.0" encoding="utf-8"?>
 <p:notes xmlns:a="http://schemas.openxmlformats.org/drawingml/2006/main" xmlns:p="http://schemas.openxmlformats.org/presentationml/2006/main" xmlns:r="http://schemas.openxmlformats.org/officeDocument/2006/relationships">
   <p:cSld>
@@ -1011,76 +735,6 @@
           <a:p>
             <a:r>
               <a:t>GUION: Residuales de Schoenfeld de age contra el tiempo. La pendiente negativa (tendencia no plana) muestra que el efecto de la edad se vuelve MÁS protector a largo plazo: su HR no es constante. Test: age 11,45, p ≈ 0,0007 → viola PH; el resto de covariables cumple (wexp queda marginal). No se «arregla» quitando age: se estratifica por age binado o se interactúa con el tiempo. Es el punto pedagógico del drill 3, no un fallo. [Viernes, capítulo 13.6]</a:t>
-            </a:r>
-          </a:p>
-        </p:txBody>
-      </p:sp>
-      <p:sp>
-        <p:nvSpPr>
-          <p:cNvPr id="4" name="Slide Number Placeholder 3"/>
-          <p:cNvSpPr>
-            <a:spLocks noGrp="1"/>
-          </p:cNvSpPr>
-          <p:nvPr>
-            <p:ph type="sldNum" idx="5" sz="quarter"/>
-          </p:nvPr>
-        </p:nvSpPr>
-        <p:spPr/>
-      </p:sp>
-    </p:spTree>
-  </p:cSld>
-  <p:clrMapOvr>
-    <a:masterClrMapping/>
-  </p:clrMapOvr>
-</p:notes>
-</file>
-
-<file path=ppt/notesSlides/notesSlide19.xml><?xml version="1.0" encoding="utf-8"?>
-<p:notes xmlns:a="http://schemas.openxmlformats.org/drawingml/2006/main" xmlns:p="http://schemas.openxmlformats.org/presentationml/2006/main" xmlns:r="http://schemas.openxmlformats.org/officeDocument/2006/relationships">
-  <p:cSld>
-    <p:spTree>
-      <p:nvGrpSpPr>
-        <p:cNvPr id="1" name=""/>
-        <p:cNvGrpSpPr/>
-        <p:nvPr/>
-      </p:nvGrpSpPr>
-      <p:grpSpPr>
-        <a:xfrm>
-          <a:off x="0" y="0"/>
-          <a:ext cx="0" cy="0"/>
-          <a:chOff x="0" y="0"/>
-          <a:chExt cx="0" cy="0"/>
-        </a:xfrm>
-      </p:grpSpPr>
-      <p:sp>
-        <p:nvSpPr>
-          <p:cNvPr id="2" name="Slide Image Placeholder 1"/>
-          <p:cNvSpPr>
-            <a:spLocks noGrp="1"/>
-          </p:cNvSpPr>
-          <p:nvPr>
-            <p:ph type="sldImg" idx="2"/>
-          </p:nvPr>
-        </p:nvSpPr>
-        <p:spPr/>
-      </p:sp>
-      <p:sp>
-        <p:nvSpPr>
-          <p:cNvPr id="3" name="Notes Placeholder 2"/>
-          <p:cNvSpPr>
-            <a:spLocks noGrp="1"/>
-          </p:cNvSpPr>
-          <p:nvPr>
-            <p:ph type="body" idx="3" sz="quarter"/>
-          </p:nvPr>
-        </p:nvSpPr>
-        <p:spPr/>
-        <p:txBody>
-          <a:bodyPr/>
-          <a:lstStyle/>
-          <a:p>
-            <a:r>
-              <a:t>Divisor del capítulo 13.9. Se enuncia la pregunta tal como aparece en el sílabo, la ficha, el cuaderno y la guía: es el mismo código en todos. [Viernes, capítulo 13.9]</a:t>
             </a:r>
           </a:p>
         </p:txBody>
@@ -5025,7 +4679,7 @@
     <p:bg>
       <p:bgPr>
         <a:solidFill>
-          <a:srgbClr val="9B1B30"/>
+          <a:srgbClr val="FFFFFF"/>
         </a:solidFill>
         <a:effectLst/>
       </p:bgPr>
@@ -5039,20 +4693,79 @@
       <p:grpSpPr/>
       <p:sp>
         <p:nvSpPr>
-          <p:cNvPr id="2" name="Oval 1"/>
+          <p:cNvPr id="2" name="TextBox 1"/>
+          <p:cNvSpPr txBox="1"/>
+          <p:nvPr/>
+        </p:nvSpPr>
+        <p:spPr>
+          <a:xfrm>
+            <a:off x="548640" y="411480"/>
+            <a:ext cx="11094720" cy="777240"/>
+          </a:xfrm>
+          <a:prstGeom prst="rect">
+            <a:avLst/>
+          </a:prstGeom>
+          <a:noFill/>
+        </p:spPr>
+        <p:txBody>
+          <a:bodyPr wrap="square" anchor="t" lIns="0" rIns="0" tIns="0" bIns="0">
+            <a:spAutoFit/>
+          </a:bodyPr>
+          <a:lstStyle/>
+          <a:p>
+            <a:pPr algn="l"/>
+            <a:r>
+              <a:rPr sz="4000" b="1">
+                <a:solidFill>
+                  <a:srgbClr val="2D2D2D"/>
+                </a:solidFill>
+                <a:latin typeface="Calibri"/>
+              </a:rPr>
+              <a:t>Retener el contrato mensual vale menos: 1 804 frente a 3 105 dólares</a:t>
+            </a:r>
+          </a:p>
+        </p:txBody>
+      </p:sp>
+      <p:pic>
+        <p:nvPicPr>
+          <p:cNvPr id="3" name="Picture 2" descr="S13deck_clv.png"/>
+          <p:cNvPicPr>
+            <a:picLocks noChangeAspect="1"/>
+          </p:cNvPicPr>
+          <p:nvPr/>
+        </p:nvPicPr>
+        <p:blipFill>
+          <a:blip r:embed="rId2"/>
+          <a:stretch>
+            <a:fillRect/>
+          </a:stretch>
+        </p:blipFill>
+        <p:spPr>
+          <a:xfrm>
+            <a:off x="548640" y="1828800"/>
+            <a:ext cx="6949440" cy="3643844"/>
+          </a:xfrm>
+          <a:prstGeom prst="rect">
+            <a:avLst/>
+          </a:prstGeom>
+        </p:spPr>
+      </p:pic>
+      <p:sp>
+        <p:nvSpPr>
+          <p:cNvPr id="4" name="Oval 3"/>
           <p:cNvSpPr/>
           <p:nvPr/>
         </p:nvSpPr>
         <p:spPr>
           <a:xfrm>
-            <a:off x="914400" y="2103120"/>
-            <a:ext cx="2377440" cy="2377440"/>
+            <a:off x="7955279" y="2011680"/>
+            <a:ext cx="548640" cy="548640"/>
           </a:xfrm>
           <a:prstGeom prst="ellipse">
             <a:avLst/>
           </a:prstGeom>
           <a:solidFill>
-            <a:srgbClr val="FFFFFF"/>
+            <a:srgbClr val="E4002B"/>
           </a:solidFill>
           <a:ln>
             <a:noFill/>
@@ -5074,32 +4787,47 @@
           </a:fontRef>
         </p:style>
         <p:txBody>
-          <a:bodyPr rtlCol="0" anchor="ctr" lIns="0" rIns="0" tIns="0" bIns="0"/>
+          <a:bodyPr rtlCol="0" anchor="ctr"/>
           <a:lstStyle/>
           <a:p>
             <a:pPr algn="ctr"/>
-            <a:r>
-              <a:rPr sz="10000" b="1">
-                <a:solidFill>
-                  <a:srgbClr val="9B1B30"/>
-                </a:solidFill>
-                <a:latin typeface="Calibri"/>
-              </a:rPr>
-              <a:t>8</a:t>
-            </a:r>
-          </a:p>
-        </p:txBody>
-      </p:sp>
-      <p:sp>
-        <p:nvSpPr>
-          <p:cNvPr id="3" name="TextBox 2"/>
+          </a:p>
+        </p:txBody>
+      </p:sp>
+      <p:pic>
+        <p:nvPicPr>
+          <p:cNvPr id="5" name="Picture 4" descr="lightbulb__FFFFFF.png"/>
+          <p:cNvPicPr>
+            <a:picLocks noChangeAspect="1"/>
+          </p:cNvPicPr>
+          <p:nvPr/>
+        </p:nvPicPr>
+        <p:blipFill>
+          <a:blip r:embed="rId3"/>
+          <a:stretch>
+            <a:fillRect/>
+          </a:stretch>
+        </p:blipFill>
+        <p:spPr>
+          <a:xfrm>
+            <a:off x="8108898" y="2165299"/>
+            <a:ext cx="241402" cy="241402"/>
+          </a:xfrm>
+          <a:prstGeom prst="rect">
+            <a:avLst/>
+          </a:prstGeom>
+        </p:spPr>
+      </p:pic>
+      <p:sp>
+        <p:nvSpPr>
+          <p:cNvPr id="6" name="TextBox 5"/>
           <p:cNvSpPr txBox="1"/>
           <p:nvPr/>
         </p:nvSpPr>
         <p:spPr>
           <a:xfrm>
-            <a:off x="3931920" y="2651760"/>
-            <a:ext cx="7589520" cy="1371600"/>
+            <a:off x="8686800" y="2057400"/>
+            <a:ext cx="2926080" cy="548640"/>
           </a:xfrm>
           <a:prstGeom prst="rect">
             <a:avLst/>
@@ -5114,27 +4842,27 @@
           <a:p>
             <a:pPr algn="l"/>
             <a:r>
-              <a:rPr sz="4000" b="1">
-                <a:solidFill>
-                  <a:srgbClr val="FFFFFF"/>
+              <a:rPr sz="1500" b="1">
+                <a:solidFill>
+                  <a:srgbClr val="9B1B30"/>
                 </a:solidFill>
                 <a:latin typeface="Calibri"/>
               </a:rPr>
-              <a:t>¿Qué decisión habilita? Tiempo hasta el abandono y valor de vida del cliente</a:t>
-            </a:r>
-          </a:p>
-        </p:txBody>
-      </p:sp>
-      <p:sp>
-        <p:nvSpPr>
-          <p:cNvPr id="4" name="TextBox 3"/>
+              <a:t>Lectura de negocio</a:t>
+            </a:r>
+          </a:p>
+        </p:txBody>
+      </p:sp>
+      <p:sp>
+        <p:nvSpPr>
+          <p:cNvPr id="7" name="TextBox 6"/>
           <p:cNvSpPr txBox="1"/>
           <p:nvPr/>
         </p:nvSpPr>
         <p:spPr>
           <a:xfrm>
-            <a:off x="3931920" y="3977639"/>
-            <a:ext cx="7589520" cy="914400"/>
+            <a:off x="7955279" y="2880360"/>
+            <a:ext cx="3657600" cy="3108960"/>
           </a:xfrm>
           <a:prstGeom prst="rect">
             <a:avLst/>
@@ -5147,15 +4875,168 @@
           </a:bodyPr>
           <a:lstStyle/>
           <a:p>
+            <a:pPr algn="l">
+              <a:lnSpc>
+                <a:spcPct val="125000"/>
+              </a:lnSpc>
+            </a:pPr>
+            <a:r>
+              <a:rPr sz="1500" b="0">
+                <a:solidFill>
+                  <a:srgbClr val="2D2D2D"/>
+                </a:solidFill>
+                <a:latin typeface="Calibri"/>
+              </a:rPr>
+              <a:t>A igual margen, la baja retención casi divide el valor entre dos: lo determina la retención, no el precio.</a:t>
+            </a:r>
+          </a:p>
+        </p:txBody>
+      </p:sp>
+      <p:sp>
+        <p:nvSpPr>
+          <p:cNvPr id="8" name="TextBox 7"/>
+          <p:cNvSpPr txBox="1"/>
+          <p:nvPr/>
+        </p:nvSpPr>
+        <p:spPr>
+          <a:xfrm>
+            <a:off x="548640" y="5961888"/>
+            <a:ext cx="11094720" cy="292608"/>
+          </a:xfrm>
+          <a:prstGeom prst="rect">
+            <a:avLst/>
+          </a:prstGeom>
+          <a:noFill/>
+        </p:spPr>
+        <p:txBody>
+          <a:bodyPr wrap="square" anchor="t" lIns="0" rIns="0" tIns="0" bIns="0">
+            <a:spAutoFit/>
+          </a:bodyPr>
+          <a:lstStyle/>
+          <a:p>
             <a:pPr algn="l"/>
             <a:r>
-              <a:rPr sz="1700" b="0">
-                <a:solidFill>
-                  <a:srgbClr val="FCEDEE"/>
+              <a:rPr sz="1000" b="0">
+                <a:solidFill>
+                  <a:srgbClr val="6E6E6E"/>
                 </a:solidFill>
                 <a:latin typeface="Calibri"/>
               </a:rPr>
-              <a:t>Capítulo 13.8 — viernes, bloque B</a:t>
+              <a:t>CLV = Σ m·S(t)/(1+d)ᵗ a 72 meses — mes a mes 1 804 / un año 3 105 / dos años 3 097 USD — recalculado en frío por _recomputar_telco (dataset exclusivo del entregable).</a:t>
+            </a:r>
+          </a:p>
+        </p:txBody>
+      </p:sp>
+      <p:sp>
+        <p:nvSpPr>
+          <p:cNvPr id="9" name="Oval 8"/>
+          <p:cNvSpPr/>
+          <p:nvPr/>
+        </p:nvSpPr>
+        <p:spPr>
+          <a:xfrm>
+            <a:off x="548640" y="6473952"/>
+            <a:ext cx="100584" cy="100584"/>
+          </a:xfrm>
+          <a:prstGeom prst="ellipse">
+            <a:avLst/>
+          </a:prstGeom>
+          <a:solidFill>
+            <a:srgbClr val="E4002B"/>
+          </a:solidFill>
+          <a:ln>
+            <a:noFill/>
+          </a:ln>
+          <a:effectLst/>
+        </p:spPr>
+        <p:style>
+          <a:lnRef idx="1">
+            <a:schemeClr val="accent1"/>
+          </a:lnRef>
+          <a:fillRef idx="3">
+            <a:schemeClr val="accent1"/>
+          </a:fillRef>
+          <a:effectRef idx="2">
+            <a:schemeClr val="accent1"/>
+          </a:effectRef>
+          <a:fontRef idx="minor">
+            <a:schemeClr val="lt1"/>
+          </a:fontRef>
+        </p:style>
+        <p:txBody>
+          <a:bodyPr rtlCol="0" anchor="ctr"/>
+          <a:lstStyle/>
+          <a:p>
+            <a:pPr algn="ctr"/>
+          </a:p>
+        </p:txBody>
+      </p:sp>
+      <p:sp>
+        <p:nvSpPr>
+          <p:cNvPr id="10" name="TextBox 9"/>
+          <p:cNvSpPr txBox="1"/>
+          <p:nvPr/>
+        </p:nvSpPr>
+        <p:spPr>
+          <a:xfrm>
+            <a:off x="749808" y="6437376"/>
+            <a:ext cx="7772400" cy="274320"/>
+          </a:xfrm>
+          <a:prstGeom prst="rect">
+            <a:avLst/>
+          </a:prstGeom>
+          <a:noFill/>
+        </p:spPr>
+        <p:txBody>
+          <a:bodyPr wrap="square" anchor="t" lIns="0" rIns="0" tIns="0" bIns="0">
+            <a:spAutoFit/>
+          </a:bodyPr>
+          <a:lstStyle/>
+          <a:p>
+            <a:pPr algn="l"/>
+            <a:r>
+              <a:rPr sz="900" b="0">
+                <a:solidFill>
+                  <a:srgbClr val="6E6E6E"/>
+                </a:solidFill>
+                <a:latin typeface="Calibri"/>
+              </a:rPr>
+              <a:t>S13 — Herramientas para la Ciencia de Datos, UPC</a:t>
+            </a:r>
+          </a:p>
+        </p:txBody>
+      </p:sp>
+      <p:sp>
+        <p:nvSpPr>
+          <p:cNvPr id="11" name="TextBox 10"/>
+          <p:cNvSpPr txBox="1"/>
+          <p:nvPr/>
+        </p:nvSpPr>
+        <p:spPr>
+          <a:xfrm>
+            <a:off x="10180320" y="6437376"/>
+            <a:ext cx="1463040" cy="274320"/>
+          </a:xfrm>
+          <a:prstGeom prst="rect">
+            <a:avLst/>
+          </a:prstGeom>
+          <a:noFill/>
+        </p:spPr>
+        <p:txBody>
+          <a:bodyPr wrap="square" anchor="t" lIns="0" rIns="0" tIns="0" bIns="0">
+            <a:spAutoFit/>
+          </a:bodyPr>
+          <a:lstStyle/>
+          <a:p>
+            <a:pPr algn="r"/>
+            <a:r>
+              <a:rPr sz="900" b="0">
+                <a:solidFill>
+                  <a:srgbClr val="6E6E6E"/>
+                </a:solidFill>
+                <a:latin typeface="Calibri"/>
+              </a:rPr>
+              <a:t>10 / 14</a:t>
             </a:r>
           </a:p>
         </p:txBody>
@@ -5174,7 +5055,7 @@
     <p:bg>
       <p:bgPr>
         <a:solidFill>
-          <a:srgbClr val="9B1B30"/>
+          <a:srgbClr val="FCEDEE"/>
         </a:solidFill>
         <a:effectLst/>
       </p:bgPr>
@@ -5194,14 +5075,14 @@
         </p:nvSpPr>
         <p:spPr>
           <a:xfrm>
-            <a:off x="914400" y="2103120"/>
-            <a:ext cx="2377440" cy="2377440"/>
+            <a:off x="5593080" y="914400"/>
+            <a:ext cx="1005840" cy="1005840"/>
           </a:xfrm>
           <a:prstGeom prst="ellipse">
             <a:avLst/>
           </a:prstGeom>
           <a:solidFill>
-            <a:srgbClr val="FFFFFF"/>
+            <a:srgbClr val="E4002B"/>
           </a:solidFill>
           <a:ln>
             <a:noFill/>
@@ -5228,13 +5109,13 @@
           <a:p>
             <a:pPr algn="ctr"/>
             <a:r>
-              <a:rPr sz="10000" b="1">
-                <a:solidFill>
-                  <a:srgbClr val="9B1B30"/>
+              <a:rPr sz="4400" b="1">
+                <a:solidFill>
+                  <a:srgbClr val="FFFFFF"/>
                 </a:solidFill>
                 <a:latin typeface="Calibri"/>
               </a:rPr>
-              <a:t>8</a:t>
+              <a:t>?</a:t>
             </a:r>
           </a:p>
         </p:txBody>
@@ -5247,8 +5128,8 @@
         </p:nvSpPr>
         <p:spPr>
           <a:xfrm>
-            <a:off x="3931920" y="2651760"/>
-            <a:ext cx="7589520" cy="1371600"/>
+            <a:off x="1371600" y="2468880"/>
+            <a:ext cx="9448800" cy="2011680"/>
           </a:xfrm>
           <a:prstGeom prst="rect">
             <a:avLst/>
@@ -5261,15 +5142,15 @@
           </a:bodyPr>
           <a:lstStyle/>
           <a:p>
-            <a:pPr algn="l"/>
-            <a:r>
-              <a:rPr sz="4000" b="1">
-                <a:solidFill>
-                  <a:srgbClr val="FFFFFF"/>
+            <a:pPr algn="ctr"/>
+            <a:r>
+              <a:rPr sz="3200" b="1">
+                <a:solidFill>
+                  <a:srgbClr val="9B1B30"/>
                 </a:solidFill>
                 <a:latin typeface="Calibri"/>
               </a:rPr>
-              <a:t>¿Qué decisión habilita? Tiempo hasta el abandono y valor de vida del cliente</a:t>
+              <a:t>¿Cuánto conviene gastar hoy en retener a un cliente de contrato mensual?</a:t>
             </a:r>
           </a:p>
         </p:txBody>
@@ -5282,8 +5163,8 @@
         </p:nvSpPr>
         <p:spPr>
           <a:xfrm>
-            <a:off x="3931920" y="3977639"/>
-            <a:ext cx="7589520" cy="914400"/>
+            <a:off x="2011680" y="4754880"/>
+            <a:ext cx="8168640" cy="1280160"/>
           </a:xfrm>
           <a:prstGeom prst="rect">
             <a:avLst/>
@@ -5296,43 +5177,19 @@
           </a:bodyPr>
           <a:lstStyle/>
           <a:p>
-            <a:pPr algn="l"/>
-            <a:r>
-              <a:rPr sz="1700" b="0">
-                <a:solidFill>
-                  <a:srgbClr val="FCEDEE"/>
+            <a:pPr algn="ctr"/>
+            <a:r>
+              <a:rPr sz="1500" b="0">
+                <a:solidFill>
+                  <a:srgbClr val="2D2D2D"/>
                 </a:solidFill>
                 <a:latin typeface="Calibri"/>
               </a:rPr>
-              <a:t>¿Qué decisión habilita? Tiempo hasta el abandono y valor de vida del cliente</a:t>
-            </a:r>
-          </a:p>
-        </p:txBody>
-      </p:sp>
-      <p:pic>
-        <p:nvPicPr>
-          <p:cNvPr id="5" name="Picture 4" descr="briefcase__FFFFFF.png"/>
-          <p:cNvPicPr>
-            <a:picLocks noChangeAspect="1"/>
-          </p:cNvPicPr>
-          <p:nvPr/>
-        </p:nvPicPr>
-        <p:blipFill>
-          <a:blip r:embed="rId2"/>
-          <a:stretch>
-            <a:fillRect/>
-          </a:stretch>
-        </p:blipFill>
-        <p:spPr>
-          <a:xfrm>
-            <a:off x="10195560" y="640080"/>
-            <a:ext cx="1051560" cy="1051560"/>
-          </a:xfrm>
-          <a:prstGeom prst="rect">
-            <a:avLst/>
-          </a:prstGeom>
-        </p:spPr>
-      </p:pic>
+              <a:t>Su CLV es ~1 804 USD y la retención cae temprano: la decisión pesa el HR, su IC y el CLV.</a:t>
+            </a:r>
+          </a:p>
+        </p:txBody>
+      </p:sp>
     </p:spTree>
   </p:cSld>
   <p:clrMapOvr>
@@ -5389,7 +5246,7 @@
                 </a:solidFill>
                 <a:latin typeface="Calibri"/>
               </a:rPr>
-              <a:t>DEFINICIONES — EL PUENTE AL NEGOCIO</a:t>
+              <a:t>ACTUALIDAD</a:t>
             </a:r>
           </a:p>
         </p:txBody>
@@ -5424,7 +5281,7 @@
                 </a:solidFill>
                 <a:latin typeface="Calibri"/>
               </a:rPr>
-              <a:t>El CLV convierte la supervivencia en dinero</a:t>
+              <a:t>La supervivencia ya decide la retención de clientes</a:t>
             </a:r>
           </a:p>
         </p:txBody>
@@ -5437,8 +5294,8 @@
         </p:nvSpPr>
         <p:spPr>
           <a:xfrm>
-            <a:off x="548640" y="2642616"/>
-            <a:ext cx="658368" cy="658368"/>
+            <a:off x="548640" y="1810512"/>
+            <a:ext cx="384048" cy="384048"/>
           </a:xfrm>
           <a:prstGeom prst="ellipse">
             <a:avLst/>
@@ -5466,47 +5323,32 @@
           </a:fontRef>
         </p:style>
         <p:txBody>
-          <a:bodyPr rtlCol="0" anchor="ctr"/>
+          <a:bodyPr rtlCol="0" anchor="ctr" lIns="0" rIns="0" tIns="0" bIns="0"/>
           <a:lstStyle/>
           <a:p>
             <a:pPr algn="ctr"/>
-          </a:p>
-        </p:txBody>
-      </p:sp>
-      <p:pic>
-        <p:nvPicPr>
-          <p:cNvPr id="5" name="Picture 4" descr="target__FFFFFF.png"/>
-          <p:cNvPicPr>
-            <a:picLocks noChangeAspect="1"/>
-          </p:cNvPicPr>
-          <p:nvPr/>
-        </p:nvPicPr>
-        <p:blipFill>
-          <a:blip r:embed="rId2"/>
-          <a:stretch>
-            <a:fillRect/>
-          </a:stretch>
-        </p:blipFill>
-        <p:spPr>
-          <a:xfrm>
-            <a:off x="732983" y="2826959"/>
-            <a:ext cx="289682" cy="289682"/>
-          </a:xfrm>
-          <a:prstGeom prst="rect">
-            <a:avLst/>
-          </a:prstGeom>
-        </p:spPr>
-      </p:pic>
-      <p:sp>
-        <p:nvSpPr>
-          <p:cNvPr id="6" name="TextBox 5"/>
+            <a:r>
+              <a:rPr sz="1400" b="1">
+                <a:solidFill>
+                  <a:srgbClr val="FFFFFF"/>
+                </a:solidFill>
+                <a:latin typeface="Calibri"/>
+              </a:rPr>
+              <a:t>1</a:t>
+            </a:r>
+          </a:p>
+        </p:txBody>
+      </p:sp>
+      <p:sp>
+        <p:nvSpPr>
+          <p:cNvPr id="5" name="TextBox 4"/>
           <p:cNvSpPr txBox="1"/>
           <p:nvPr/>
         </p:nvSpPr>
         <p:spPr>
           <a:xfrm>
-            <a:off x="1508760" y="1938528"/>
-            <a:ext cx="10134600" cy="411480"/>
+            <a:off x="1097280" y="1783080"/>
+            <a:ext cx="10546080" cy="320040"/>
           </a:xfrm>
           <a:prstGeom prst="rect">
             <a:avLst/>
@@ -5521,27 +5363,27 @@
           <a:p>
             <a:pPr algn="l"/>
             <a:r>
-              <a:rPr sz="1800" b="1">
-                <a:solidFill>
-                  <a:srgbClr val="9B1B30"/>
+              <a:rPr sz="1500" b="1">
+                <a:solidFill>
+                  <a:srgbClr val="2D2D2D"/>
                 </a:solidFill>
                 <a:latin typeface="Calibri"/>
               </a:rPr>
-              <a:t>CLV desde supervivencia</a:t>
-            </a:r>
-          </a:p>
-        </p:txBody>
-      </p:sp>
-      <p:sp>
-        <p:nvSpPr>
-          <p:cNvPr id="7" name="TextBox 6"/>
+              <a:t>La retención cae por ventana de facturación (benchmark 2026)</a:t>
+            </a:r>
+          </a:p>
+        </p:txBody>
+      </p:sp>
+      <p:sp>
+        <p:nvSpPr>
+          <p:cNvPr id="6" name="TextBox 5"/>
           <p:cNvSpPr txBox="1"/>
           <p:nvPr/>
         </p:nvSpPr>
         <p:spPr>
           <a:xfrm>
-            <a:off x="1508760" y="2395728"/>
-            <a:ext cx="10134600" cy="1645920"/>
+            <a:off x="1097280" y="2093976"/>
+            <a:ext cx="10546080" cy="274320"/>
           </a:xfrm>
           <a:prstGeom prst="rect">
             <a:avLst/>
@@ -5554,33 +5396,29 @@
           </a:bodyPr>
           <a:lstStyle/>
           <a:p>
-            <a:pPr algn="l">
-              <a:lnSpc>
-                <a:spcPct val="110000"/>
-              </a:lnSpc>
-            </a:pPr>
-            <a:r>
-              <a:rPr sz="1400" b="0">
-                <a:solidFill>
-                  <a:srgbClr val="2D2D2D"/>
+            <a:pPr algn="l"/>
+            <a:r>
+              <a:rPr sz="1200" b="0">
+                <a:solidFill>
+                  <a:srgbClr val="6E6E6E"/>
                 </a:solidFill>
                 <a:latin typeface="Calibri"/>
               </a:rPr>
-              <a:t>CLV = Σ m·S(t)/(1+d)ᵗ: descuenta el margen por la probabilidad de seguir activo cada periodo, no una vida fija.</a:t>
-            </a:r>
-          </a:p>
-        </p:txBody>
-      </p:sp>
-      <p:sp>
-        <p:nvSpPr>
-          <p:cNvPr id="8" name="Oval 7"/>
+              <a:t>Eightx — 29/05/2026  —  curvas de supervivencia por contrato → CLV por segmento</a:t>
+            </a:r>
+          </a:p>
+        </p:txBody>
+      </p:sp>
+      <p:sp>
+        <p:nvSpPr>
+          <p:cNvPr id="7" name="Oval 6"/>
           <p:cNvSpPr/>
           <p:nvPr/>
         </p:nvSpPr>
         <p:spPr>
           <a:xfrm>
-            <a:off x="548640" y="4928616"/>
-            <a:ext cx="658368" cy="658368"/>
+            <a:off x="548640" y="2706624"/>
+            <a:ext cx="384048" cy="384048"/>
           </a:xfrm>
           <a:prstGeom prst="ellipse">
             <a:avLst/>
@@ -5608,47 +5446,32 @@
           </a:fontRef>
         </p:style>
         <p:txBody>
-          <a:bodyPr rtlCol="0" anchor="ctr"/>
+          <a:bodyPr rtlCol="0" anchor="ctr" lIns="0" rIns="0" tIns="0" bIns="0"/>
           <a:lstStyle/>
           <a:p>
             <a:pPr algn="ctr"/>
-          </a:p>
-        </p:txBody>
-      </p:sp>
-      <p:pic>
-        <p:nvPicPr>
-          <p:cNvPr id="9" name="Picture 8" descr="trending-up__FFFFFF.png"/>
-          <p:cNvPicPr>
-            <a:picLocks noChangeAspect="1"/>
-          </p:cNvPicPr>
-          <p:nvPr/>
-        </p:nvPicPr>
-        <p:blipFill>
-          <a:blip r:embed="rId3"/>
-          <a:stretch>
-            <a:fillRect/>
-          </a:stretch>
-        </p:blipFill>
-        <p:spPr>
-          <a:xfrm>
-            <a:off x="732983" y="5112959"/>
-            <a:ext cx="289682" cy="289682"/>
-          </a:xfrm>
-          <a:prstGeom prst="rect">
-            <a:avLst/>
-          </a:prstGeom>
-        </p:spPr>
-      </p:pic>
-      <p:sp>
-        <p:nvSpPr>
-          <p:cNvPr id="10" name="TextBox 9"/>
+            <a:r>
+              <a:rPr sz="1400" b="1">
+                <a:solidFill>
+                  <a:srgbClr val="FFFFFF"/>
+                </a:solidFill>
+                <a:latin typeface="Calibri"/>
+              </a:rPr>
+              <a:t>2</a:t>
+            </a:r>
+          </a:p>
+        </p:txBody>
+      </p:sp>
+      <p:sp>
+        <p:nvSpPr>
+          <p:cNvPr id="8" name="TextBox 7"/>
           <p:cNvSpPr txBox="1"/>
           <p:nvPr/>
         </p:nvSpPr>
         <p:spPr>
           <a:xfrm>
-            <a:off x="1508760" y="4224528"/>
-            <a:ext cx="10134600" cy="411480"/>
+            <a:off x="1097280" y="2679192"/>
+            <a:ext cx="10546080" cy="320040"/>
           </a:xfrm>
           <a:prstGeom prst="rect">
             <a:avLst/>
@@ -5663,27 +5486,27 @@
           <a:p>
             <a:pPr algn="l"/>
             <a:r>
-              <a:rPr sz="1800" b="1">
-                <a:solidFill>
-                  <a:srgbClr val="9B1B30"/>
+              <a:rPr sz="1500" b="1">
+                <a:solidFill>
+                  <a:srgbClr val="2D2D2D"/>
                 </a:solidFill>
                 <a:latin typeface="Calibri"/>
               </a:rPr>
-              <a:t>Weibull para extrapolar (mención)</a:t>
-            </a:r>
-          </a:p>
-        </p:txBody>
-      </p:sp>
-      <p:sp>
-        <p:nvSpPr>
-          <p:cNvPr id="11" name="TextBox 10"/>
+              <a:t>Kaplan-Meier, hazard y Cox como métrica de producto</a:t>
+            </a:r>
+          </a:p>
+        </p:txBody>
+      </p:sp>
+      <p:sp>
+        <p:nvSpPr>
+          <p:cNvPr id="9" name="TextBox 8"/>
           <p:cNvSpPr txBox="1"/>
           <p:nvPr/>
         </p:nvSpPr>
         <p:spPr>
           <a:xfrm>
-            <a:off x="1508760" y="4681728"/>
-            <a:ext cx="10134600" cy="1645920"/>
+            <a:off x="1097280" y="2990088"/>
+            <a:ext cx="10546080" cy="274320"/>
           </a:xfrm>
           <a:prstGeom prst="rect">
             <a:avLst/>
@@ -5696,67 +5519,29 @@
           </a:bodyPr>
           <a:lstStyle/>
           <a:p>
-            <a:pPr algn="l">
-              <a:lnSpc>
-                <a:spcPct val="110000"/>
-              </a:lnSpc>
-            </a:pPr>
-            <a:r>
-              <a:rPr sz="1400" b="0">
-                <a:solidFill>
-                  <a:srgbClr val="2D2D2D"/>
+            <a:pPr algn="l"/>
+            <a:r>
+              <a:rPr sz="1200" b="0">
+                <a:solidFill>
+                  <a:srgbClr val="6E6E6E"/>
                 </a:solidFill>
                 <a:latin typeface="Calibri"/>
               </a:rPr>
-              <a:t>Modelo paramétrico que fija la forma del hazard (ρ = 1,37 → desgaste) y permite proyectar el CLV más allá del horizonte observado.</a:t>
-            </a:r>
-          </a:p>
-        </p:txBody>
-      </p:sp>
-      <p:sp>
-        <p:nvSpPr>
-          <p:cNvPr id="12" name="TextBox 11"/>
-          <p:cNvSpPr txBox="1"/>
-          <p:nvPr/>
-        </p:nvSpPr>
-        <p:spPr>
-          <a:xfrm>
-            <a:off x="548640" y="5870448"/>
-            <a:ext cx="11064240" cy="320040"/>
-          </a:xfrm>
-          <a:prstGeom prst="rect">
-            <a:avLst/>
-          </a:prstGeom>
-          <a:noFill/>
-        </p:spPr>
-        <p:txBody>
-          <a:bodyPr wrap="square">
-            <a:spAutoFit/>
-          </a:bodyPr>
-          <a:lstStyle/>
-          <a:p>
-            <a:r>
-              <a:rPr sz="1000">
-                <a:solidFill>
-                  <a:srgbClr val="6E6E6E"/>
-                </a:solidFill>
-                <a:latin typeface="Calibri"/>
-              </a:rPr>
-              <a:t>DEFINICIONES puntos 11, 12, Fader, Hardie &amp; Lee (2005), JMR 42(4):415-430; lifelines.WeibullFitter. Extrapolar con Weibull, no con la cola plana de la KM.</a:t>
-            </a:r>
-          </a:p>
-        </p:txBody>
-      </p:sp>
-      <p:sp>
-        <p:nvSpPr>
-          <p:cNvPr id="13" name="Oval 12"/>
+              <a:t>Statsig — 23/06/2025  —  empezar por KM antes de Cox; el «cuándo» del churn</a:t>
+            </a:r>
+          </a:p>
+        </p:txBody>
+      </p:sp>
+      <p:sp>
+        <p:nvSpPr>
+          <p:cNvPr id="10" name="Oval 9"/>
           <p:cNvSpPr/>
           <p:nvPr/>
         </p:nvSpPr>
         <p:spPr>
           <a:xfrm>
-            <a:off x="548640" y="6473952"/>
-            <a:ext cx="100584" cy="100584"/>
+            <a:off x="548640" y="3602736"/>
+            <a:ext cx="384048" cy="384048"/>
           </a:xfrm>
           <a:prstGeom prst="ellipse">
             <a:avLst/>
@@ -5784,23 +5569,32 @@
           </a:fontRef>
         </p:style>
         <p:txBody>
-          <a:bodyPr rtlCol="0" anchor="ctr"/>
+          <a:bodyPr rtlCol="0" anchor="ctr" lIns="0" rIns="0" tIns="0" bIns="0"/>
           <a:lstStyle/>
           <a:p>
             <a:pPr algn="ctr"/>
-          </a:p>
-        </p:txBody>
-      </p:sp>
-      <p:sp>
-        <p:nvSpPr>
-          <p:cNvPr id="14" name="TextBox 13"/>
+            <a:r>
+              <a:rPr sz="1400" b="1">
+                <a:solidFill>
+                  <a:srgbClr val="FFFFFF"/>
+                </a:solidFill>
+                <a:latin typeface="Calibri"/>
+              </a:rPr>
+              <a:t>3</a:t>
+            </a:r>
+          </a:p>
+        </p:txBody>
+      </p:sp>
+      <p:sp>
+        <p:nvSpPr>
+          <p:cNvPr id="11" name="TextBox 10"/>
           <p:cNvSpPr txBox="1"/>
           <p:nvPr/>
         </p:nvSpPr>
         <p:spPr>
           <a:xfrm>
-            <a:off x="749808" y="6437376"/>
-            <a:ext cx="7772400" cy="274320"/>
+            <a:off x="1097280" y="3575304"/>
+            <a:ext cx="10546080" cy="320040"/>
           </a:xfrm>
           <a:prstGeom prst="rect">
             <a:avLst/>
@@ -5815,27 +5609,27 @@
           <a:p>
             <a:pPr algn="l"/>
             <a:r>
-              <a:rPr sz="900" b="0">
-                <a:solidFill>
-                  <a:srgbClr val="6E6E6E"/>
+              <a:rPr sz="1500" b="1">
+                <a:solidFill>
+                  <a:srgbClr val="2D2D2D"/>
                 </a:solidFill>
                 <a:latin typeface="Calibri"/>
               </a:rPr>
-              <a:t>S13 — Herramientas para la Ciencia de Datos, UPC</a:t>
-            </a:r>
-          </a:p>
-        </p:txBody>
-      </p:sp>
-      <p:sp>
-        <p:nvSpPr>
-          <p:cNvPr id="15" name="TextBox 14"/>
+              <a:t>Supervivencia + Cox para churn en telecom</a:t>
+            </a:r>
+          </a:p>
+        </p:txBody>
+      </p:sp>
+      <p:sp>
+        <p:nvSpPr>
+          <p:cNvPr id="12" name="TextBox 11"/>
           <p:cNvSpPr txBox="1"/>
           <p:nvPr/>
         </p:nvSpPr>
         <p:spPr>
           <a:xfrm>
-            <a:off x="10180320" y="6437376"/>
-            <a:ext cx="1463040" cy="274320"/>
+            <a:off x="1097280" y="3886200"/>
+            <a:ext cx="10546080" cy="274320"/>
           </a:xfrm>
           <a:prstGeom prst="rect">
             <a:avLst/>
@@ -5848,6 +5642,120 @@
           </a:bodyPr>
           <a:lstStyle/>
           <a:p>
+            <a:pPr algn="l"/>
+            <a:r>
+              <a:rPr sz="1200" b="0">
+                <a:solidFill>
+                  <a:srgbClr val="6E6E6E"/>
+                </a:solidFill>
+                <a:latin typeface="Calibri"/>
+              </a:rPr>
+              <a:t>IJLTEMAS 14(13) — 2025  —  replica el pipeline de la sesión: contrato y pago como drivers</a:t>
+            </a:r>
+          </a:p>
+        </p:txBody>
+      </p:sp>
+      <p:sp>
+        <p:nvSpPr>
+          <p:cNvPr id="13" name="Oval 12"/>
+          <p:cNvSpPr/>
+          <p:nvPr/>
+        </p:nvSpPr>
+        <p:spPr>
+          <a:xfrm>
+            <a:off x="548640" y="6473952"/>
+            <a:ext cx="100584" cy="100584"/>
+          </a:xfrm>
+          <a:prstGeom prst="ellipse">
+            <a:avLst/>
+          </a:prstGeom>
+          <a:solidFill>
+            <a:srgbClr val="E4002B"/>
+          </a:solidFill>
+          <a:ln>
+            <a:noFill/>
+          </a:ln>
+          <a:effectLst/>
+        </p:spPr>
+        <p:style>
+          <a:lnRef idx="1">
+            <a:schemeClr val="accent1"/>
+          </a:lnRef>
+          <a:fillRef idx="3">
+            <a:schemeClr val="accent1"/>
+          </a:fillRef>
+          <a:effectRef idx="2">
+            <a:schemeClr val="accent1"/>
+          </a:effectRef>
+          <a:fontRef idx="minor">
+            <a:schemeClr val="lt1"/>
+          </a:fontRef>
+        </p:style>
+        <p:txBody>
+          <a:bodyPr rtlCol="0" anchor="ctr"/>
+          <a:lstStyle/>
+          <a:p>
+            <a:pPr algn="ctr"/>
+          </a:p>
+        </p:txBody>
+      </p:sp>
+      <p:sp>
+        <p:nvSpPr>
+          <p:cNvPr id="14" name="TextBox 13"/>
+          <p:cNvSpPr txBox="1"/>
+          <p:nvPr/>
+        </p:nvSpPr>
+        <p:spPr>
+          <a:xfrm>
+            <a:off x="749808" y="6437376"/>
+            <a:ext cx="7772400" cy="274320"/>
+          </a:xfrm>
+          <a:prstGeom prst="rect">
+            <a:avLst/>
+          </a:prstGeom>
+          <a:noFill/>
+        </p:spPr>
+        <p:txBody>
+          <a:bodyPr wrap="square" anchor="t" lIns="0" rIns="0" tIns="0" bIns="0">
+            <a:spAutoFit/>
+          </a:bodyPr>
+          <a:lstStyle/>
+          <a:p>
+            <a:pPr algn="l"/>
+            <a:r>
+              <a:rPr sz="900" b="0">
+                <a:solidFill>
+                  <a:srgbClr val="6E6E6E"/>
+                </a:solidFill>
+                <a:latin typeface="Calibri"/>
+              </a:rPr>
+              <a:t>S13 — Herramientas para la Ciencia de Datos, UPC</a:t>
+            </a:r>
+          </a:p>
+        </p:txBody>
+      </p:sp>
+      <p:sp>
+        <p:nvSpPr>
+          <p:cNvPr id="15" name="TextBox 14"/>
+          <p:cNvSpPr txBox="1"/>
+          <p:nvPr/>
+        </p:nvSpPr>
+        <p:spPr>
+          <a:xfrm>
+            <a:off x="10180320" y="6437376"/>
+            <a:ext cx="1463040" cy="274320"/>
+          </a:xfrm>
+          <a:prstGeom prst="rect">
+            <a:avLst/>
+          </a:prstGeom>
+          <a:noFill/>
+        </p:spPr>
+        <p:txBody>
+          <a:bodyPr wrap="square" anchor="t" lIns="0" rIns="0" tIns="0" bIns="0">
+            <a:spAutoFit/>
+          </a:bodyPr>
+          <a:lstStyle/>
+          <a:p>
             <a:pPr algn="r"/>
             <a:r>
               <a:rPr sz="900" b="0">
@@ -5856,7 +5764,7 @@
                 </a:solidFill>
                 <a:latin typeface="Calibri"/>
               </a:rPr>
-              <a:t>12 / 19</a:t>
+              <a:t>12 / 14</a:t>
             </a:r>
           </a:p>
         </p:txBody>
@@ -5896,7 +5804,7 @@
         <p:spPr>
           <a:xfrm>
             <a:off x="548640" y="411480"/>
-            <a:ext cx="11094720" cy="777240"/>
+            <a:ext cx="11094720" cy="292608"/>
           </a:xfrm>
           <a:prstGeom prst="rect">
             <a:avLst/>
@@ -5911,41 +5819,52 @@
           <a:p>
             <a:pPr algn="l"/>
             <a:r>
+              <a:rPr sz="1300" b="1">
+                <a:solidFill>
+                  <a:srgbClr val="9B1B30"/>
+                </a:solidFill>
+                <a:latin typeface="Calibri"/>
+              </a:rPr>
+              <a:t>BIBLIOGRAFÍA</a:t>
+            </a:r>
+          </a:p>
+        </p:txBody>
+      </p:sp>
+      <p:sp>
+        <p:nvSpPr>
+          <p:cNvPr id="3" name="TextBox 2"/>
+          <p:cNvSpPr txBox="1"/>
+          <p:nvPr/>
+        </p:nvSpPr>
+        <p:spPr>
+          <a:xfrm>
+            <a:off x="548640" y="731520"/>
+            <a:ext cx="11094720" cy="777240"/>
+          </a:xfrm>
+          <a:prstGeom prst="rect">
+            <a:avLst/>
+          </a:prstGeom>
+          <a:noFill/>
+        </p:spPr>
+        <p:txBody>
+          <a:bodyPr wrap="square" anchor="t" lIns="0" rIns="0" tIns="0" bIns="0">
+            <a:spAutoFit/>
+          </a:bodyPr>
+          <a:lstStyle/>
+          <a:p>
+            <a:pPr algn="l"/>
+            <a:r>
               <a:rPr sz="4000" b="1">
                 <a:solidFill>
                   <a:srgbClr val="2D2D2D"/>
                 </a:solidFill>
                 <a:latin typeface="Calibri"/>
               </a:rPr>
-              <a:t>El contrato mensual pierde clientes mucho antes que el anual</a:t>
-            </a:r>
-          </a:p>
-        </p:txBody>
-      </p:sp>
-      <p:pic>
-        <p:nvPicPr>
-          <p:cNvPr id="3" name="Picture 2" descr="S13deck_km_telco.png"/>
-          <p:cNvPicPr>
-            <a:picLocks noChangeAspect="1"/>
-          </p:cNvPicPr>
-          <p:nvPr/>
-        </p:nvPicPr>
-        <p:blipFill>
-          <a:blip r:embed="rId2"/>
-          <a:stretch>
-            <a:fillRect/>
-          </a:stretch>
-        </p:blipFill>
-        <p:spPr>
-          <a:xfrm>
-            <a:off x="548640" y="1828800"/>
-            <a:ext cx="6949440" cy="3883511"/>
-          </a:xfrm>
-          <a:prstGeom prst="rect">
-            <a:avLst/>
-          </a:prstGeom>
-        </p:spPr>
-      </p:pic>
+              <a:t>Cuatro lecturas anclan la supervivencia y el CLV</a:t>
+            </a:r>
+          </a:p>
+        </p:txBody>
+      </p:sp>
       <p:sp>
         <p:nvSpPr>
           <p:cNvPr id="4" name="Oval 3"/>
@@ -5954,8 +5873,8 @@
         </p:nvSpPr>
         <p:spPr>
           <a:xfrm>
-            <a:off x="7955279" y="2011680"/>
-            <a:ext cx="548640" cy="548640"/>
+            <a:off x="548640" y="1810512"/>
+            <a:ext cx="384048" cy="384048"/>
           </a:xfrm>
           <a:prstGeom prst="ellipse">
             <a:avLst/>
@@ -5983,47 +5902,32 @@
           </a:fontRef>
         </p:style>
         <p:txBody>
-          <a:bodyPr rtlCol="0" anchor="ctr"/>
+          <a:bodyPr rtlCol="0" anchor="ctr" lIns="0" rIns="0" tIns="0" bIns="0"/>
           <a:lstStyle/>
           <a:p>
             <a:pPr algn="ctr"/>
-          </a:p>
-        </p:txBody>
-      </p:sp>
-      <p:pic>
-        <p:nvPicPr>
-          <p:cNvPr id="5" name="Picture 4" descr="lightbulb__FFFFFF.png"/>
-          <p:cNvPicPr>
-            <a:picLocks noChangeAspect="1"/>
-          </p:cNvPicPr>
-          <p:nvPr/>
-        </p:nvPicPr>
-        <p:blipFill>
-          <a:blip r:embed="rId3"/>
-          <a:stretch>
-            <a:fillRect/>
-          </a:stretch>
-        </p:blipFill>
-        <p:spPr>
-          <a:xfrm>
-            <a:off x="8108898" y="2165299"/>
-            <a:ext cx="241402" cy="241402"/>
-          </a:xfrm>
-          <a:prstGeom prst="rect">
-            <a:avLst/>
-          </a:prstGeom>
-        </p:spPr>
-      </p:pic>
-      <p:sp>
-        <p:nvSpPr>
-          <p:cNvPr id="6" name="TextBox 5"/>
+            <a:r>
+              <a:rPr sz="1400" b="1">
+                <a:solidFill>
+                  <a:srgbClr val="FFFFFF"/>
+                </a:solidFill>
+                <a:latin typeface="Calibri"/>
+              </a:rPr>
+              <a:t>1</a:t>
+            </a:r>
+          </a:p>
+        </p:txBody>
+      </p:sp>
+      <p:sp>
+        <p:nvSpPr>
+          <p:cNvPr id="5" name="TextBox 4"/>
           <p:cNvSpPr txBox="1"/>
           <p:nvPr/>
         </p:nvSpPr>
         <p:spPr>
           <a:xfrm>
-            <a:off x="8686800" y="2057400"/>
-            <a:ext cx="2926080" cy="548640"/>
+            <a:off x="1097280" y="1783080"/>
+            <a:ext cx="10546080" cy="320040"/>
           </a:xfrm>
           <a:prstGeom prst="rect">
             <a:avLst/>
@@ -6040,25 +5944,25 @@
             <a:r>
               <a:rPr sz="1500" b="1">
                 <a:solidFill>
-                  <a:srgbClr val="9B1B30"/>
+                  <a:srgbClr val="2D2D2D"/>
                 </a:solidFill>
                 <a:latin typeface="Calibri"/>
               </a:rPr>
-              <a:t>Lectura de negocio</a:t>
-            </a:r>
-          </a:p>
-        </p:txBody>
-      </p:sp>
-      <p:sp>
-        <p:nvSpPr>
-          <p:cNvPr id="7" name="TextBox 6"/>
+              <a:t>Kaplan &amp; Meier (1958) — Nonparametric Estimation</a:t>
+            </a:r>
+          </a:p>
+        </p:txBody>
+      </p:sp>
+      <p:sp>
+        <p:nvSpPr>
+          <p:cNvPr id="6" name="TextBox 5"/>
           <p:cNvSpPr txBox="1"/>
           <p:nvPr/>
         </p:nvSpPr>
         <p:spPr>
           <a:xfrm>
-            <a:off x="7955279" y="2880360"/>
-            <a:ext cx="3657600" cy="3108960"/>
+            <a:off x="1097280" y="2093976"/>
+            <a:ext cx="10546080" cy="274320"/>
           </a:xfrm>
           <a:prstGeom prst="rect">
             <a:avLst/>
@@ -6071,68 +5975,29 @@
           </a:bodyPr>
           <a:lstStyle/>
           <a:p>
-            <a:pPr algn="l">
-              <a:lnSpc>
-                <a:spcPct val="125000"/>
-              </a:lnSpc>
-            </a:pPr>
-            <a:r>
-              <a:rPr sz="1500" b="0">
-                <a:solidFill>
-                  <a:srgbClr val="2D2D2D"/>
+            <a:pPr algn="l"/>
+            <a:r>
+              <a:rPr sz="1200" b="0">
+                <a:solidFill>
+                  <a:srgbClr val="6E6E6E"/>
                 </a:solidFill>
                 <a:latin typeface="Calibri"/>
               </a:rPr>
-              <a:t>A 12 meses el mes a mes retiene 70 % frente a 99 % del anual: la ventana de riesgo es temprana.</a:t>
-            </a:r>
-          </a:p>
-        </p:txBody>
-      </p:sp>
-      <p:sp>
-        <p:nvSpPr>
-          <p:cNvPr id="8" name="TextBox 7"/>
-          <p:cNvSpPr txBox="1"/>
-          <p:nvPr/>
-        </p:nvSpPr>
-        <p:spPr>
-          <a:xfrm>
-            <a:off x="548640" y="5961888"/>
-            <a:ext cx="11094720" cy="292608"/>
-          </a:xfrm>
-          <a:prstGeom prst="rect">
-            <a:avLst/>
-          </a:prstGeom>
-          <a:noFill/>
-        </p:spPr>
-        <p:txBody>
-          <a:bodyPr wrap="square" anchor="t" lIns="0" rIns="0" tIns="0" bIns="0">
-            <a:spAutoFit/>
-          </a:bodyPr>
-          <a:lstStyle/>
-          <a:p>
-            <a:pPr algn="l"/>
-            <a:r>
-              <a:rPr sz="1000" b="0">
-                <a:solidFill>
-                  <a:srgbClr val="6E6E6E"/>
-                </a:solidFill>
-                <a:latin typeface="Calibri"/>
-              </a:rPr>
-              <a:t>Negocio (sustituto Telco, reúso S09), KM por contrato, tenure de los activos = tiempo censurado — venv/Excel (km_telco, clv_telco). Churn global 27 %.</a:t>
-            </a:r>
-          </a:p>
-        </p:txBody>
-      </p:sp>
-      <p:sp>
-        <p:nvSpPr>
-          <p:cNvPr id="9" name="Oval 8"/>
+              <a:t>JASA 53(282):457-481  —  el estimador producto-límite y la curva de retención</a:t>
+            </a:r>
+          </a:p>
+        </p:txBody>
+      </p:sp>
+      <p:sp>
+        <p:nvSpPr>
+          <p:cNvPr id="7" name="Oval 6"/>
           <p:cNvSpPr/>
           <p:nvPr/>
         </p:nvSpPr>
         <p:spPr>
           <a:xfrm>
-            <a:off x="548640" y="6473952"/>
-            <a:ext cx="100584" cy="100584"/>
+            <a:off x="548640" y="2706624"/>
+            <a:ext cx="384048" cy="384048"/>
           </a:xfrm>
           <a:prstGeom prst="ellipse">
             <a:avLst/>
@@ -6160,23 +6025,32 @@
           </a:fontRef>
         </p:style>
         <p:txBody>
-          <a:bodyPr rtlCol="0" anchor="ctr"/>
+          <a:bodyPr rtlCol="0" anchor="ctr" lIns="0" rIns="0" tIns="0" bIns="0"/>
           <a:lstStyle/>
           <a:p>
             <a:pPr algn="ctr"/>
-          </a:p>
-        </p:txBody>
-      </p:sp>
-      <p:sp>
-        <p:nvSpPr>
-          <p:cNvPr id="10" name="TextBox 9"/>
+            <a:r>
+              <a:rPr sz="1400" b="1">
+                <a:solidFill>
+                  <a:srgbClr val="FFFFFF"/>
+                </a:solidFill>
+                <a:latin typeface="Calibri"/>
+              </a:rPr>
+              <a:t>2</a:t>
+            </a:r>
+          </a:p>
+        </p:txBody>
+      </p:sp>
+      <p:sp>
+        <p:nvSpPr>
+          <p:cNvPr id="8" name="TextBox 7"/>
           <p:cNvSpPr txBox="1"/>
           <p:nvPr/>
         </p:nvSpPr>
         <p:spPr>
           <a:xfrm>
-            <a:off x="749808" y="6437376"/>
-            <a:ext cx="7772400" cy="274320"/>
+            <a:off x="1097280" y="2679192"/>
+            <a:ext cx="10546080" cy="320040"/>
           </a:xfrm>
           <a:prstGeom prst="rect">
             <a:avLst/>
@@ -6191,27 +6065,27 @@
           <a:p>
             <a:pPr algn="l"/>
             <a:r>
-              <a:rPr sz="900" b="0">
-                <a:solidFill>
-                  <a:srgbClr val="6E6E6E"/>
+              <a:rPr sz="1500" b="1">
+                <a:solidFill>
+                  <a:srgbClr val="2D2D2D"/>
                 </a:solidFill>
                 <a:latin typeface="Calibri"/>
               </a:rPr>
-              <a:t>S13 — Herramientas para la Ciencia de Datos, UPC</a:t>
-            </a:r>
-          </a:p>
-        </p:txBody>
-      </p:sp>
-      <p:sp>
-        <p:nvSpPr>
-          <p:cNvPr id="11" name="TextBox 10"/>
+              <a:t>Cox (1972) — Regression Models and Life-Tables</a:t>
+            </a:r>
+          </a:p>
+        </p:txBody>
+      </p:sp>
+      <p:sp>
+        <p:nvSpPr>
+          <p:cNvPr id="9" name="TextBox 8"/>
           <p:cNvSpPr txBox="1"/>
           <p:nvPr/>
         </p:nvSpPr>
         <p:spPr>
           <a:xfrm>
-            <a:off x="10180320" y="6437376"/>
-            <a:ext cx="1463040" cy="274320"/>
+            <a:off x="1097280" y="2990088"/>
+            <a:ext cx="10546080" cy="274320"/>
           </a:xfrm>
           <a:prstGeom prst="rect">
             <a:avLst/>
@@ -6224,6 +6098,366 @@
           </a:bodyPr>
           <a:lstStyle/>
           <a:p>
+            <a:pPr algn="l"/>
+            <a:r>
+              <a:rPr sz="1200" b="0">
+                <a:solidFill>
+                  <a:srgbClr val="6E6E6E"/>
+                </a:solidFill>
+                <a:latin typeface="Calibri"/>
+              </a:rPr>
+              <a:t>JRSS-B 34(2):187-220  —  el modelo de riesgos proporcionales y el hazard ratio</a:t>
+            </a:r>
+          </a:p>
+        </p:txBody>
+      </p:sp>
+      <p:sp>
+        <p:nvSpPr>
+          <p:cNvPr id="10" name="Oval 9"/>
+          <p:cNvSpPr/>
+          <p:nvPr/>
+        </p:nvSpPr>
+        <p:spPr>
+          <a:xfrm>
+            <a:off x="548640" y="3602736"/>
+            <a:ext cx="384048" cy="384048"/>
+          </a:xfrm>
+          <a:prstGeom prst="ellipse">
+            <a:avLst/>
+          </a:prstGeom>
+          <a:solidFill>
+            <a:srgbClr val="E4002B"/>
+          </a:solidFill>
+          <a:ln>
+            <a:noFill/>
+          </a:ln>
+          <a:effectLst/>
+        </p:spPr>
+        <p:style>
+          <a:lnRef idx="1">
+            <a:schemeClr val="accent1"/>
+          </a:lnRef>
+          <a:fillRef idx="3">
+            <a:schemeClr val="accent1"/>
+          </a:fillRef>
+          <a:effectRef idx="2">
+            <a:schemeClr val="accent1"/>
+          </a:effectRef>
+          <a:fontRef idx="minor">
+            <a:schemeClr val="lt1"/>
+          </a:fontRef>
+        </p:style>
+        <p:txBody>
+          <a:bodyPr rtlCol="0" anchor="ctr" lIns="0" rIns="0" tIns="0" bIns="0"/>
+          <a:lstStyle/>
+          <a:p>
+            <a:pPr algn="ctr"/>
+            <a:r>
+              <a:rPr sz="1400" b="1">
+                <a:solidFill>
+                  <a:srgbClr val="FFFFFF"/>
+                </a:solidFill>
+                <a:latin typeface="Calibri"/>
+              </a:rPr>
+              <a:t>3</a:t>
+            </a:r>
+          </a:p>
+        </p:txBody>
+      </p:sp>
+      <p:sp>
+        <p:nvSpPr>
+          <p:cNvPr id="11" name="TextBox 10"/>
+          <p:cNvSpPr txBox="1"/>
+          <p:nvPr/>
+        </p:nvSpPr>
+        <p:spPr>
+          <a:xfrm>
+            <a:off x="1097280" y="3575304"/>
+            <a:ext cx="10546080" cy="320040"/>
+          </a:xfrm>
+          <a:prstGeom prst="rect">
+            <a:avLst/>
+          </a:prstGeom>
+          <a:noFill/>
+        </p:spPr>
+        <p:txBody>
+          <a:bodyPr wrap="square" anchor="t" lIns="0" rIns="0" tIns="0" bIns="0">
+            <a:spAutoFit/>
+          </a:bodyPr>
+          <a:lstStyle/>
+          <a:p>
+            <a:pPr algn="l"/>
+            <a:r>
+              <a:rPr sz="1500" b="1">
+                <a:solidFill>
+                  <a:srgbClr val="2D2D2D"/>
+                </a:solidFill>
+                <a:latin typeface="Calibri"/>
+              </a:rPr>
+              <a:t>Therneau &amp; Grambsch (2000) — Modeling Survival Data</a:t>
+            </a:r>
+          </a:p>
+        </p:txBody>
+      </p:sp>
+      <p:sp>
+        <p:nvSpPr>
+          <p:cNvPr id="12" name="TextBox 11"/>
+          <p:cNvSpPr txBox="1"/>
+          <p:nvPr/>
+        </p:nvSpPr>
+        <p:spPr>
+          <a:xfrm>
+            <a:off x="1097280" y="3886200"/>
+            <a:ext cx="10546080" cy="274320"/>
+          </a:xfrm>
+          <a:prstGeom prst="rect">
+            <a:avLst/>
+          </a:prstGeom>
+          <a:noFill/>
+        </p:spPr>
+        <p:txBody>
+          <a:bodyPr wrap="square" anchor="t" lIns="0" rIns="0" tIns="0" bIns="0">
+            <a:spAutoFit/>
+          </a:bodyPr>
+          <a:lstStyle/>
+          <a:p>
+            <a:pPr algn="l"/>
+            <a:r>
+              <a:rPr sz="1200" b="0">
+                <a:solidFill>
+                  <a:srgbClr val="6E6E6E"/>
+                </a:solidFill>
+                <a:latin typeface="Calibri"/>
+              </a:rPr>
+              <a:t>Springer  —  diagnóstico de PH por residuales de Schoenfeld</a:t>
+            </a:r>
+          </a:p>
+        </p:txBody>
+      </p:sp>
+      <p:sp>
+        <p:nvSpPr>
+          <p:cNvPr id="13" name="Oval 12"/>
+          <p:cNvSpPr/>
+          <p:nvPr/>
+        </p:nvSpPr>
+        <p:spPr>
+          <a:xfrm>
+            <a:off x="548640" y="4498848"/>
+            <a:ext cx="384048" cy="384048"/>
+          </a:xfrm>
+          <a:prstGeom prst="ellipse">
+            <a:avLst/>
+          </a:prstGeom>
+          <a:solidFill>
+            <a:srgbClr val="E4002B"/>
+          </a:solidFill>
+          <a:ln>
+            <a:noFill/>
+          </a:ln>
+          <a:effectLst/>
+        </p:spPr>
+        <p:style>
+          <a:lnRef idx="1">
+            <a:schemeClr val="accent1"/>
+          </a:lnRef>
+          <a:fillRef idx="3">
+            <a:schemeClr val="accent1"/>
+          </a:fillRef>
+          <a:effectRef idx="2">
+            <a:schemeClr val="accent1"/>
+          </a:effectRef>
+          <a:fontRef idx="minor">
+            <a:schemeClr val="lt1"/>
+          </a:fontRef>
+        </p:style>
+        <p:txBody>
+          <a:bodyPr rtlCol="0" anchor="ctr" lIns="0" rIns="0" tIns="0" bIns="0"/>
+          <a:lstStyle/>
+          <a:p>
+            <a:pPr algn="ctr"/>
+            <a:r>
+              <a:rPr sz="1400" b="1">
+                <a:solidFill>
+                  <a:srgbClr val="FFFFFF"/>
+                </a:solidFill>
+                <a:latin typeface="Calibri"/>
+              </a:rPr>
+              <a:t>4</a:t>
+            </a:r>
+          </a:p>
+        </p:txBody>
+      </p:sp>
+      <p:sp>
+        <p:nvSpPr>
+          <p:cNvPr id="14" name="TextBox 13"/>
+          <p:cNvSpPr txBox="1"/>
+          <p:nvPr/>
+        </p:nvSpPr>
+        <p:spPr>
+          <a:xfrm>
+            <a:off x="1097280" y="4471416"/>
+            <a:ext cx="10546080" cy="320040"/>
+          </a:xfrm>
+          <a:prstGeom prst="rect">
+            <a:avLst/>
+          </a:prstGeom>
+          <a:noFill/>
+        </p:spPr>
+        <p:txBody>
+          <a:bodyPr wrap="square" anchor="t" lIns="0" rIns="0" tIns="0" bIns="0">
+            <a:spAutoFit/>
+          </a:bodyPr>
+          <a:lstStyle/>
+          <a:p>
+            <a:pPr algn="l"/>
+            <a:r>
+              <a:rPr sz="1500" b="1">
+                <a:solidFill>
+                  <a:srgbClr val="2D2D2D"/>
+                </a:solidFill>
+                <a:latin typeface="Calibri"/>
+              </a:rPr>
+              <a:t>Fader, Hardie &amp; Lee (2005) — RFM and CLV</a:t>
+            </a:r>
+          </a:p>
+        </p:txBody>
+      </p:sp>
+      <p:sp>
+        <p:nvSpPr>
+          <p:cNvPr id="15" name="TextBox 14"/>
+          <p:cNvSpPr txBox="1"/>
+          <p:nvPr/>
+        </p:nvSpPr>
+        <p:spPr>
+          <a:xfrm>
+            <a:off x="1097280" y="4782312"/>
+            <a:ext cx="10546080" cy="274320"/>
+          </a:xfrm>
+          <a:prstGeom prst="rect">
+            <a:avLst/>
+          </a:prstGeom>
+          <a:noFill/>
+        </p:spPr>
+        <p:txBody>
+          <a:bodyPr wrap="square" anchor="t" lIns="0" rIns="0" tIns="0" bIns="0">
+            <a:spAutoFit/>
+          </a:bodyPr>
+          <a:lstStyle/>
+          <a:p>
+            <a:pPr algn="l"/>
+            <a:r>
+              <a:rPr sz="1200" b="0">
+                <a:solidFill>
+                  <a:srgbClr val="6E6E6E"/>
+                </a:solidFill>
+                <a:latin typeface="Calibri"/>
+              </a:rPr>
+              <a:t>JMR 42(4):415-430  —  CLV desde probabilidades de retención/supervivencia</a:t>
+            </a:r>
+          </a:p>
+        </p:txBody>
+      </p:sp>
+      <p:sp>
+        <p:nvSpPr>
+          <p:cNvPr id="16" name="Oval 15"/>
+          <p:cNvSpPr/>
+          <p:nvPr/>
+        </p:nvSpPr>
+        <p:spPr>
+          <a:xfrm>
+            <a:off x="548640" y="6473952"/>
+            <a:ext cx="100584" cy="100584"/>
+          </a:xfrm>
+          <a:prstGeom prst="ellipse">
+            <a:avLst/>
+          </a:prstGeom>
+          <a:solidFill>
+            <a:srgbClr val="E4002B"/>
+          </a:solidFill>
+          <a:ln>
+            <a:noFill/>
+          </a:ln>
+          <a:effectLst/>
+        </p:spPr>
+        <p:style>
+          <a:lnRef idx="1">
+            <a:schemeClr val="accent1"/>
+          </a:lnRef>
+          <a:fillRef idx="3">
+            <a:schemeClr val="accent1"/>
+          </a:fillRef>
+          <a:effectRef idx="2">
+            <a:schemeClr val="accent1"/>
+          </a:effectRef>
+          <a:fontRef idx="minor">
+            <a:schemeClr val="lt1"/>
+          </a:fontRef>
+        </p:style>
+        <p:txBody>
+          <a:bodyPr rtlCol="0" anchor="ctr"/>
+          <a:lstStyle/>
+          <a:p>
+            <a:pPr algn="ctr"/>
+          </a:p>
+        </p:txBody>
+      </p:sp>
+      <p:sp>
+        <p:nvSpPr>
+          <p:cNvPr id="17" name="TextBox 16"/>
+          <p:cNvSpPr txBox="1"/>
+          <p:nvPr/>
+        </p:nvSpPr>
+        <p:spPr>
+          <a:xfrm>
+            <a:off x="749808" y="6437376"/>
+            <a:ext cx="7772400" cy="274320"/>
+          </a:xfrm>
+          <a:prstGeom prst="rect">
+            <a:avLst/>
+          </a:prstGeom>
+          <a:noFill/>
+        </p:spPr>
+        <p:txBody>
+          <a:bodyPr wrap="square" anchor="t" lIns="0" rIns="0" tIns="0" bIns="0">
+            <a:spAutoFit/>
+          </a:bodyPr>
+          <a:lstStyle/>
+          <a:p>
+            <a:pPr algn="l"/>
+            <a:r>
+              <a:rPr sz="900" b="0">
+                <a:solidFill>
+                  <a:srgbClr val="6E6E6E"/>
+                </a:solidFill>
+                <a:latin typeface="Calibri"/>
+              </a:rPr>
+              <a:t>S13 — Herramientas para la Ciencia de Datos, UPC</a:t>
+            </a:r>
+          </a:p>
+        </p:txBody>
+      </p:sp>
+      <p:sp>
+        <p:nvSpPr>
+          <p:cNvPr id="18" name="TextBox 17"/>
+          <p:cNvSpPr txBox="1"/>
+          <p:nvPr/>
+        </p:nvSpPr>
+        <p:spPr>
+          <a:xfrm>
+            <a:off x="10180320" y="6437376"/>
+            <a:ext cx="1463040" cy="274320"/>
+          </a:xfrm>
+          <a:prstGeom prst="rect">
+            <a:avLst/>
+          </a:prstGeom>
+          <a:noFill/>
+        </p:spPr>
+        <p:txBody>
+          <a:bodyPr wrap="square" anchor="t" lIns="0" rIns="0" tIns="0" bIns="0">
+            <a:spAutoFit/>
+          </a:bodyPr>
+          <a:lstStyle/>
+          <a:p>
             <a:pPr algn="r"/>
             <a:r>
               <a:rPr sz="900" b="0">
@@ -6232,7 +6466,7 @@
                 </a:solidFill>
                 <a:latin typeface="Calibri"/>
               </a:rPr>
-              <a:t>13 / 19</a:t>
+              <a:t>13 / 14</a:t>
             </a:r>
           </a:p>
         </p:txBody>
@@ -6272,7 +6506,7 @@
         <p:spPr>
           <a:xfrm>
             <a:off x="548640" y="411480"/>
-            <a:ext cx="11094720" cy="777240"/>
+            <a:ext cx="11094720" cy="292608"/>
           </a:xfrm>
           <a:prstGeom prst="rect">
             <a:avLst/>
@@ -6287,51 +6521,106 @@
           <a:p>
             <a:pPr algn="l"/>
             <a:r>
+              <a:rPr sz="1300" b="1">
+                <a:solidFill>
+                  <a:srgbClr val="9B1B30"/>
+                </a:solidFill>
+                <a:latin typeface="Calibri"/>
+              </a:rPr>
+              <a:t>CIERRE</a:t>
+            </a:r>
+          </a:p>
+        </p:txBody>
+      </p:sp>
+      <p:sp>
+        <p:nvSpPr>
+          <p:cNvPr id="3" name="TextBox 2"/>
+          <p:cNvSpPr txBox="1"/>
+          <p:nvPr/>
+        </p:nvSpPr>
+        <p:spPr>
+          <a:xfrm>
+            <a:off x="548640" y="731520"/>
+            <a:ext cx="11094720" cy="777240"/>
+          </a:xfrm>
+          <a:prstGeom prst="rect">
+            <a:avLst/>
+          </a:prstGeom>
+          <a:noFill/>
+        </p:spPr>
+        <p:txBody>
+          <a:bodyPr wrap="square" anchor="t" lIns="0" rIns="0" tIns="0" bIns="0">
+            <a:spAutoFit/>
+          </a:bodyPr>
+          <a:lstStyle/>
+          <a:p>
+            <a:pPr algn="l"/>
+            <a:r>
               <a:rPr sz="4000" b="1">
                 <a:solidFill>
                   <a:srgbClr val="2D2D2D"/>
                 </a:solidFill>
                 <a:latin typeface="Calibri"/>
               </a:rPr>
-              <a:t>Retener el contrato mensual vale menos: 1 804 frente a 3 105 dólares</a:t>
-            </a:r>
-          </a:p>
-        </p:txBody>
-      </p:sp>
-      <p:pic>
-        <p:nvPicPr>
-          <p:cNvPr id="3" name="Picture 2" descr="S13deck_clv.png"/>
-          <p:cNvPicPr>
-            <a:picLocks noChangeAspect="1"/>
-          </p:cNvPicPr>
-          <p:nvPr/>
-        </p:nvPicPr>
-        <p:blipFill>
-          <a:blip r:embed="rId2"/>
-          <a:stretch>
-            <a:fillRect/>
-          </a:stretch>
-        </p:blipFill>
-        <p:spPr>
-          <a:xfrm>
-            <a:off x="548640" y="1828800"/>
-            <a:ext cx="6949440" cy="3643844"/>
-          </a:xfrm>
-          <a:prstGeom prst="rect">
-            <a:avLst/>
-          </a:prstGeom>
-        </p:spPr>
-      </p:pic>
-      <p:sp>
-        <p:nvSpPr>
-          <p:cNvPr id="4" name="Oval 3"/>
+              <a:t>El entregable va del churn al CLV con recomendación por segmento</a:t>
+            </a:r>
+          </a:p>
+        </p:txBody>
+      </p:sp>
+      <p:sp>
+        <p:nvSpPr>
+          <p:cNvPr id="4" name="Rounded Rectangle 3"/>
           <p:cNvSpPr/>
           <p:nvPr/>
         </p:nvSpPr>
         <p:spPr>
           <a:xfrm>
-            <a:off x="7955279" y="2011680"/>
-            <a:ext cx="548640" cy="548640"/>
+            <a:off x="548640" y="1874519"/>
+            <a:ext cx="3454400" cy="4114800"/>
+          </a:xfrm>
+          <a:prstGeom prst="roundRect">
+            <a:avLst/>
+          </a:prstGeom>
+          <a:solidFill>
+            <a:srgbClr val="FCEDEE"/>
+          </a:solidFill>
+          <a:ln>
+            <a:noFill/>
+          </a:ln>
+          <a:effectLst/>
+        </p:spPr>
+        <p:style>
+          <a:lnRef idx="1">
+            <a:schemeClr val="accent1"/>
+          </a:lnRef>
+          <a:fillRef idx="3">
+            <a:schemeClr val="accent1"/>
+          </a:fillRef>
+          <a:effectRef idx="2">
+            <a:schemeClr val="accent1"/>
+          </a:effectRef>
+          <a:fontRef idx="minor">
+            <a:schemeClr val="lt1"/>
+          </a:fontRef>
+        </p:style>
+        <p:txBody>
+          <a:bodyPr rtlCol="0" anchor="ctr"/>
+          <a:lstStyle/>
+          <a:p>
+            <a:pPr algn="ctr"/>
+          </a:p>
+        </p:txBody>
+      </p:sp>
+      <p:sp>
+        <p:nvSpPr>
+          <p:cNvPr id="5" name="Oval 4"/>
+          <p:cNvSpPr/>
+          <p:nvPr/>
+        </p:nvSpPr>
+        <p:spPr>
+          <a:xfrm>
+            <a:off x="777240" y="2103119"/>
+            <a:ext cx="640080" cy="640080"/>
           </a:xfrm>
           <a:prstGeom prst="ellipse">
             <a:avLst/>
@@ -6359,37 +6648,22 @@
           </a:fontRef>
         </p:style>
         <p:txBody>
-          <a:bodyPr rtlCol="0" anchor="ctr"/>
+          <a:bodyPr rtlCol="0" anchor="ctr" lIns="0" rIns="0" tIns="0" bIns="0"/>
           <a:lstStyle/>
           <a:p>
             <a:pPr algn="ctr"/>
-          </a:p>
-        </p:txBody>
-      </p:sp>
-      <p:pic>
-        <p:nvPicPr>
-          <p:cNvPr id="5" name="Picture 4" descr="lightbulb__FFFFFF.png"/>
-          <p:cNvPicPr>
-            <a:picLocks noChangeAspect="1"/>
-          </p:cNvPicPr>
-          <p:nvPr/>
-        </p:nvPicPr>
-        <p:blipFill>
-          <a:blip r:embed="rId3"/>
-          <a:stretch>
-            <a:fillRect/>
-          </a:stretch>
-        </p:blipFill>
-        <p:spPr>
-          <a:xfrm>
-            <a:off x="8108898" y="2165299"/>
-            <a:ext cx="241402" cy="241402"/>
-          </a:xfrm>
-          <a:prstGeom prst="rect">
-            <a:avLst/>
-          </a:prstGeom>
-        </p:spPr>
-      </p:pic>
+            <a:r>
+              <a:rPr sz="2000" b="1">
+                <a:solidFill>
+                  <a:srgbClr val="FFFFFF"/>
+                </a:solidFill>
+                <a:latin typeface="Calibri"/>
+              </a:rPr>
+              <a:t>✓</a:t>
+            </a:r>
+          </a:p>
+        </p:txBody>
+      </p:sp>
       <p:sp>
         <p:nvSpPr>
           <p:cNvPr id="6" name="TextBox 5"/>
@@ -6398,8 +6672,8 @@
         </p:nvSpPr>
         <p:spPr>
           <a:xfrm>
-            <a:off x="8686800" y="2057400"/>
-            <a:ext cx="2926080" cy="548640"/>
+            <a:off x="777240" y="2926079"/>
+            <a:ext cx="2997200" cy="640080"/>
           </a:xfrm>
           <a:prstGeom prst="rect">
             <a:avLst/>
@@ -6414,13 +6688,13 @@
           <a:p>
             <a:pPr algn="l"/>
             <a:r>
-              <a:rPr sz="1500" b="1">
+              <a:rPr sz="1800" b="1">
                 <a:solidFill>
                   <a:srgbClr val="9B1B30"/>
                 </a:solidFill>
                 <a:latin typeface="Calibri"/>
               </a:rPr>
-              <a:t>Lectura de negocio</a:t>
+              <a:t>Entregable</a:t>
             </a:r>
           </a:p>
         </p:txBody>
@@ -6433,8 +6707,8 @@
         </p:nvSpPr>
         <p:spPr>
           <a:xfrm>
-            <a:off x="7955279" y="2880360"/>
-            <a:ext cx="3657600" cy="3108960"/>
+            <a:off x="777240" y="3611879"/>
+            <a:ext cx="2997200" cy="1645920"/>
           </a:xfrm>
           <a:prstGeom prst="rect">
             <a:avLst/>
@@ -6449,53 +6723,62 @@
           <a:p>
             <a:pPr algn="l">
               <a:lnSpc>
-                <a:spcPct val="125000"/>
+                <a:spcPct val="115000"/>
               </a:lnSpc>
             </a:pPr>
             <a:r>
-              <a:rPr sz="1500" b="0">
+              <a:rPr sz="1300" b="0">
                 <a:solidFill>
                   <a:srgbClr val="2D2D2D"/>
                 </a:solidFill>
                 <a:latin typeface="Calibri"/>
               </a:rPr>
-              <a:t>A igual margen, la baja retención casi divide el valor entre dos: lo determina la retención, no el precio.</a:t>
-            </a:r>
-          </a:p>
-        </p:txBody>
-      </p:sp>
-      <p:sp>
-        <p:nvSpPr>
-          <p:cNvPr id="8" name="TextBox 7"/>
-          <p:cNvSpPr txBox="1"/>
-          <p:nvPr/>
-        </p:nvSpPr>
-        <p:spPr>
-          <a:xfrm>
-            <a:off x="548640" y="5961888"/>
-            <a:ext cx="11094720" cy="292608"/>
-          </a:xfrm>
-          <a:prstGeom prst="rect">
-            <a:avLst/>
-          </a:prstGeom>
-          <a:noFill/>
-        </p:spPr>
-        <p:txBody>
-          <a:bodyPr wrap="square" anchor="t" lIns="0" rIns="0" tIns="0" bIns="0">
-            <a:spAutoFit/>
-          </a:bodyPr>
-          <a:lstStyle/>
-          <a:p>
-            <a:pPr algn="l"/>
-            <a:r>
-              <a:rPr sz="1000" b="0">
-                <a:solidFill>
-                  <a:srgbClr val="6E6E6E"/>
-                </a:solidFill>
-                <a:latin typeface="Calibri"/>
-              </a:rPr>
-              <a:t>CLV = Σ m·S(t)/(1+d)ᵗ a 72 meses — mes a mes 1 804 / un año 3 105 / dos años 3 097 USD — venv/Excel (clv_telco).</a:t>
-            </a:r>
+              <a:t>Análisis de supervivencia del churn: KM por segmento, Cox con HR e IC, diagnóstico de PH y CLV con recomendación.</a:t>
+            </a:r>
+          </a:p>
+        </p:txBody>
+      </p:sp>
+      <p:sp>
+        <p:nvSpPr>
+          <p:cNvPr id="8" name="Rounded Rectangle 7"/>
+          <p:cNvSpPr/>
+          <p:nvPr/>
+        </p:nvSpPr>
+        <p:spPr>
+          <a:xfrm>
+            <a:off x="4368800" y="1874519"/>
+            <a:ext cx="3454400" cy="4114800"/>
+          </a:xfrm>
+          <a:prstGeom prst="roundRect">
+            <a:avLst/>
+          </a:prstGeom>
+          <a:solidFill>
+            <a:srgbClr val="FCEDEE"/>
+          </a:solidFill>
+          <a:ln>
+            <a:noFill/>
+          </a:ln>
+          <a:effectLst/>
+        </p:spPr>
+        <p:style>
+          <a:lnRef idx="1">
+            <a:schemeClr val="accent1"/>
+          </a:lnRef>
+          <a:fillRef idx="3">
+            <a:schemeClr val="accent1"/>
+          </a:fillRef>
+          <a:effectRef idx="2">
+            <a:schemeClr val="accent1"/>
+          </a:effectRef>
+          <a:fontRef idx="minor">
+            <a:schemeClr val="lt1"/>
+          </a:fontRef>
+        </p:style>
+        <p:txBody>
+          <a:bodyPr rtlCol="0" anchor="ctr"/>
+          <a:lstStyle/>
+          <a:p>
+            <a:pPr algn="ctr"/>
           </a:p>
         </p:txBody>
       </p:sp>
@@ -6507,8 +6790,8 @@
         </p:nvSpPr>
         <p:spPr>
           <a:xfrm>
-            <a:off x="548640" y="6473952"/>
-            <a:ext cx="100584" cy="100584"/>
+            <a:off x="4597400" y="2103119"/>
+            <a:ext cx="640080" cy="640080"/>
           </a:xfrm>
           <a:prstGeom prst="ellipse">
             <a:avLst/>
@@ -6536,10 +6819,19 @@
           </a:fontRef>
         </p:style>
         <p:txBody>
-          <a:bodyPr rtlCol="0" anchor="ctr"/>
+          <a:bodyPr rtlCol="0" anchor="ctr" lIns="0" rIns="0" tIns="0" bIns="0"/>
           <a:lstStyle/>
           <a:p>
             <a:pPr algn="ctr"/>
+            <a:r>
+              <a:rPr sz="2000" b="1">
+                <a:solidFill>
+                  <a:srgbClr val="FFFFFF"/>
+                </a:solidFill>
+                <a:latin typeface="Calibri"/>
+              </a:rPr>
+              <a:t>→</a:t>
+            </a:r>
           </a:p>
         </p:txBody>
       </p:sp>
@@ -6551,8 +6843,8 @@
         </p:nvSpPr>
         <p:spPr>
           <a:xfrm>
-            <a:off x="749808" y="6437376"/>
-            <a:ext cx="7772400" cy="274320"/>
+            <a:off x="4597400" y="2926079"/>
+            <a:ext cx="2997200" cy="640080"/>
           </a:xfrm>
           <a:prstGeom prst="rect">
             <a:avLst/>
@@ -6567,13 +6859,13 @@
           <a:p>
             <a:pPr algn="l"/>
             <a:r>
-              <a:rPr sz="900" b="0">
-                <a:solidFill>
-                  <a:srgbClr val="6E6E6E"/>
+              <a:rPr sz="1800" b="1">
+                <a:solidFill>
+                  <a:srgbClr val="9B1B30"/>
                 </a:solidFill>
                 <a:latin typeface="Calibri"/>
               </a:rPr>
-              <a:t>S13 — Herramientas para la Ciencia de Datos, UPC</a:t>
+              <a:t>Evaluación</a:t>
             </a:r>
           </a:p>
         </p:txBody>
@@ -6586,8 +6878,8 @@
         </p:nvSpPr>
         <p:spPr>
           <a:xfrm>
-            <a:off x="10180320" y="6437376"/>
-            <a:ext cx="1463040" cy="274320"/>
+            <a:off x="4597400" y="3611879"/>
+            <a:ext cx="2997200" cy="1645920"/>
           </a:xfrm>
           <a:prstGeom prst="rect">
             <a:avLst/>
@@ -6600,125 +6892,77 @@
           </a:bodyPr>
           <a:lstStyle/>
           <a:p>
-            <a:pPr algn="r"/>
-            <a:r>
-              <a:rPr sz="900" b="0">
-                <a:solidFill>
-                  <a:srgbClr val="6E6E6E"/>
+            <a:pPr algn="l">
+              <a:lnSpc>
+                <a:spcPct val="115000"/>
+              </a:lnSpc>
+            </a:pPr>
+            <a:r>
+              <a:rPr sz="1300" b="0">
+                <a:solidFill>
+                  <a:srgbClr val="2D2D2D"/>
                 </a:solidFill>
                 <a:latin typeface="Calibri"/>
               </a:rPr>
-              <a:t>14 / 19</a:t>
-            </a:r>
-          </a:p>
-        </p:txBody>
-      </p:sp>
-    </p:spTree>
-  </p:cSld>
-  <p:clrMapOvr>
-    <a:masterClrMapping/>
-  </p:clrMapOvr>
-</p:sld>
-</file>
-
-<file path=ppt/slides/slide15.xml><?xml version="1.0" encoding="utf-8"?>
-<p:sld xmlns:a="http://schemas.openxmlformats.org/drawingml/2006/main" xmlns:p="http://schemas.openxmlformats.org/presentationml/2006/main" xmlns:r="http://schemas.openxmlformats.org/officeDocument/2006/relationships">
-  <p:cSld>
-    <p:bg>
-      <p:bgPr>
-        <a:solidFill>
-          <a:srgbClr val="FFFFFF"/>
-        </a:solidFill>
-        <a:effectLst/>
-      </p:bgPr>
-    </p:bg>
-    <p:spTree>
-      <p:nvGrpSpPr>
-        <p:cNvPr id="1" name=""/>
-        <p:cNvGrpSpPr/>
-        <p:nvPr/>
-      </p:nvGrpSpPr>
-      <p:grpSpPr/>
-      <p:sp>
-        <p:nvSpPr>
-          <p:cNvPr id="2" name="TextBox 1"/>
-          <p:cNvSpPr txBox="1"/>
-          <p:nvPr/>
-        </p:nvSpPr>
-        <p:spPr>
-          <a:xfrm>
-            <a:off x="548640" y="411480"/>
-            <a:ext cx="11094720" cy="292608"/>
-          </a:xfrm>
-          <a:prstGeom prst="rect">
-            <a:avLst/>
-          </a:prstGeom>
-          <a:noFill/>
-        </p:spPr>
-        <p:txBody>
-          <a:bodyPr wrap="square" anchor="t" lIns="0" rIns="0" tIns="0" bIns="0">
-            <a:spAutoFit/>
-          </a:bodyPr>
-          <a:lstStyle/>
-          <a:p>
-            <a:pPr algn="l"/>
-            <a:r>
-              <a:rPr sz="1300" b="1">
-                <a:solidFill>
-                  <a:srgbClr val="9B1B30"/>
-                </a:solidFill>
-                <a:latin typeface="Calibri"/>
-              </a:rPr>
-              <a:t>ACTUALIDAD</a:t>
-            </a:r>
-          </a:p>
-        </p:txBody>
-      </p:sp>
-      <p:sp>
-        <p:nvSpPr>
-          <p:cNvPr id="3" name="TextBox 2"/>
-          <p:cNvSpPr txBox="1"/>
-          <p:nvPr/>
-        </p:nvSpPr>
-        <p:spPr>
-          <a:xfrm>
-            <a:off x="548640" y="731520"/>
-            <a:ext cx="11094720" cy="777240"/>
-          </a:xfrm>
-          <a:prstGeom prst="rect">
-            <a:avLst/>
-          </a:prstGeom>
-          <a:noFill/>
-        </p:spPr>
-        <p:txBody>
-          <a:bodyPr wrap="square" anchor="t" lIns="0" rIns="0" tIns="0" bIns="0">
-            <a:spAutoFit/>
-          </a:bodyPr>
-          <a:lstStyle/>
-          <a:p>
-            <a:pPr algn="l"/>
-            <a:r>
-              <a:rPr sz="4000" b="1">
-                <a:solidFill>
-                  <a:srgbClr val="2D2D2D"/>
-                </a:solidFill>
-                <a:latin typeface="Calibri"/>
-              </a:rPr>
-              <a:t>La supervivencia ya decide la retención de clientes</a:t>
-            </a:r>
-          </a:p>
-        </p:txBody>
-      </p:sp>
-      <p:sp>
-        <p:nvSpPr>
-          <p:cNvPr id="4" name="Oval 3"/>
+              <a:t>Control corto de cierre + banco [S13]. Rúbrica vigesimal 0-20.</a:t>
+            </a:r>
+          </a:p>
+        </p:txBody>
+      </p:sp>
+      <p:sp>
+        <p:nvSpPr>
+          <p:cNvPr id="12" name="Rounded Rectangle 11"/>
           <p:cNvSpPr/>
           <p:nvPr/>
         </p:nvSpPr>
         <p:spPr>
           <a:xfrm>
-            <a:off x="548640" y="1810512"/>
-            <a:ext cx="384048" cy="384048"/>
+            <a:off x="8188960" y="1874519"/>
+            <a:ext cx="3454400" cy="4114800"/>
+          </a:xfrm>
+          <a:prstGeom prst="roundRect">
+            <a:avLst/>
+          </a:prstGeom>
+          <a:solidFill>
+            <a:srgbClr val="FCEDEE"/>
+          </a:solidFill>
+          <a:ln>
+            <a:noFill/>
+          </a:ln>
+          <a:effectLst/>
+        </p:spPr>
+        <p:style>
+          <a:lnRef idx="1">
+            <a:schemeClr val="accent1"/>
+          </a:lnRef>
+          <a:fillRef idx="3">
+            <a:schemeClr val="accent1"/>
+          </a:fillRef>
+          <a:effectRef idx="2">
+            <a:schemeClr val="accent1"/>
+          </a:effectRef>
+          <a:fontRef idx="minor">
+            <a:schemeClr val="lt1"/>
+          </a:fontRef>
+        </p:style>
+        <p:txBody>
+          <a:bodyPr rtlCol="0" anchor="ctr"/>
+          <a:lstStyle/>
+          <a:p>
+            <a:pPr algn="ctr"/>
+          </a:p>
+        </p:txBody>
+      </p:sp>
+      <p:sp>
+        <p:nvSpPr>
+          <p:cNvPr id="13" name="Oval 12"/>
+          <p:cNvSpPr/>
+          <p:nvPr/>
+        </p:nvSpPr>
+        <p:spPr>
+          <a:xfrm>
+            <a:off x="8417560" y="2103119"/>
+            <a:ext cx="640080" cy="640080"/>
           </a:xfrm>
           <a:prstGeom prst="ellipse">
             <a:avLst/>
@@ -6751,27 +6995,27 @@
           <a:p>
             <a:pPr algn="ctr"/>
             <a:r>
-              <a:rPr sz="1400" b="1">
+              <a:rPr sz="2000" b="1">
                 <a:solidFill>
                   <a:srgbClr val="FFFFFF"/>
                 </a:solidFill>
                 <a:latin typeface="Calibri"/>
               </a:rPr>
-              <a:t>1</a:t>
-            </a:r>
-          </a:p>
-        </p:txBody>
-      </p:sp>
-      <p:sp>
-        <p:nvSpPr>
-          <p:cNvPr id="5" name="TextBox 4"/>
+              <a:t>★</a:t>
+            </a:r>
+          </a:p>
+        </p:txBody>
+      </p:sp>
+      <p:sp>
+        <p:nvSpPr>
+          <p:cNvPr id="14" name="TextBox 13"/>
           <p:cNvSpPr txBox="1"/>
           <p:nvPr/>
         </p:nvSpPr>
         <p:spPr>
           <a:xfrm>
-            <a:off x="1097280" y="1783080"/>
-            <a:ext cx="10546080" cy="320040"/>
+            <a:off x="8417560" y="2926079"/>
+            <a:ext cx="2997200" cy="640080"/>
           </a:xfrm>
           <a:prstGeom prst="rect">
             <a:avLst/>
@@ -6786,27 +7030,27 @@
           <a:p>
             <a:pPr algn="l"/>
             <a:r>
-              <a:rPr sz="1500" b="1">
-                <a:solidFill>
-                  <a:srgbClr val="2D2D2D"/>
+              <a:rPr sz="1800" b="1">
+                <a:solidFill>
+                  <a:srgbClr val="9B1B30"/>
                 </a:solidFill>
                 <a:latin typeface="Calibri"/>
               </a:rPr>
-              <a:t>La retención cae por ventana de facturación (benchmark 2026)</a:t>
-            </a:r>
-          </a:p>
-        </p:txBody>
-      </p:sp>
-      <p:sp>
-        <p:nvSpPr>
-          <p:cNvPr id="6" name="TextBox 5"/>
+              <a:t>Próxima sesión</a:t>
+            </a:r>
+          </a:p>
+        </p:txBody>
+      </p:sp>
+      <p:sp>
+        <p:nvSpPr>
+          <p:cNvPr id="15" name="TextBox 14"/>
           <p:cNvSpPr txBox="1"/>
           <p:nvPr/>
         </p:nvSpPr>
         <p:spPr>
           <a:xfrm>
-            <a:off x="1097280" y="2093976"/>
-            <a:ext cx="10546080" cy="274320"/>
+            <a:off x="8417560" y="3611879"/>
+            <a:ext cx="2997200" cy="1645920"/>
           </a:xfrm>
           <a:prstGeom prst="rect">
             <a:avLst/>
@@ -6819,29 +7063,33 @@
           </a:bodyPr>
           <a:lstStyle/>
           <a:p>
-            <a:pPr algn="l"/>
-            <a:r>
-              <a:rPr sz="1200" b="0">
-                <a:solidFill>
-                  <a:srgbClr val="6E6E6E"/>
+            <a:pPr algn="l">
+              <a:lnSpc>
+                <a:spcPct val="115000"/>
+              </a:lnSpc>
+            </a:pPr>
+            <a:r>
+              <a:rPr sz="1300" b="0">
+                <a:solidFill>
+                  <a:srgbClr val="2D2D2D"/>
                 </a:solidFill>
                 <a:latin typeface="Calibri"/>
               </a:rPr>
-              <a:t>Eightx — 29/05/2026  —  curvas de supervivencia por contrato → CLV por segmento</a:t>
-            </a:r>
-          </a:p>
-        </p:txBody>
-      </p:sp>
-      <p:sp>
-        <p:nvSpPr>
-          <p:cNvPr id="7" name="Oval 6"/>
+              <a:t>S14 — Sistemas de recomendación — solo se nombra como conexión.</a:t>
+            </a:r>
+          </a:p>
+        </p:txBody>
+      </p:sp>
+      <p:sp>
+        <p:nvSpPr>
+          <p:cNvPr id="16" name="Oval 15"/>
           <p:cNvSpPr/>
           <p:nvPr/>
         </p:nvSpPr>
         <p:spPr>
           <a:xfrm>
-            <a:off x="548640" y="2706624"/>
-            <a:ext cx="384048" cy="384048"/>
+            <a:off x="548640" y="6473952"/>
+            <a:ext cx="100584" cy="100584"/>
           </a:xfrm>
           <a:prstGeom prst="ellipse">
             <a:avLst/>
@@ -6869,32 +7117,23 @@
           </a:fontRef>
         </p:style>
         <p:txBody>
-          <a:bodyPr rtlCol="0" anchor="ctr" lIns="0" rIns="0" tIns="0" bIns="0"/>
+          <a:bodyPr rtlCol="0" anchor="ctr"/>
           <a:lstStyle/>
           <a:p>
             <a:pPr algn="ctr"/>
-            <a:r>
-              <a:rPr sz="1400" b="1">
-                <a:solidFill>
-                  <a:srgbClr val="FFFFFF"/>
-                </a:solidFill>
-                <a:latin typeface="Calibri"/>
-              </a:rPr>
-              <a:t>2</a:t>
-            </a:r>
-          </a:p>
-        </p:txBody>
-      </p:sp>
-      <p:sp>
-        <p:nvSpPr>
-          <p:cNvPr id="8" name="TextBox 7"/>
+          </a:p>
+        </p:txBody>
+      </p:sp>
+      <p:sp>
+        <p:nvSpPr>
+          <p:cNvPr id="17" name="TextBox 16"/>
           <p:cNvSpPr txBox="1"/>
           <p:nvPr/>
         </p:nvSpPr>
         <p:spPr>
           <a:xfrm>
-            <a:off x="1097280" y="2679192"/>
-            <a:ext cx="10546080" cy="320040"/>
+            <a:off x="749808" y="6437376"/>
+            <a:ext cx="7772400" cy="274320"/>
           </a:xfrm>
           <a:prstGeom prst="rect">
             <a:avLst/>
@@ -6909,27 +7148,27 @@
           <a:p>
             <a:pPr algn="l"/>
             <a:r>
-              <a:rPr sz="1500" b="1">
-                <a:solidFill>
-                  <a:srgbClr val="2D2D2D"/>
+              <a:rPr sz="900" b="0">
+                <a:solidFill>
+                  <a:srgbClr val="6E6E6E"/>
                 </a:solidFill>
                 <a:latin typeface="Calibri"/>
               </a:rPr>
-              <a:t>Kaplan-Meier, hazard y Cox como métrica de producto</a:t>
-            </a:r>
-          </a:p>
-        </p:txBody>
-      </p:sp>
-      <p:sp>
-        <p:nvSpPr>
-          <p:cNvPr id="9" name="TextBox 8"/>
+              <a:t>S13 — Herramientas para la Ciencia de Datos, UPC</a:t>
+            </a:r>
+          </a:p>
+        </p:txBody>
+      </p:sp>
+      <p:sp>
+        <p:nvSpPr>
+          <p:cNvPr id="18" name="TextBox 17"/>
           <p:cNvSpPr txBox="1"/>
           <p:nvPr/>
         </p:nvSpPr>
         <p:spPr>
           <a:xfrm>
-            <a:off x="1097280" y="2990088"/>
-            <a:ext cx="10546080" cy="274320"/>
+            <a:off x="10180320" y="6437376"/>
+            <a:ext cx="1463040" cy="274320"/>
           </a:xfrm>
           <a:prstGeom prst="rect">
             <a:avLst/>
@@ -6942,2300 +7181,15 @@
           </a:bodyPr>
           <a:lstStyle/>
           <a:p>
-            <a:pPr algn="l"/>
-            <a:r>
-              <a:rPr sz="1200" b="0">
+            <a:pPr algn="r"/>
+            <a:r>
+              <a:rPr sz="900" b="0">
                 <a:solidFill>
                   <a:srgbClr val="6E6E6E"/>
                 </a:solidFill>
                 <a:latin typeface="Calibri"/>
               </a:rPr>
-              <a:t>Statsig — 23/06/2025  —  empezar por KM antes de Cox; el «cuándo» del churn</a:t>
-            </a:r>
-          </a:p>
-        </p:txBody>
-      </p:sp>
-      <p:sp>
-        <p:nvSpPr>
-          <p:cNvPr id="10" name="Oval 9"/>
-          <p:cNvSpPr/>
-          <p:nvPr/>
-        </p:nvSpPr>
-        <p:spPr>
-          <a:xfrm>
-            <a:off x="548640" y="3602736"/>
-            <a:ext cx="384048" cy="384048"/>
-          </a:xfrm>
-          <a:prstGeom prst="ellipse">
-            <a:avLst/>
-          </a:prstGeom>
-          <a:solidFill>
-            <a:srgbClr val="E4002B"/>
-          </a:solidFill>
-          <a:ln>
-            <a:noFill/>
-          </a:ln>
-          <a:effectLst/>
-        </p:spPr>
-        <p:style>
-          <a:lnRef idx="1">
-            <a:schemeClr val="accent1"/>
-          </a:lnRef>
-          <a:fillRef idx="3">
-            <a:schemeClr val="accent1"/>
-          </a:fillRef>
-          <a:effectRef idx="2">
-            <a:schemeClr val="accent1"/>
-          </a:effectRef>
-          <a:fontRef idx="minor">
-            <a:schemeClr val="lt1"/>
-          </a:fontRef>
-        </p:style>
-        <p:txBody>
-          <a:bodyPr rtlCol="0" anchor="ctr" lIns="0" rIns="0" tIns="0" bIns="0"/>
-          <a:lstStyle/>
-          <a:p>
-            <a:pPr algn="ctr"/>
-            <a:r>
-              <a:rPr sz="1400" b="1">
-                <a:solidFill>
-                  <a:srgbClr val="FFFFFF"/>
-                </a:solidFill>
-                <a:latin typeface="Calibri"/>
-              </a:rPr>
-              <a:t>3</a:t>
-            </a:r>
-          </a:p>
-        </p:txBody>
-      </p:sp>
-      <p:sp>
-        <p:nvSpPr>
-          <p:cNvPr id="11" name="TextBox 10"/>
-          <p:cNvSpPr txBox="1"/>
-          <p:nvPr/>
-        </p:nvSpPr>
-        <p:spPr>
-          <a:xfrm>
-            <a:off x="1097280" y="3575304"/>
-            <a:ext cx="10546080" cy="320040"/>
-          </a:xfrm>
-          <a:prstGeom prst="rect">
-            <a:avLst/>
-          </a:prstGeom>
-          <a:noFill/>
-        </p:spPr>
-        <p:txBody>
-          <a:bodyPr wrap="square" anchor="t" lIns="0" rIns="0" tIns="0" bIns="0">
-            <a:spAutoFit/>
-          </a:bodyPr>
-          <a:lstStyle/>
-          <a:p>
-            <a:pPr algn="l"/>
-            <a:r>
-              <a:rPr sz="1500" b="1">
-                <a:solidFill>
-                  <a:srgbClr val="2D2D2D"/>
-                </a:solidFill>
-                <a:latin typeface="Calibri"/>
-              </a:rPr>
-              <a:t>Supervivencia + Cox para churn en telecom</a:t>
-            </a:r>
-          </a:p>
-        </p:txBody>
-      </p:sp>
-      <p:sp>
-        <p:nvSpPr>
-          <p:cNvPr id="12" name="TextBox 11"/>
-          <p:cNvSpPr txBox="1"/>
-          <p:nvPr/>
-        </p:nvSpPr>
-        <p:spPr>
-          <a:xfrm>
-            <a:off x="1097280" y="3886200"/>
-            <a:ext cx="10546080" cy="274320"/>
-          </a:xfrm>
-          <a:prstGeom prst="rect">
-            <a:avLst/>
-          </a:prstGeom>
-          <a:noFill/>
-        </p:spPr>
-        <p:txBody>
-          <a:bodyPr wrap="square" anchor="t" lIns="0" rIns="0" tIns="0" bIns="0">
-            <a:spAutoFit/>
-          </a:bodyPr>
-          <a:lstStyle/>
-          <a:p>
-            <a:pPr algn="l"/>
-            <a:r>
-              <a:rPr sz="1200" b="0">
-                <a:solidFill>
-                  <a:srgbClr val="6E6E6E"/>
-                </a:solidFill>
-                <a:latin typeface="Calibri"/>
-              </a:rPr>
-              <a:t>IJLTEMAS 14(13) — 2025  —  replica el pipeline de la sesión: contrato y pago como drivers</a:t>
-            </a:r>
-          </a:p>
-        </p:txBody>
-      </p:sp>
-      <p:sp>
-        <p:nvSpPr>
-          <p:cNvPr id="13" name="Oval 12"/>
-          <p:cNvSpPr/>
-          <p:nvPr/>
-        </p:nvSpPr>
-        <p:spPr>
-          <a:xfrm>
-            <a:off x="548640" y="6473952"/>
-            <a:ext cx="100584" cy="100584"/>
-          </a:xfrm>
-          <a:prstGeom prst="ellipse">
-            <a:avLst/>
-          </a:prstGeom>
-          <a:solidFill>
-            <a:srgbClr val="E4002B"/>
-          </a:solidFill>
-          <a:ln>
-            <a:noFill/>
-          </a:ln>
-          <a:effectLst/>
-        </p:spPr>
-        <p:style>
-          <a:lnRef idx="1">
-            <a:schemeClr val="accent1"/>
-          </a:lnRef>
-          <a:fillRef idx="3">
-            <a:schemeClr val="accent1"/>
-          </a:fillRef>
-          <a:effectRef idx="2">
-            <a:schemeClr val="accent1"/>
-          </a:effectRef>
-          <a:fontRef idx="minor">
-            <a:schemeClr val="lt1"/>
-          </a:fontRef>
-        </p:style>
-        <p:txBody>
-          <a:bodyPr rtlCol="0" anchor="ctr"/>
-          <a:lstStyle/>
-          <a:p>
-            <a:pPr algn="ctr"/>
-          </a:p>
-        </p:txBody>
-      </p:sp>
-      <p:sp>
-        <p:nvSpPr>
-          <p:cNvPr id="14" name="TextBox 13"/>
-          <p:cNvSpPr txBox="1"/>
-          <p:nvPr/>
-        </p:nvSpPr>
-        <p:spPr>
-          <a:xfrm>
-            <a:off x="749808" y="6437376"/>
-            <a:ext cx="7772400" cy="274320"/>
-          </a:xfrm>
-          <a:prstGeom prst="rect">
-            <a:avLst/>
-          </a:prstGeom>
-          <a:noFill/>
-        </p:spPr>
-        <p:txBody>
-          <a:bodyPr wrap="square" anchor="t" lIns="0" rIns="0" tIns="0" bIns="0">
-            <a:spAutoFit/>
-          </a:bodyPr>
-          <a:lstStyle/>
-          <a:p>
-            <a:pPr algn="l"/>
-            <a:r>
-              <a:rPr sz="900" b="0">
-                <a:solidFill>
-                  <a:srgbClr val="6E6E6E"/>
-                </a:solidFill>
-                <a:latin typeface="Calibri"/>
-              </a:rPr>
-              <a:t>S13 — Herramientas para la Ciencia de Datos, UPC</a:t>
-            </a:r>
-          </a:p>
-        </p:txBody>
-      </p:sp>
-      <p:sp>
-        <p:nvSpPr>
-          <p:cNvPr id="15" name="TextBox 14"/>
-          <p:cNvSpPr txBox="1"/>
-          <p:nvPr/>
-        </p:nvSpPr>
-        <p:spPr>
-          <a:xfrm>
-            <a:off x="10180320" y="6437376"/>
-            <a:ext cx="1463040" cy="274320"/>
-          </a:xfrm>
-          <a:prstGeom prst="rect">
-            <a:avLst/>
-          </a:prstGeom>
-          <a:noFill/>
-        </p:spPr>
-        <p:txBody>
-          <a:bodyPr wrap="square" anchor="t" lIns="0" rIns="0" tIns="0" bIns="0">
-            <a:spAutoFit/>
-          </a:bodyPr>
-          <a:lstStyle/>
-          <a:p>
-            <a:pPr algn="r"/>
-            <a:r>
-              <a:rPr sz="900" b="0">
-                <a:solidFill>
-                  <a:srgbClr val="6E6E6E"/>
-                </a:solidFill>
-                <a:latin typeface="Calibri"/>
-              </a:rPr>
-              <a:t>15 / 19</a:t>
-            </a:r>
-          </a:p>
-        </p:txBody>
-      </p:sp>
-    </p:spTree>
-  </p:cSld>
-  <p:clrMapOvr>
-    <a:masterClrMapping/>
-  </p:clrMapOvr>
-</p:sld>
-</file>
-
-<file path=ppt/slides/slide16.xml><?xml version="1.0" encoding="utf-8"?>
-<p:sld xmlns:a="http://schemas.openxmlformats.org/drawingml/2006/main" xmlns:p="http://schemas.openxmlformats.org/presentationml/2006/main" xmlns:r="http://schemas.openxmlformats.org/officeDocument/2006/relationships">
-  <p:cSld>
-    <p:bg>
-      <p:bgPr>
-        <a:solidFill>
-          <a:srgbClr val="9B1B30"/>
-        </a:solidFill>
-        <a:effectLst/>
-      </p:bgPr>
-    </p:bg>
-    <p:spTree>
-      <p:nvGrpSpPr>
-        <p:cNvPr id="1" name=""/>
-        <p:cNvGrpSpPr/>
-        <p:nvPr/>
-      </p:nvGrpSpPr>
-      <p:grpSpPr/>
-      <p:sp>
-        <p:nvSpPr>
-          <p:cNvPr id="2" name="Oval 1"/>
-          <p:cNvSpPr/>
-          <p:nvPr/>
-        </p:nvSpPr>
-        <p:spPr>
-          <a:xfrm>
-            <a:off x="914400" y="2103120"/>
-            <a:ext cx="2377440" cy="2377440"/>
-          </a:xfrm>
-          <a:prstGeom prst="ellipse">
-            <a:avLst/>
-          </a:prstGeom>
-          <a:solidFill>
-            <a:srgbClr val="FFFFFF"/>
-          </a:solidFill>
-          <a:ln>
-            <a:noFill/>
-          </a:ln>
-          <a:effectLst/>
-        </p:spPr>
-        <p:style>
-          <a:lnRef idx="1">
-            <a:schemeClr val="accent1"/>
-          </a:lnRef>
-          <a:fillRef idx="3">
-            <a:schemeClr val="accent1"/>
-          </a:fillRef>
-          <a:effectRef idx="2">
-            <a:schemeClr val="accent1"/>
-          </a:effectRef>
-          <a:fontRef idx="minor">
-            <a:schemeClr val="lt1"/>
-          </a:fontRef>
-        </p:style>
-        <p:txBody>
-          <a:bodyPr rtlCol="0" anchor="ctr" lIns="0" rIns="0" tIns="0" bIns="0"/>
-          <a:lstStyle/>
-          <a:p>
-            <a:pPr algn="ctr"/>
-            <a:r>
-              <a:rPr sz="10000" b="1">
-                <a:solidFill>
-                  <a:srgbClr val="9B1B30"/>
-                </a:solidFill>
-                <a:latin typeface="Calibri"/>
-              </a:rPr>
-              <a:t>9</a:t>
-            </a:r>
-          </a:p>
-        </p:txBody>
-      </p:sp>
-      <p:sp>
-        <p:nvSpPr>
-          <p:cNvPr id="3" name="TextBox 2"/>
-          <p:cNvSpPr txBox="1"/>
-          <p:nvPr/>
-        </p:nvSpPr>
-        <p:spPr>
-          <a:xfrm>
-            <a:off x="3931920" y="2651760"/>
-            <a:ext cx="7589520" cy="1371600"/>
-          </a:xfrm>
-          <a:prstGeom prst="rect">
-            <a:avLst/>
-          </a:prstGeom>
-          <a:noFill/>
-        </p:spPr>
-        <p:txBody>
-          <a:bodyPr wrap="square" anchor="t" lIns="0" rIns="0" tIns="0" bIns="0">
-            <a:spAutoFit/>
-          </a:bodyPr>
-          <a:lstStyle/>
-          <a:p>
-            <a:pPr algn="l"/>
-            <a:r>
-              <a:rPr sz="4000" b="1">
-                <a:solidFill>
-                  <a:srgbClr val="FFFFFF"/>
-                </a:solidFill>
-                <a:latin typeface="Calibri"/>
-              </a:rPr>
-              <a:t>¿Qué no se puede afirmar, y qué sigue en S14?</a:t>
-            </a:r>
-          </a:p>
-        </p:txBody>
-      </p:sp>
-      <p:sp>
-        <p:nvSpPr>
-          <p:cNvPr id="4" name="TextBox 3"/>
-          <p:cNvSpPr txBox="1"/>
-          <p:nvPr/>
-        </p:nvSpPr>
-        <p:spPr>
-          <a:xfrm>
-            <a:off x="3931920" y="3977639"/>
-            <a:ext cx="7589520" cy="914400"/>
-          </a:xfrm>
-          <a:prstGeom prst="rect">
-            <a:avLst/>
-          </a:prstGeom>
-          <a:noFill/>
-        </p:spPr>
-        <p:txBody>
-          <a:bodyPr wrap="square" anchor="t" lIns="0" rIns="0" tIns="0" bIns="0">
-            <a:spAutoFit/>
-          </a:bodyPr>
-          <a:lstStyle/>
-          <a:p>
-            <a:pPr algn="l"/>
-            <a:r>
-              <a:rPr sz="1700" b="0">
-                <a:solidFill>
-                  <a:srgbClr val="FCEDEE"/>
-                </a:solidFill>
-                <a:latin typeface="Calibri"/>
-              </a:rPr>
-              <a:t>Capítulo 13.9 — viernes, bloque B</a:t>
-            </a:r>
-          </a:p>
-        </p:txBody>
-      </p:sp>
-    </p:spTree>
-  </p:cSld>
-  <p:clrMapOvr>
-    <a:masterClrMapping/>
-  </p:clrMapOvr>
-</p:sld>
-</file>
-
-<file path=ppt/slides/slide17.xml><?xml version="1.0" encoding="utf-8"?>
-<p:sld xmlns:a="http://schemas.openxmlformats.org/drawingml/2006/main" xmlns:p="http://schemas.openxmlformats.org/presentationml/2006/main" xmlns:r="http://schemas.openxmlformats.org/officeDocument/2006/relationships">
-  <p:cSld>
-    <p:bg>
-      <p:bgPr>
-        <a:solidFill>
-          <a:srgbClr val="FFFFFF"/>
-        </a:solidFill>
-        <a:effectLst/>
-      </p:bgPr>
-    </p:bg>
-    <p:spTree>
-      <p:nvGrpSpPr>
-        <p:cNvPr id="1" name=""/>
-        <p:cNvGrpSpPr/>
-        <p:nvPr/>
-      </p:nvGrpSpPr>
-      <p:grpSpPr/>
-      <p:sp>
-        <p:nvSpPr>
-          <p:cNvPr id="2" name="TextBox 1"/>
-          <p:cNvSpPr txBox="1"/>
-          <p:nvPr/>
-        </p:nvSpPr>
-        <p:spPr>
-          <a:xfrm>
-            <a:off x="548640" y="411480"/>
-            <a:ext cx="11094720" cy="292608"/>
-          </a:xfrm>
-          <a:prstGeom prst="rect">
-            <a:avLst/>
-          </a:prstGeom>
-          <a:noFill/>
-        </p:spPr>
-        <p:txBody>
-          <a:bodyPr wrap="square" anchor="t" lIns="0" rIns="0" tIns="0" bIns="0">
-            <a:spAutoFit/>
-          </a:bodyPr>
-          <a:lstStyle/>
-          <a:p>
-            <a:pPr algn="l"/>
-            <a:r>
-              <a:rPr sz="1300" b="1">
-                <a:solidFill>
-                  <a:srgbClr val="9B1B30"/>
-                </a:solidFill>
-                <a:latin typeface="Calibri"/>
-              </a:rPr>
-              <a:t>CAPÍTULO 13.9 — ¿QUÉ NO SE PUEDE AFIRMAR, Y QUÉ SIGUE EN S14?</a:t>
-            </a:r>
-          </a:p>
-        </p:txBody>
-      </p:sp>
-      <p:sp>
-        <p:nvSpPr>
-          <p:cNvPr id="3" name="TextBox 2"/>
-          <p:cNvSpPr txBox="1"/>
-          <p:nvPr/>
-        </p:nvSpPr>
-        <p:spPr>
-          <a:xfrm>
-            <a:off x="548640" y="731520"/>
-            <a:ext cx="11094720" cy="777240"/>
-          </a:xfrm>
-          <a:prstGeom prst="rect">
-            <a:avLst/>
-          </a:prstGeom>
-          <a:noFill/>
-        </p:spPr>
-        <p:txBody>
-          <a:bodyPr wrap="square" anchor="t" lIns="0" rIns="0" tIns="0" bIns="0">
-            <a:spAutoFit/>
-          </a:bodyPr>
-          <a:lstStyle/>
-          <a:p>
-            <a:pPr algn="l"/>
-            <a:r>
-              <a:rPr sz="4000" b="1">
-                <a:solidFill>
-                  <a:srgbClr val="2D2D2D"/>
-                </a:solidFill>
-                <a:latin typeface="Calibri"/>
-              </a:rPr>
-              <a:t>Lo que esta sesión no autoriza a afirmar</a:t>
-            </a:r>
-          </a:p>
-        </p:txBody>
-      </p:sp>
-      <p:sp>
-        <p:nvSpPr>
-          <p:cNvPr id="4" name="Oval 3"/>
-          <p:cNvSpPr/>
-          <p:nvPr/>
-        </p:nvSpPr>
-        <p:spPr>
-          <a:xfrm>
-            <a:off x="548640" y="1965960"/>
-            <a:ext cx="256032" cy="256032"/>
-          </a:xfrm>
-          <a:prstGeom prst="ellipse">
-            <a:avLst/>
-          </a:prstGeom>
-          <a:solidFill>
-            <a:srgbClr val="E4002B"/>
-          </a:solidFill>
-          <a:ln>
-            <a:noFill/>
-          </a:ln>
-          <a:effectLst/>
-        </p:spPr>
-        <p:style>
-          <a:lnRef idx="1">
-            <a:schemeClr val="accent1"/>
-          </a:lnRef>
-          <a:fillRef idx="3">
-            <a:schemeClr val="accent1"/>
-          </a:fillRef>
-          <a:effectRef idx="2">
-            <a:schemeClr val="accent1"/>
-          </a:effectRef>
-          <a:fontRef idx="minor">
-            <a:schemeClr val="lt1"/>
-          </a:fontRef>
-        </p:style>
-        <p:txBody>
-          <a:bodyPr rtlCol="0" anchor="ctr" lIns="0" rIns="0" tIns="0" bIns="0"/>
-          <a:lstStyle/>
-          <a:p>
-            <a:pPr algn="ctr"/>
-            <a:r>
-              <a:rPr sz="1200" b="1">
-                <a:solidFill>
-                  <a:srgbClr val="FFFFFF"/>
-                </a:solidFill>
-                <a:latin typeface="Calibri"/>
-              </a:rPr>
-              <a:t>•</a:t>
-            </a:r>
-          </a:p>
-        </p:txBody>
-      </p:sp>
-      <p:sp>
-        <p:nvSpPr>
-          <p:cNvPr id="5" name="TextBox 4"/>
-          <p:cNvSpPr txBox="1"/>
-          <p:nvPr/>
-        </p:nvSpPr>
-        <p:spPr>
-          <a:xfrm>
-            <a:off x="960120" y="1920240"/>
-            <a:ext cx="10637520" cy="685800"/>
-          </a:xfrm>
-          <a:prstGeom prst="rect">
-            <a:avLst/>
-          </a:prstGeom>
-          <a:noFill/>
-        </p:spPr>
-        <p:txBody>
-          <a:bodyPr wrap="square" anchor="t" lIns="0" rIns="0" tIns="0" bIns="0">
-            <a:spAutoFit/>
-          </a:bodyPr>
-          <a:lstStyle/>
-          <a:p>
-            <a:pPr algn="l"/>
-            <a:r>
-              <a:rPr sz="1600" b="0">
-                <a:solidFill>
-                  <a:srgbClr val="2D2D2D"/>
-                </a:solidFill>
-                <a:latin typeface="Calibri"/>
-              </a:rPr>
-              <a:t>Un hazard ratio es asociación, no efecto causal</a:t>
-            </a:r>
-          </a:p>
-        </p:txBody>
-      </p:sp>
-      <p:sp>
-        <p:nvSpPr>
-          <p:cNvPr id="6" name="Oval 5"/>
-          <p:cNvSpPr/>
-          <p:nvPr/>
-        </p:nvSpPr>
-        <p:spPr>
-          <a:xfrm>
-            <a:off x="548640" y="2624328"/>
-            <a:ext cx="256032" cy="256032"/>
-          </a:xfrm>
-          <a:prstGeom prst="ellipse">
-            <a:avLst/>
-          </a:prstGeom>
-          <a:solidFill>
-            <a:srgbClr val="E4002B"/>
-          </a:solidFill>
-          <a:ln>
-            <a:noFill/>
-          </a:ln>
-          <a:effectLst/>
-        </p:spPr>
-        <p:style>
-          <a:lnRef idx="1">
-            <a:schemeClr val="accent1"/>
-          </a:lnRef>
-          <a:fillRef idx="3">
-            <a:schemeClr val="accent1"/>
-          </a:fillRef>
-          <a:effectRef idx="2">
-            <a:schemeClr val="accent1"/>
-          </a:effectRef>
-          <a:fontRef idx="minor">
-            <a:schemeClr val="lt1"/>
-          </a:fontRef>
-        </p:style>
-        <p:txBody>
-          <a:bodyPr rtlCol="0" anchor="ctr" lIns="0" rIns="0" tIns="0" bIns="0"/>
-          <a:lstStyle/>
-          <a:p>
-            <a:pPr algn="ctr"/>
-            <a:r>
-              <a:rPr sz="1200" b="1">
-                <a:solidFill>
-                  <a:srgbClr val="FFFFFF"/>
-                </a:solidFill>
-                <a:latin typeface="Calibri"/>
-              </a:rPr>
-              <a:t>•</a:t>
-            </a:r>
-          </a:p>
-        </p:txBody>
-      </p:sp>
-      <p:sp>
-        <p:nvSpPr>
-          <p:cNvPr id="7" name="TextBox 6"/>
-          <p:cNvSpPr txBox="1"/>
-          <p:nvPr/>
-        </p:nvSpPr>
-        <p:spPr>
-          <a:xfrm>
-            <a:off x="960120" y="2578608"/>
-            <a:ext cx="10637520" cy="685800"/>
-          </a:xfrm>
-          <a:prstGeom prst="rect">
-            <a:avLst/>
-          </a:prstGeom>
-          <a:noFill/>
-        </p:spPr>
-        <p:txBody>
-          <a:bodyPr wrap="square" anchor="t" lIns="0" rIns="0" tIns="0" bIns="0">
-            <a:spAutoFit/>
-          </a:bodyPr>
-          <a:lstStyle/>
-          <a:p>
-            <a:pPr algn="l"/>
-            <a:r>
-              <a:rPr sz="1600" b="0">
-                <a:solidFill>
-                  <a:srgbClr val="2D2D2D"/>
-                </a:solidFill>
-                <a:latin typeface="Calibri"/>
-              </a:rPr>
-              <a:t>Un HR no se traduce en tiempo sin la curva</a:t>
-            </a:r>
-          </a:p>
-        </p:txBody>
-      </p:sp>
-      <p:sp>
-        <p:nvSpPr>
-          <p:cNvPr id="8" name="Oval 7"/>
-          <p:cNvSpPr/>
-          <p:nvPr/>
-        </p:nvSpPr>
-        <p:spPr>
-          <a:xfrm>
-            <a:off x="548640" y="3282696"/>
-            <a:ext cx="256032" cy="256032"/>
-          </a:xfrm>
-          <a:prstGeom prst="ellipse">
-            <a:avLst/>
-          </a:prstGeom>
-          <a:solidFill>
-            <a:srgbClr val="E4002B"/>
-          </a:solidFill>
-          <a:ln>
-            <a:noFill/>
-          </a:ln>
-          <a:effectLst/>
-        </p:spPr>
-        <p:style>
-          <a:lnRef idx="1">
-            <a:schemeClr val="accent1"/>
-          </a:lnRef>
-          <a:fillRef idx="3">
-            <a:schemeClr val="accent1"/>
-          </a:fillRef>
-          <a:effectRef idx="2">
-            <a:schemeClr val="accent1"/>
-          </a:effectRef>
-          <a:fontRef idx="minor">
-            <a:schemeClr val="lt1"/>
-          </a:fontRef>
-        </p:style>
-        <p:txBody>
-          <a:bodyPr rtlCol="0" anchor="ctr" lIns="0" rIns="0" tIns="0" bIns="0"/>
-          <a:lstStyle/>
-          <a:p>
-            <a:pPr algn="ctr"/>
-            <a:r>
-              <a:rPr sz="1200" b="1">
-                <a:solidFill>
-                  <a:srgbClr val="FFFFFF"/>
-                </a:solidFill>
-                <a:latin typeface="Calibri"/>
-              </a:rPr>
-              <a:t>•</a:t>
-            </a:r>
-          </a:p>
-        </p:txBody>
-      </p:sp>
-      <p:sp>
-        <p:nvSpPr>
-          <p:cNvPr id="9" name="TextBox 8"/>
-          <p:cNvSpPr txBox="1"/>
-          <p:nvPr/>
-        </p:nvSpPr>
-        <p:spPr>
-          <a:xfrm>
-            <a:off x="960120" y="3236976"/>
-            <a:ext cx="10637520" cy="685800"/>
-          </a:xfrm>
-          <a:prstGeom prst="rect">
-            <a:avLst/>
-          </a:prstGeom>
-          <a:noFill/>
-        </p:spPr>
-        <p:txBody>
-          <a:bodyPr wrap="square" anchor="t" lIns="0" rIns="0" tIns="0" bIns="0">
-            <a:spAutoFit/>
-          </a:bodyPr>
-          <a:lstStyle/>
-          <a:p>
-            <a:pPr algn="l"/>
-            <a:r>
-              <a:rPr sz="1600" b="0">
-                <a:solidFill>
-                  <a:srgbClr val="2D2D2D"/>
-                </a:solidFill>
-                <a:latin typeface="Calibri"/>
-              </a:rPr>
-              <a:t>Ningún CLV se reporta sin declarar el margen y la tasa de descuento que lo produjeron</a:t>
-            </a:r>
-          </a:p>
-        </p:txBody>
-      </p:sp>
-      <p:sp>
-        <p:nvSpPr>
-          <p:cNvPr id="10" name="Oval 9"/>
-          <p:cNvSpPr/>
-          <p:nvPr/>
-        </p:nvSpPr>
-        <p:spPr>
-          <a:xfrm>
-            <a:off x="548640" y="6473952"/>
-            <a:ext cx="100584" cy="100584"/>
-          </a:xfrm>
-          <a:prstGeom prst="ellipse">
-            <a:avLst/>
-          </a:prstGeom>
-          <a:solidFill>
-            <a:srgbClr val="E4002B"/>
-          </a:solidFill>
-          <a:ln>
-            <a:noFill/>
-          </a:ln>
-          <a:effectLst/>
-        </p:spPr>
-        <p:style>
-          <a:lnRef idx="1">
-            <a:schemeClr val="accent1"/>
-          </a:lnRef>
-          <a:fillRef idx="3">
-            <a:schemeClr val="accent1"/>
-          </a:fillRef>
-          <a:effectRef idx="2">
-            <a:schemeClr val="accent1"/>
-          </a:effectRef>
-          <a:fontRef idx="minor">
-            <a:schemeClr val="lt1"/>
-          </a:fontRef>
-        </p:style>
-        <p:txBody>
-          <a:bodyPr rtlCol="0" anchor="ctr"/>
-          <a:lstStyle/>
-          <a:p>
-            <a:pPr algn="ctr"/>
-          </a:p>
-        </p:txBody>
-      </p:sp>
-      <p:sp>
-        <p:nvSpPr>
-          <p:cNvPr id="11" name="TextBox 10"/>
-          <p:cNvSpPr txBox="1"/>
-          <p:nvPr/>
-        </p:nvSpPr>
-        <p:spPr>
-          <a:xfrm>
-            <a:off x="749808" y="6437376"/>
-            <a:ext cx="7772400" cy="274320"/>
-          </a:xfrm>
-          <a:prstGeom prst="rect">
-            <a:avLst/>
-          </a:prstGeom>
-          <a:noFill/>
-        </p:spPr>
-        <p:txBody>
-          <a:bodyPr wrap="square" anchor="t" lIns="0" rIns="0" tIns="0" bIns="0">
-            <a:spAutoFit/>
-          </a:bodyPr>
-          <a:lstStyle/>
-          <a:p>
-            <a:pPr algn="l"/>
-            <a:r>
-              <a:rPr sz="900" b="0">
-                <a:solidFill>
-                  <a:srgbClr val="6E6E6E"/>
-                </a:solidFill>
-                <a:latin typeface="Calibri"/>
-              </a:rPr>
-              <a:t>S13 — Herramientas para la Ciencia de Datos, UPC</a:t>
-            </a:r>
-          </a:p>
-        </p:txBody>
-      </p:sp>
-      <p:sp>
-        <p:nvSpPr>
-          <p:cNvPr id="12" name="TextBox 11"/>
-          <p:cNvSpPr txBox="1"/>
-          <p:nvPr/>
-        </p:nvSpPr>
-        <p:spPr>
-          <a:xfrm>
-            <a:off x="10180320" y="6437376"/>
-            <a:ext cx="1463040" cy="274320"/>
-          </a:xfrm>
-          <a:prstGeom prst="rect">
-            <a:avLst/>
-          </a:prstGeom>
-          <a:noFill/>
-        </p:spPr>
-        <p:txBody>
-          <a:bodyPr wrap="square" anchor="t" lIns="0" rIns="0" tIns="0" bIns="0">
-            <a:spAutoFit/>
-          </a:bodyPr>
-          <a:lstStyle/>
-          <a:p>
-            <a:pPr algn="r"/>
-            <a:r>
-              <a:rPr sz="900" b="0">
-                <a:solidFill>
-                  <a:srgbClr val="6E6E6E"/>
-                </a:solidFill>
-                <a:latin typeface="Calibri"/>
-              </a:rPr>
-              <a:t>17 / 19</a:t>
-            </a:r>
-          </a:p>
-        </p:txBody>
-      </p:sp>
-    </p:spTree>
-  </p:cSld>
-  <p:clrMapOvr>
-    <a:masterClrMapping/>
-  </p:clrMapOvr>
-</p:sld>
-</file>
-
-<file path=ppt/slides/slide18.xml><?xml version="1.0" encoding="utf-8"?>
-<p:sld xmlns:a="http://schemas.openxmlformats.org/drawingml/2006/main" xmlns:p="http://schemas.openxmlformats.org/presentationml/2006/main" xmlns:r="http://schemas.openxmlformats.org/officeDocument/2006/relationships">
-  <p:cSld>
-    <p:bg>
-      <p:bgPr>
-        <a:solidFill>
-          <a:srgbClr val="FFFFFF"/>
-        </a:solidFill>
-        <a:effectLst/>
-      </p:bgPr>
-    </p:bg>
-    <p:spTree>
-      <p:nvGrpSpPr>
-        <p:cNvPr id="1" name=""/>
-        <p:cNvGrpSpPr/>
-        <p:nvPr/>
-      </p:nvGrpSpPr>
-      <p:grpSpPr/>
-      <p:sp>
-        <p:nvSpPr>
-          <p:cNvPr id="2" name="TextBox 1"/>
-          <p:cNvSpPr txBox="1"/>
-          <p:nvPr/>
-        </p:nvSpPr>
-        <p:spPr>
-          <a:xfrm>
-            <a:off x="548640" y="411480"/>
-            <a:ext cx="11094720" cy="292608"/>
-          </a:xfrm>
-          <a:prstGeom prst="rect">
-            <a:avLst/>
-          </a:prstGeom>
-          <a:noFill/>
-        </p:spPr>
-        <p:txBody>
-          <a:bodyPr wrap="square" anchor="t" lIns="0" rIns="0" tIns="0" bIns="0">
-            <a:spAutoFit/>
-          </a:bodyPr>
-          <a:lstStyle/>
-          <a:p>
-            <a:pPr algn="l"/>
-            <a:r>
-              <a:rPr sz="1300" b="1">
-                <a:solidFill>
-                  <a:srgbClr val="9B1B30"/>
-                </a:solidFill>
-                <a:latin typeface="Calibri"/>
-              </a:rPr>
-              <a:t>CIERRE</a:t>
-            </a:r>
-          </a:p>
-        </p:txBody>
-      </p:sp>
-      <p:sp>
-        <p:nvSpPr>
-          <p:cNvPr id="3" name="TextBox 2"/>
-          <p:cNvSpPr txBox="1"/>
-          <p:nvPr/>
-        </p:nvSpPr>
-        <p:spPr>
-          <a:xfrm>
-            <a:off x="548640" y="731520"/>
-            <a:ext cx="11094720" cy="777240"/>
-          </a:xfrm>
-          <a:prstGeom prst="rect">
-            <a:avLst/>
-          </a:prstGeom>
-          <a:noFill/>
-        </p:spPr>
-        <p:txBody>
-          <a:bodyPr wrap="square" anchor="t" lIns="0" rIns="0" tIns="0" bIns="0">
-            <a:spAutoFit/>
-          </a:bodyPr>
-          <a:lstStyle/>
-          <a:p>
-            <a:pPr algn="l"/>
-            <a:r>
-              <a:rPr sz="4000" b="1">
-                <a:solidFill>
-                  <a:srgbClr val="2D2D2D"/>
-                </a:solidFill>
-                <a:latin typeface="Calibri"/>
-              </a:rPr>
-              <a:t>El entregable va del churn al CLV con recomendación por segmento</a:t>
-            </a:r>
-          </a:p>
-        </p:txBody>
-      </p:sp>
-      <p:sp>
-        <p:nvSpPr>
-          <p:cNvPr id="4" name="Rounded Rectangle 3"/>
-          <p:cNvSpPr/>
-          <p:nvPr/>
-        </p:nvSpPr>
-        <p:spPr>
-          <a:xfrm>
-            <a:off x="548640" y="1874519"/>
-            <a:ext cx="3454400" cy="4114800"/>
-          </a:xfrm>
-          <a:prstGeom prst="roundRect">
-            <a:avLst/>
-          </a:prstGeom>
-          <a:solidFill>
-            <a:srgbClr val="FCEDEE"/>
-          </a:solidFill>
-          <a:ln>
-            <a:noFill/>
-          </a:ln>
-          <a:effectLst/>
-        </p:spPr>
-        <p:style>
-          <a:lnRef idx="1">
-            <a:schemeClr val="accent1"/>
-          </a:lnRef>
-          <a:fillRef idx="3">
-            <a:schemeClr val="accent1"/>
-          </a:fillRef>
-          <a:effectRef idx="2">
-            <a:schemeClr val="accent1"/>
-          </a:effectRef>
-          <a:fontRef idx="minor">
-            <a:schemeClr val="lt1"/>
-          </a:fontRef>
-        </p:style>
-        <p:txBody>
-          <a:bodyPr rtlCol="0" anchor="ctr"/>
-          <a:lstStyle/>
-          <a:p>
-            <a:pPr algn="ctr"/>
-          </a:p>
-        </p:txBody>
-      </p:sp>
-      <p:sp>
-        <p:nvSpPr>
-          <p:cNvPr id="5" name="Oval 4"/>
-          <p:cNvSpPr/>
-          <p:nvPr/>
-        </p:nvSpPr>
-        <p:spPr>
-          <a:xfrm>
-            <a:off x="777240" y="2103119"/>
-            <a:ext cx="640080" cy="640080"/>
-          </a:xfrm>
-          <a:prstGeom prst="ellipse">
-            <a:avLst/>
-          </a:prstGeom>
-          <a:solidFill>
-            <a:srgbClr val="E4002B"/>
-          </a:solidFill>
-          <a:ln>
-            <a:noFill/>
-          </a:ln>
-          <a:effectLst/>
-        </p:spPr>
-        <p:style>
-          <a:lnRef idx="1">
-            <a:schemeClr val="accent1"/>
-          </a:lnRef>
-          <a:fillRef idx="3">
-            <a:schemeClr val="accent1"/>
-          </a:fillRef>
-          <a:effectRef idx="2">
-            <a:schemeClr val="accent1"/>
-          </a:effectRef>
-          <a:fontRef idx="minor">
-            <a:schemeClr val="lt1"/>
-          </a:fontRef>
-        </p:style>
-        <p:txBody>
-          <a:bodyPr rtlCol="0" anchor="ctr" lIns="0" rIns="0" tIns="0" bIns="0"/>
-          <a:lstStyle/>
-          <a:p>
-            <a:pPr algn="ctr"/>
-            <a:r>
-              <a:rPr sz="2000" b="1">
-                <a:solidFill>
-                  <a:srgbClr val="FFFFFF"/>
-                </a:solidFill>
-                <a:latin typeface="Calibri"/>
-              </a:rPr>
-              <a:t>✓</a:t>
-            </a:r>
-          </a:p>
-        </p:txBody>
-      </p:sp>
-      <p:sp>
-        <p:nvSpPr>
-          <p:cNvPr id="6" name="TextBox 5"/>
-          <p:cNvSpPr txBox="1"/>
-          <p:nvPr/>
-        </p:nvSpPr>
-        <p:spPr>
-          <a:xfrm>
-            <a:off x="777240" y="2926079"/>
-            <a:ext cx="2997200" cy="640080"/>
-          </a:xfrm>
-          <a:prstGeom prst="rect">
-            <a:avLst/>
-          </a:prstGeom>
-          <a:noFill/>
-        </p:spPr>
-        <p:txBody>
-          <a:bodyPr wrap="square" anchor="t" lIns="0" rIns="0" tIns="0" bIns="0">
-            <a:spAutoFit/>
-          </a:bodyPr>
-          <a:lstStyle/>
-          <a:p>
-            <a:pPr algn="l"/>
-            <a:r>
-              <a:rPr sz="1800" b="1">
-                <a:solidFill>
-                  <a:srgbClr val="9B1B30"/>
-                </a:solidFill>
-                <a:latin typeface="Calibri"/>
-              </a:rPr>
-              <a:t>Entregable</a:t>
-            </a:r>
-          </a:p>
-        </p:txBody>
-      </p:sp>
-      <p:sp>
-        <p:nvSpPr>
-          <p:cNvPr id="7" name="TextBox 6"/>
-          <p:cNvSpPr txBox="1"/>
-          <p:nvPr/>
-        </p:nvSpPr>
-        <p:spPr>
-          <a:xfrm>
-            <a:off x="777240" y="3611879"/>
-            <a:ext cx="2997200" cy="1645920"/>
-          </a:xfrm>
-          <a:prstGeom prst="rect">
-            <a:avLst/>
-          </a:prstGeom>
-          <a:noFill/>
-        </p:spPr>
-        <p:txBody>
-          <a:bodyPr wrap="square" anchor="t" lIns="0" rIns="0" tIns="0" bIns="0">
-            <a:spAutoFit/>
-          </a:bodyPr>
-          <a:lstStyle/>
-          <a:p>
-            <a:pPr algn="l">
-              <a:lnSpc>
-                <a:spcPct val="115000"/>
-              </a:lnSpc>
-            </a:pPr>
-            <a:r>
-              <a:rPr sz="1300" b="0">
-                <a:solidFill>
-                  <a:srgbClr val="2D2D2D"/>
-                </a:solidFill>
-                <a:latin typeface="Calibri"/>
-              </a:rPr>
-              <a:t>Análisis de supervivencia del churn: KM por segmento, Cox con HR e IC, diagnóstico de PH y CLV con recomendación.</a:t>
-            </a:r>
-          </a:p>
-        </p:txBody>
-      </p:sp>
-      <p:sp>
-        <p:nvSpPr>
-          <p:cNvPr id="8" name="Rounded Rectangle 7"/>
-          <p:cNvSpPr/>
-          <p:nvPr/>
-        </p:nvSpPr>
-        <p:spPr>
-          <a:xfrm>
-            <a:off x="4368800" y="1874519"/>
-            <a:ext cx="3454400" cy="4114800"/>
-          </a:xfrm>
-          <a:prstGeom prst="roundRect">
-            <a:avLst/>
-          </a:prstGeom>
-          <a:solidFill>
-            <a:srgbClr val="FCEDEE"/>
-          </a:solidFill>
-          <a:ln>
-            <a:noFill/>
-          </a:ln>
-          <a:effectLst/>
-        </p:spPr>
-        <p:style>
-          <a:lnRef idx="1">
-            <a:schemeClr val="accent1"/>
-          </a:lnRef>
-          <a:fillRef idx="3">
-            <a:schemeClr val="accent1"/>
-          </a:fillRef>
-          <a:effectRef idx="2">
-            <a:schemeClr val="accent1"/>
-          </a:effectRef>
-          <a:fontRef idx="minor">
-            <a:schemeClr val="lt1"/>
-          </a:fontRef>
-        </p:style>
-        <p:txBody>
-          <a:bodyPr rtlCol="0" anchor="ctr"/>
-          <a:lstStyle/>
-          <a:p>
-            <a:pPr algn="ctr"/>
-          </a:p>
-        </p:txBody>
-      </p:sp>
-      <p:sp>
-        <p:nvSpPr>
-          <p:cNvPr id="9" name="Oval 8"/>
-          <p:cNvSpPr/>
-          <p:nvPr/>
-        </p:nvSpPr>
-        <p:spPr>
-          <a:xfrm>
-            <a:off x="4597400" y="2103119"/>
-            <a:ext cx="640080" cy="640080"/>
-          </a:xfrm>
-          <a:prstGeom prst="ellipse">
-            <a:avLst/>
-          </a:prstGeom>
-          <a:solidFill>
-            <a:srgbClr val="E4002B"/>
-          </a:solidFill>
-          <a:ln>
-            <a:noFill/>
-          </a:ln>
-          <a:effectLst/>
-        </p:spPr>
-        <p:style>
-          <a:lnRef idx="1">
-            <a:schemeClr val="accent1"/>
-          </a:lnRef>
-          <a:fillRef idx="3">
-            <a:schemeClr val="accent1"/>
-          </a:fillRef>
-          <a:effectRef idx="2">
-            <a:schemeClr val="accent1"/>
-          </a:effectRef>
-          <a:fontRef idx="minor">
-            <a:schemeClr val="lt1"/>
-          </a:fontRef>
-        </p:style>
-        <p:txBody>
-          <a:bodyPr rtlCol="0" anchor="ctr" lIns="0" rIns="0" tIns="0" bIns="0"/>
-          <a:lstStyle/>
-          <a:p>
-            <a:pPr algn="ctr"/>
-            <a:r>
-              <a:rPr sz="2000" b="1">
-                <a:solidFill>
-                  <a:srgbClr val="FFFFFF"/>
-                </a:solidFill>
-                <a:latin typeface="Calibri"/>
-              </a:rPr>
-              <a:t>→</a:t>
-            </a:r>
-          </a:p>
-        </p:txBody>
-      </p:sp>
-      <p:sp>
-        <p:nvSpPr>
-          <p:cNvPr id="10" name="TextBox 9"/>
-          <p:cNvSpPr txBox="1"/>
-          <p:nvPr/>
-        </p:nvSpPr>
-        <p:spPr>
-          <a:xfrm>
-            <a:off x="4597400" y="2926079"/>
-            <a:ext cx="2997200" cy="640080"/>
-          </a:xfrm>
-          <a:prstGeom prst="rect">
-            <a:avLst/>
-          </a:prstGeom>
-          <a:noFill/>
-        </p:spPr>
-        <p:txBody>
-          <a:bodyPr wrap="square" anchor="t" lIns="0" rIns="0" tIns="0" bIns="0">
-            <a:spAutoFit/>
-          </a:bodyPr>
-          <a:lstStyle/>
-          <a:p>
-            <a:pPr algn="l"/>
-            <a:r>
-              <a:rPr sz="1800" b="1">
-                <a:solidFill>
-                  <a:srgbClr val="9B1B30"/>
-                </a:solidFill>
-                <a:latin typeface="Calibri"/>
-              </a:rPr>
-              <a:t>Evaluación</a:t>
-            </a:r>
-          </a:p>
-        </p:txBody>
-      </p:sp>
-      <p:sp>
-        <p:nvSpPr>
-          <p:cNvPr id="11" name="TextBox 10"/>
-          <p:cNvSpPr txBox="1"/>
-          <p:nvPr/>
-        </p:nvSpPr>
-        <p:spPr>
-          <a:xfrm>
-            <a:off x="4597400" y="3611879"/>
-            <a:ext cx="2997200" cy="1645920"/>
-          </a:xfrm>
-          <a:prstGeom prst="rect">
-            <a:avLst/>
-          </a:prstGeom>
-          <a:noFill/>
-        </p:spPr>
-        <p:txBody>
-          <a:bodyPr wrap="square" anchor="t" lIns="0" rIns="0" tIns="0" bIns="0">
-            <a:spAutoFit/>
-          </a:bodyPr>
-          <a:lstStyle/>
-          <a:p>
-            <a:pPr algn="l">
-              <a:lnSpc>
-                <a:spcPct val="115000"/>
-              </a:lnSpc>
-            </a:pPr>
-            <a:r>
-              <a:rPr sz="1300" b="0">
-                <a:solidFill>
-                  <a:srgbClr val="2D2D2D"/>
-                </a:solidFill>
-                <a:latin typeface="Calibri"/>
-              </a:rPr>
-              <a:t>Control corto de cierre + banco [S13]. Rúbrica vigesimal 0-20.</a:t>
-            </a:r>
-          </a:p>
-        </p:txBody>
-      </p:sp>
-      <p:sp>
-        <p:nvSpPr>
-          <p:cNvPr id="12" name="Rounded Rectangle 11"/>
-          <p:cNvSpPr/>
-          <p:nvPr/>
-        </p:nvSpPr>
-        <p:spPr>
-          <a:xfrm>
-            <a:off x="8188960" y="1874519"/>
-            <a:ext cx="3454400" cy="4114800"/>
-          </a:xfrm>
-          <a:prstGeom prst="roundRect">
-            <a:avLst/>
-          </a:prstGeom>
-          <a:solidFill>
-            <a:srgbClr val="FCEDEE"/>
-          </a:solidFill>
-          <a:ln>
-            <a:noFill/>
-          </a:ln>
-          <a:effectLst/>
-        </p:spPr>
-        <p:style>
-          <a:lnRef idx="1">
-            <a:schemeClr val="accent1"/>
-          </a:lnRef>
-          <a:fillRef idx="3">
-            <a:schemeClr val="accent1"/>
-          </a:fillRef>
-          <a:effectRef idx="2">
-            <a:schemeClr val="accent1"/>
-          </a:effectRef>
-          <a:fontRef idx="minor">
-            <a:schemeClr val="lt1"/>
-          </a:fontRef>
-        </p:style>
-        <p:txBody>
-          <a:bodyPr rtlCol="0" anchor="ctr"/>
-          <a:lstStyle/>
-          <a:p>
-            <a:pPr algn="ctr"/>
-          </a:p>
-        </p:txBody>
-      </p:sp>
-      <p:sp>
-        <p:nvSpPr>
-          <p:cNvPr id="13" name="Oval 12"/>
-          <p:cNvSpPr/>
-          <p:nvPr/>
-        </p:nvSpPr>
-        <p:spPr>
-          <a:xfrm>
-            <a:off x="8417560" y="2103119"/>
-            <a:ext cx="640080" cy="640080"/>
-          </a:xfrm>
-          <a:prstGeom prst="ellipse">
-            <a:avLst/>
-          </a:prstGeom>
-          <a:solidFill>
-            <a:srgbClr val="E4002B"/>
-          </a:solidFill>
-          <a:ln>
-            <a:noFill/>
-          </a:ln>
-          <a:effectLst/>
-        </p:spPr>
-        <p:style>
-          <a:lnRef idx="1">
-            <a:schemeClr val="accent1"/>
-          </a:lnRef>
-          <a:fillRef idx="3">
-            <a:schemeClr val="accent1"/>
-          </a:fillRef>
-          <a:effectRef idx="2">
-            <a:schemeClr val="accent1"/>
-          </a:effectRef>
-          <a:fontRef idx="minor">
-            <a:schemeClr val="lt1"/>
-          </a:fontRef>
-        </p:style>
-        <p:txBody>
-          <a:bodyPr rtlCol="0" anchor="ctr" lIns="0" rIns="0" tIns="0" bIns="0"/>
-          <a:lstStyle/>
-          <a:p>
-            <a:pPr algn="ctr"/>
-            <a:r>
-              <a:rPr sz="2000" b="1">
-                <a:solidFill>
-                  <a:srgbClr val="FFFFFF"/>
-                </a:solidFill>
-                <a:latin typeface="Calibri"/>
-              </a:rPr>
-              <a:t>★</a:t>
-            </a:r>
-          </a:p>
-        </p:txBody>
-      </p:sp>
-      <p:sp>
-        <p:nvSpPr>
-          <p:cNvPr id="14" name="TextBox 13"/>
-          <p:cNvSpPr txBox="1"/>
-          <p:nvPr/>
-        </p:nvSpPr>
-        <p:spPr>
-          <a:xfrm>
-            <a:off x="8417560" y="2926079"/>
-            <a:ext cx="2997200" cy="640080"/>
-          </a:xfrm>
-          <a:prstGeom prst="rect">
-            <a:avLst/>
-          </a:prstGeom>
-          <a:noFill/>
-        </p:spPr>
-        <p:txBody>
-          <a:bodyPr wrap="square" anchor="t" lIns="0" rIns="0" tIns="0" bIns="0">
-            <a:spAutoFit/>
-          </a:bodyPr>
-          <a:lstStyle/>
-          <a:p>
-            <a:pPr algn="l"/>
-            <a:r>
-              <a:rPr sz="1800" b="1">
-                <a:solidFill>
-                  <a:srgbClr val="9B1B30"/>
-                </a:solidFill>
-                <a:latin typeface="Calibri"/>
-              </a:rPr>
-              <a:t>Próxima sesión</a:t>
-            </a:r>
-          </a:p>
-        </p:txBody>
-      </p:sp>
-      <p:sp>
-        <p:nvSpPr>
-          <p:cNvPr id="15" name="TextBox 14"/>
-          <p:cNvSpPr txBox="1"/>
-          <p:nvPr/>
-        </p:nvSpPr>
-        <p:spPr>
-          <a:xfrm>
-            <a:off x="8417560" y="3611879"/>
-            <a:ext cx="2997200" cy="1645920"/>
-          </a:xfrm>
-          <a:prstGeom prst="rect">
-            <a:avLst/>
-          </a:prstGeom>
-          <a:noFill/>
-        </p:spPr>
-        <p:txBody>
-          <a:bodyPr wrap="square" anchor="t" lIns="0" rIns="0" tIns="0" bIns="0">
-            <a:spAutoFit/>
-          </a:bodyPr>
-          <a:lstStyle/>
-          <a:p>
-            <a:pPr algn="l">
-              <a:lnSpc>
-                <a:spcPct val="115000"/>
-              </a:lnSpc>
-            </a:pPr>
-            <a:r>
-              <a:rPr sz="1300" b="0">
-                <a:solidFill>
-                  <a:srgbClr val="2D2D2D"/>
-                </a:solidFill>
-                <a:latin typeface="Calibri"/>
-              </a:rPr>
-              <a:t>S14 — Sistemas de recomendación — solo se nombra como conexión.</a:t>
-            </a:r>
-          </a:p>
-        </p:txBody>
-      </p:sp>
-      <p:sp>
-        <p:nvSpPr>
-          <p:cNvPr id="16" name="Oval 15"/>
-          <p:cNvSpPr/>
-          <p:nvPr/>
-        </p:nvSpPr>
-        <p:spPr>
-          <a:xfrm>
-            <a:off x="548640" y="6473952"/>
-            <a:ext cx="100584" cy="100584"/>
-          </a:xfrm>
-          <a:prstGeom prst="ellipse">
-            <a:avLst/>
-          </a:prstGeom>
-          <a:solidFill>
-            <a:srgbClr val="E4002B"/>
-          </a:solidFill>
-          <a:ln>
-            <a:noFill/>
-          </a:ln>
-          <a:effectLst/>
-        </p:spPr>
-        <p:style>
-          <a:lnRef idx="1">
-            <a:schemeClr val="accent1"/>
-          </a:lnRef>
-          <a:fillRef idx="3">
-            <a:schemeClr val="accent1"/>
-          </a:fillRef>
-          <a:effectRef idx="2">
-            <a:schemeClr val="accent1"/>
-          </a:effectRef>
-          <a:fontRef idx="minor">
-            <a:schemeClr val="lt1"/>
-          </a:fontRef>
-        </p:style>
-        <p:txBody>
-          <a:bodyPr rtlCol="0" anchor="ctr"/>
-          <a:lstStyle/>
-          <a:p>
-            <a:pPr algn="ctr"/>
-          </a:p>
-        </p:txBody>
-      </p:sp>
-      <p:sp>
-        <p:nvSpPr>
-          <p:cNvPr id="17" name="TextBox 16"/>
-          <p:cNvSpPr txBox="1"/>
-          <p:nvPr/>
-        </p:nvSpPr>
-        <p:spPr>
-          <a:xfrm>
-            <a:off x="749808" y="6437376"/>
-            <a:ext cx="7772400" cy="274320"/>
-          </a:xfrm>
-          <a:prstGeom prst="rect">
-            <a:avLst/>
-          </a:prstGeom>
-          <a:noFill/>
-        </p:spPr>
-        <p:txBody>
-          <a:bodyPr wrap="square" anchor="t" lIns="0" rIns="0" tIns="0" bIns="0">
-            <a:spAutoFit/>
-          </a:bodyPr>
-          <a:lstStyle/>
-          <a:p>
-            <a:pPr algn="l"/>
-            <a:r>
-              <a:rPr sz="900" b="0">
-                <a:solidFill>
-                  <a:srgbClr val="6E6E6E"/>
-                </a:solidFill>
-                <a:latin typeface="Calibri"/>
-              </a:rPr>
-              <a:t>S13 — Herramientas para la Ciencia de Datos, UPC</a:t>
-            </a:r>
-          </a:p>
-        </p:txBody>
-      </p:sp>
-      <p:sp>
-        <p:nvSpPr>
-          <p:cNvPr id="18" name="TextBox 17"/>
-          <p:cNvSpPr txBox="1"/>
-          <p:nvPr/>
-        </p:nvSpPr>
-        <p:spPr>
-          <a:xfrm>
-            <a:off x="10180320" y="6437376"/>
-            <a:ext cx="1463040" cy="274320"/>
-          </a:xfrm>
-          <a:prstGeom prst="rect">
-            <a:avLst/>
-          </a:prstGeom>
-          <a:noFill/>
-        </p:spPr>
-        <p:txBody>
-          <a:bodyPr wrap="square" anchor="t" lIns="0" rIns="0" tIns="0" bIns="0">
-            <a:spAutoFit/>
-          </a:bodyPr>
-          <a:lstStyle/>
-          <a:p>
-            <a:pPr algn="r"/>
-            <a:r>
-              <a:rPr sz="900" b="0">
-                <a:solidFill>
-                  <a:srgbClr val="6E6E6E"/>
-                </a:solidFill>
-                <a:latin typeface="Calibri"/>
-              </a:rPr>
-              <a:t>18 / 19</a:t>
-            </a:r>
-          </a:p>
-        </p:txBody>
-      </p:sp>
-    </p:spTree>
-  </p:cSld>
-  <p:clrMapOvr>
-    <a:masterClrMapping/>
-  </p:clrMapOvr>
-</p:sld>
-</file>
-
-<file path=ppt/slides/slide19.xml><?xml version="1.0" encoding="utf-8"?>
-<p:sld xmlns:a="http://schemas.openxmlformats.org/drawingml/2006/main" xmlns:p="http://schemas.openxmlformats.org/presentationml/2006/main" xmlns:r="http://schemas.openxmlformats.org/officeDocument/2006/relationships">
-  <p:cSld>
-    <p:bg>
-      <p:bgPr>
-        <a:solidFill>
-          <a:srgbClr val="FFFFFF"/>
-        </a:solidFill>
-        <a:effectLst/>
-      </p:bgPr>
-    </p:bg>
-    <p:spTree>
-      <p:nvGrpSpPr>
-        <p:cNvPr id="1" name=""/>
-        <p:cNvGrpSpPr/>
-        <p:nvPr/>
-      </p:nvGrpSpPr>
-      <p:grpSpPr/>
-      <p:sp>
-        <p:nvSpPr>
-          <p:cNvPr id="2" name="TextBox 1"/>
-          <p:cNvSpPr txBox="1"/>
-          <p:nvPr/>
-        </p:nvSpPr>
-        <p:spPr>
-          <a:xfrm>
-            <a:off x="548640" y="411480"/>
-            <a:ext cx="11094720" cy="292608"/>
-          </a:xfrm>
-          <a:prstGeom prst="rect">
-            <a:avLst/>
-          </a:prstGeom>
-          <a:noFill/>
-        </p:spPr>
-        <p:txBody>
-          <a:bodyPr wrap="square" anchor="t" lIns="0" rIns="0" tIns="0" bIns="0">
-            <a:spAutoFit/>
-          </a:bodyPr>
-          <a:lstStyle/>
-          <a:p>
-            <a:pPr algn="l"/>
-            <a:r>
-              <a:rPr sz="1300" b="1">
-                <a:solidFill>
-                  <a:srgbClr val="9B1B30"/>
-                </a:solidFill>
-                <a:latin typeface="Calibri"/>
-              </a:rPr>
-              <a:t>BIBLIOGRAFÍA</a:t>
-            </a:r>
-          </a:p>
-        </p:txBody>
-      </p:sp>
-      <p:sp>
-        <p:nvSpPr>
-          <p:cNvPr id="3" name="TextBox 2"/>
-          <p:cNvSpPr txBox="1"/>
-          <p:nvPr/>
-        </p:nvSpPr>
-        <p:spPr>
-          <a:xfrm>
-            <a:off x="548640" y="731520"/>
-            <a:ext cx="11094720" cy="777240"/>
-          </a:xfrm>
-          <a:prstGeom prst="rect">
-            <a:avLst/>
-          </a:prstGeom>
-          <a:noFill/>
-        </p:spPr>
-        <p:txBody>
-          <a:bodyPr wrap="square" anchor="t" lIns="0" rIns="0" tIns="0" bIns="0">
-            <a:spAutoFit/>
-          </a:bodyPr>
-          <a:lstStyle/>
-          <a:p>
-            <a:pPr algn="l"/>
-            <a:r>
-              <a:rPr sz="4000" b="1">
-                <a:solidFill>
-                  <a:srgbClr val="2D2D2D"/>
-                </a:solidFill>
-                <a:latin typeface="Calibri"/>
-              </a:rPr>
-              <a:t>Cuatro lecturas anclan la supervivencia y el CLV</a:t>
-            </a:r>
-          </a:p>
-        </p:txBody>
-      </p:sp>
-      <p:sp>
-        <p:nvSpPr>
-          <p:cNvPr id="4" name="Oval 3"/>
-          <p:cNvSpPr/>
-          <p:nvPr/>
-        </p:nvSpPr>
-        <p:spPr>
-          <a:xfrm>
-            <a:off x="548640" y="1810512"/>
-            <a:ext cx="384048" cy="384048"/>
-          </a:xfrm>
-          <a:prstGeom prst="ellipse">
-            <a:avLst/>
-          </a:prstGeom>
-          <a:solidFill>
-            <a:srgbClr val="E4002B"/>
-          </a:solidFill>
-          <a:ln>
-            <a:noFill/>
-          </a:ln>
-          <a:effectLst/>
-        </p:spPr>
-        <p:style>
-          <a:lnRef idx="1">
-            <a:schemeClr val="accent1"/>
-          </a:lnRef>
-          <a:fillRef idx="3">
-            <a:schemeClr val="accent1"/>
-          </a:fillRef>
-          <a:effectRef idx="2">
-            <a:schemeClr val="accent1"/>
-          </a:effectRef>
-          <a:fontRef idx="minor">
-            <a:schemeClr val="lt1"/>
-          </a:fontRef>
-        </p:style>
-        <p:txBody>
-          <a:bodyPr rtlCol="0" anchor="ctr" lIns="0" rIns="0" tIns="0" bIns="0"/>
-          <a:lstStyle/>
-          <a:p>
-            <a:pPr algn="ctr"/>
-            <a:r>
-              <a:rPr sz="1400" b="1">
-                <a:solidFill>
-                  <a:srgbClr val="FFFFFF"/>
-                </a:solidFill>
-                <a:latin typeface="Calibri"/>
-              </a:rPr>
-              <a:t>1</a:t>
-            </a:r>
-          </a:p>
-        </p:txBody>
-      </p:sp>
-      <p:sp>
-        <p:nvSpPr>
-          <p:cNvPr id="5" name="TextBox 4"/>
-          <p:cNvSpPr txBox="1"/>
-          <p:nvPr/>
-        </p:nvSpPr>
-        <p:spPr>
-          <a:xfrm>
-            <a:off x="1097280" y="1783080"/>
-            <a:ext cx="10546080" cy="320040"/>
-          </a:xfrm>
-          <a:prstGeom prst="rect">
-            <a:avLst/>
-          </a:prstGeom>
-          <a:noFill/>
-        </p:spPr>
-        <p:txBody>
-          <a:bodyPr wrap="square" anchor="t" lIns="0" rIns="0" tIns="0" bIns="0">
-            <a:spAutoFit/>
-          </a:bodyPr>
-          <a:lstStyle/>
-          <a:p>
-            <a:pPr algn="l"/>
-            <a:r>
-              <a:rPr sz="1500" b="1">
-                <a:solidFill>
-                  <a:srgbClr val="2D2D2D"/>
-                </a:solidFill>
-                <a:latin typeface="Calibri"/>
-              </a:rPr>
-              <a:t>Kaplan &amp; Meier (1958) — Nonparametric Estimation</a:t>
-            </a:r>
-          </a:p>
-        </p:txBody>
-      </p:sp>
-      <p:sp>
-        <p:nvSpPr>
-          <p:cNvPr id="6" name="TextBox 5"/>
-          <p:cNvSpPr txBox="1"/>
-          <p:nvPr/>
-        </p:nvSpPr>
-        <p:spPr>
-          <a:xfrm>
-            <a:off x="1097280" y="2093976"/>
-            <a:ext cx="10546080" cy="274320"/>
-          </a:xfrm>
-          <a:prstGeom prst="rect">
-            <a:avLst/>
-          </a:prstGeom>
-          <a:noFill/>
-        </p:spPr>
-        <p:txBody>
-          <a:bodyPr wrap="square" anchor="t" lIns="0" rIns="0" tIns="0" bIns="0">
-            <a:spAutoFit/>
-          </a:bodyPr>
-          <a:lstStyle/>
-          <a:p>
-            <a:pPr algn="l"/>
-            <a:r>
-              <a:rPr sz="1200" b="0">
-                <a:solidFill>
-                  <a:srgbClr val="6E6E6E"/>
-                </a:solidFill>
-                <a:latin typeface="Calibri"/>
-              </a:rPr>
-              <a:t>JASA 53(282):457-481  —  el estimador producto-límite y la curva de retención</a:t>
-            </a:r>
-          </a:p>
-        </p:txBody>
-      </p:sp>
-      <p:sp>
-        <p:nvSpPr>
-          <p:cNvPr id="7" name="Oval 6"/>
-          <p:cNvSpPr/>
-          <p:nvPr/>
-        </p:nvSpPr>
-        <p:spPr>
-          <a:xfrm>
-            <a:off x="548640" y="2706624"/>
-            <a:ext cx="384048" cy="384048"/>
-          </a:xfrm>
-          <a:prstGeom prst="ellipse">
-            <a:avLst/>
-          </a:prstGeom>
-          <a:solidFill>
-            <a:srgbClr val="E4002B"/>
-          </a:solidFill>
-          <a:ln>
-            <a:noFill/>
-          </a:ln>
-          <a:effectLst/>
-        </p:spPr>
-        <p:style>
-          <a:lnRef idx="1">
-            <a:schemeClr val="accent1"/>
-          </a:lnRef>
-          <a:fillRef idx="3">
-            <a:schemeClr val="accent1"/>
-          </a:fillRef>
-          <a:effectRef idx="2">
-            <a:schemeClr val="accent1"/>
-          </a:effectRef>
-          <a:fontRef idx="minor">
-            <a:schemeClr val="lt1"/>
-          </a:fontRef>
-        </p:style>
-        <p:txBody>
-          <a:bodyPr rtlCol="0" anchor="ctr" lIns="0" rIns="0" tIns="0" bIns="0"/>
-          <a:lstStyle/>
-          <a:p>
-            <a:pPr algn="ctr"/>
-            <a:r>
-              <a:rPr sz="1400" b="1">
-                <a:solidFill>
-                  <a:srgbClr val="FFFFFF"/>
-                </a:solidFill>
-                <a:latin typeface="Calibri"/>
-              </a:rPr>
-              <a:t>2</a:t>
-            </a:r>
-          </a:p>
-        </p:txBody>
-      </p:sp>
-      <p:sp>
-        <p:nvSpPr>
-          <p:cNvPr id="8" name="TextBox 7"/>
-          <p:cNvSpPr txBox="1"/>
-          <p:nvPr/>
-        </p:nvSpPr>
-        <p:spPr>
-          <a:xfrm>
-            <a:off x="1097280" y="2679192"/>
-            <a:ext cx="10546080" cy="320040"/>
-          </a:xfrm>
-          <a:prstGeom prst="rect">
-            <a:avLst/>
-          </a:prstGeom>
-          <a:noFill/>
-        </p:spPr>
-        <p:txBody>
-          <a:bodyPr wrap="square" anchor="t" lIns="0" rIns="0" tIns="0" bIns="0">
-            <a:spAutoFit/>
-          </a:bodyPr>
-          <a:lstStyle/>
-          <a:p>
-            <a:pPr algn="l"/>
-            <a:r>
-              <a:rPr sz="1500" b="1">
-                <a:solidFill>
-                  <a:srgbClr val="2D2D2D"/>
-                </a:solidFill>
-                <a:latin typeface="Calibri"/>
-              </a:rPr>
-              <a:t>Cox (1972) — Regression Models and Life-Tables</a:t>
-            </a:r>
-          </a:p>
-        </p:txBody>
-      </p:sp>
-      <p:sp>
-        <p:nvSpPr>
-          <p:cNvPr id="9" name="TextBox 8"/>
-          <p:cNvSpPr txBox="1"/>
-          <p:nvPr/>
-        </p:nvSpPr>
-        <p:spPr>
-          <a:xfrm>
-            <a:off x="1097280" y="2990088"/>
-            <a:ext cx="10546080" cy="274320"/>
-          </a:xfrm>
-          <a:prstGeom prst="rect">
-            <a:avLst/>
-          </a:prstGeom>
-          <a:noFill/>
-        </p:spPr>
-        <p:txBody>
-          <a:bodyPr wrap="square" anchor="t" lIns="0" rIns="0" tIns="0" bIns="0">
-            <a:spAutoFit/>
-          </a:bodyPr>
-          <a:lstStyle/>
-          <a:p>
-            <a:pPr algn="l"/>
-            <a:r>
-              <a:rPr sz="1200" b="0">
-                <a:solidFill>
-                  <a:srgbClr val="6E6E6E"/>
-                </a:solidFill>
-                <a:latin typeface="Calibri"/>
-              </a:rPr>
-              <a:t>JRSS-B 34(2):187-220  —  el modelo de riesgos proporcionales y el hazard ratio</a:t>
-            </a:r>
-          </a:p>
-        </p:txBody>
-      </p:sp>
-      <p:sp>
-        <p:nvSpPr>
-          <p:cNvPr id="10" name="Oval 9"/>
-          <p:cNvSpPr/>
-          <p:nvPr/>
-        </p:nvSpPr>
-        <p:spPr>
-          <a:xfrm>
-            <a:off x="548640" y="3602736"/>
-            <a:ext cx="384048" cy="384048"/>
-          </a:xfrm>
-          <a:prstGeom prst="ellipse">
-            <a:avLst/>
-          </a:prstGeom>
-          <a:solidFill>
-            <a:srgbClr val="E4002B"/>
-          </a:solidFill>
-          <a:ln>
-            <a:noFill/>
-          </a:ln>
-          <a:effectLst/>
-        </p:spPr>
-        <p:style>
-          <a:lnRef idx="1">
-            <a:schemeClr val="accent1"/>
-          </a:lnRef>
-          <a:fillRef idx="3">
-            <a:schemeClr val="accent1"/>
-          </a:fillRef>
-          <a:effectRef idx="2">
-            <a:schemeClr val="accent1"/>
-          </a:effectRef>
-          <a:fontRef idx="minor">
-            <a:schemeClr val="lt1"/>
-          </a:fontRef>
-        </p:style>
-        <p:txBody>
-          <a:bodyPr rtlCol="0" anchor="ctr" lIns="0" rIns="0" tIns="0" bIns="0"/>
-          <a:lstStyle/>
-          <a:p>
-            <a:pPr algn="ctr"/>
-            <a:r>
-              <a:rPr sz="1400" b="1">
-                <a:solidFill>
-                  <a:srgbClr val="FFFFFF"/>
-                </a:solidFill>
-                <a:latin typeface="Calibri"/>
-              </a:rPr>
-              <a:t>3</a:t>
-            </a:r>
-          </a:p>
-        </p:txBody>
-      </p:sp>
-      <p:sp>
-        <p:nvSpPr>
-          <p:cNvPr id="11" name="TextBox 10"/>
-          <p:cNvSpPr txBox="1"/>
-          <p:nvPr/>
-        </p:nvSpPr>
-        <p:spPr>
-          <a:xfrm>
-            <a:off x="1097280" y="3575304"/>
-            <a:ext cx="10546080" cy="320040"/>
-          </a:xfrm>
-          <a:prstGeom prst="rect">
-            <a:avLst/>
-          </a:prstGeom>
-          <a:noFill/>
-        </p:spPr>
-        <p:txBody>
-          <a:bodyPr wrap="square" anchor="t" lIns="0" rIns="0" tIns="0" bIns="0">
-            <a:spAutoFit/>
-          </a:bodyPr>
-          <a:lstStyle/>
-          <a:p>
-            <a:pPr algn="l"/>
-            <a:r>
-              <a:rPr sz="1500" b="1">
-                <a:solidFill>
-                  <a:srgbClr val="2D2D2D"/>
-                </a:solidFill>
-                <a:latin typeface="Calibri"/>
-              </a:rPr>
-              <a:t>Therneau &amp; Grambsch (2000) — Modeling Survival Data</a:t>
-            </a:r>
-          </a:p>
-        </p:txBody>
-      </p:sp>
-      <p:sp>
-        <p:nvSpPr>
-          <p:cNvPr id="12" name="TextBox 11"/>
-          <p:cNvSpPr txBox="1"/>
-          <p:nvPr/>
-        </p:nvSpPr>
-        <p:spPr>
-          <a:xfrm>
-            <a:off x="1097280" y="3886200"/>
-            <a:ext cx="10546080" cy="274320"/>
-          </a:xfrm>
-          <a:prstGeom prst="rect">
-            <a:avLst/>
-          </a:prstGeom>
-          <a:noFill/>
-        </p:spPr>
-        <p:txBody>
-          <a:bodyPr wrap="square" anchor="t" lIns="0" rIns="0" tIns="0" bIns="0">
-            <a:spAutoFit/>
-          </a:bodyPr>
-          <a:lstStyle/>
-          <a:p>
-            <a:pPr algn="l"/>
-            <a:r>
-              <a:rPr sz="1200" b="0">
-                <a:solidFill>
-                  <a:srgbClr val="6E6E6E"/>
-                </a:solidFill>
-                <a:latin typeface="Calibri"/>
-              </a:rPr>
-              <a:t>Springer  —  diagnóstico de PH por residuales de Schoenfeld</a:t>
-            </a:r>
-          </a:p>
-        </p:txBody>
-      </p:sp>
-      <p:sp>
-        <p:nvSpPr>
-          <p:cNvPr id="13" name="Oval 12"/>
-          <p:cNvSpPr/>
-          <p:nvPr/>
-        </p:nvSpPr>
-        <p:spPr>
-          <a:xfrm>
-            <a:off x="548640" y="4498848"/>
-            <a:ext cx="384048" cy="384048"/>
-          </a:xfrm>
-          <a:prstGeom prst="ellipse">
-            <a:avLst/>
-          </a:prstGeom>
-          <a:solidFill>
-            <a:srgbClr val="E4002B"/>
-          </a:solidFill>
-          <a:ln>
-            <a:noFill/>
-          </a:ln>
-          <a:effectLst/>
-        </p:spPr>
-        <p:style>
-          <a:lnRef idx="1">
-            <a:schemeClr val="accent1"/>
-          </a:lnRef>
-          <a:fillRef idx="3">
-            <a:schemeClr val="accent1"/>
-          </a:fillRef>
-          <a:effectRef idx="2">
-            <a:schemeClr val="accent1"/>
-          </a:effectRef>
-          <a:fontRef idx="minor">
-            <a:schemeClr val="lt1"/>
-          </a:fontRef>
-        </p:style>
-        <p:txBody>
-          <a:bodyPr rtlCol="0" anchor="ctr" lIns="0" rIns="0" tIns="0" bIns="0"/>
-          <a:lstStyle/>
-          <a:p>
-            <a:pPr algn="ctr"/>
-            <a:r>
-              <a:rPr sz="1400" b="1">
-                <a:solidFill>
-                  <a:srgbClr val="FFFFFF"/>
-                </a:solidFill>
-                <a:latin typeface="Calibri"/>
-              </a:rPr>
-              <a:t>4</a:t>
-            </a:r>
-          </a:p>
-        </p:txBody>
-      </p:sp>
-      <p:sp>
-        <p:nvSpPr>
-          <p:cNvPr id="14" name="TextBox 13"/>
-          <p:cNvSpPr txBox="1"/>
-          <p:nvPr/>
-        </p:nvSpPr>
-        <p:spPr>
-          <a:xfrm>
-            <a:off x="1097280" y="4471416"/>
-            <a:ext cx="10546080" cy="320040"/>
-          </a:xfrm>
-          <a:prstGeom prst="rect">
-            <a:avLst/>
-          </a:prstGeom>
-          <a:noFill/>
-        </p:spPr>
-        <p:txBody>
-          <a:bodyPr wrap="square" anchor="t" lIns="0" rIns="0" tIns="0" bIns="0">
-            <a:spAutoFit/>
-          </a:bodyPr>
-          <a:lstStyle/>
-          <a:p>
-            <a:pPr algn="l"/>
-            <a:r>
-              <a:rPr sz="1500" b="1">
-                <a:solidFill>
-                  <a:srgbClr val="2D2D2D"/>
-                </a:solidFill>
-                <a:latin typeface="Calibri"/>
-              </a:rPr>
-              <a:t>Fader, Hardie &amp; Lee (2005) — RFM and CLV</a:t>
-            </a:r>
-          </a:p>
-        </p:txBody>
-      </p:sp>
-      <p:sp>
-        <p:nvSpPr>
-          <p:cNvPr id="15" name="TextBox 14"/>
-          <p:cNvSpPr txBox="1"/>
-          <p:nvPr/>
-        </p:nvSpPr>
-        <p:spPr>
-          <a:xfrm>
-            <a:off x="1097280" y="4782312"/>
-            <a:ext cx="10546080" cy="274320"/>
-          </a:xfrm>
-          <a:prstGeom prst="rect">
-            <a:avLst/>
-          </a:prstGeom>
-          <a:noFill/>
-        </p:spPr>
-        <p:txBody>
-          <a:bodyPr wrap="square" anchor="t" lIns="0" rIns="0" tIns="0" bIns="0">
-            <a:spAutoFit/>
-          </a:bodyPr>
-          <a:lstStyle/>
-          <a:p>
-            <a:pPr algn="l"/>
-            <a:r>
-              <a:rPr sz="1200" b="0">
-                <a:solidFill>
-                  <a:srgbClr val="6E6E6E"/>
-                </a:solidFill>
-                <a:latin typeface="Calibri"/>
-              </a:rPr>
-              <a:t>JMR 42(4):415-430  —  CLV desde probabilidades de retención/supervivencia</a:t>
-            </a:r>
-          </a:p>
-        </p:txBody>
-      </p:sp>
-      <p:sp>
-        <p:nvSpPr>
-          <p:cNvPr id="16" name="Oval 15"/>
-          <p:cNvSpPr/>
-          <p:nvPr/>
-        </p:nvSpPr>
-        <p:spPr>
-          <a:xfrm>
-            <a:off x="548640" y="6473952"/>
-            <a:ext cx="100584" cy="100584"/>
-          </a:xfrm>
-          <a:prstGeom prst="ellipse">
-            <a:avLst/>
-          </a:prstGeom>
-          <a:solidFill>
-            <a:srgbClr val="E4002B"/>
-          </a:solidFill>
-          <a:ln>
-            <a:noFill/>
-          </a:ln>
-          <a:effectLst/>
-        </p:spPr>
-        <p:style>
-          <a:lnRef idx="1">
-            <a:schemeClr val="accent1"/>
-          </a:lnRef>
-          <a:fillRef idx="3">
-            <a:schemeClr val="accent1"/>
-          </a:fillRef>
-          <a:effectRef idx="2">
-            <a:schemeClr val="accent1"/>
-          </a:effectRef>
-          <a:fontRef idx="minor">
-            <a:schemeClr val="lt1"/>
-          </a:fontRef>
-        </p:style>
-        <p:txBody>
-          <a:bodyPr rtlCol="0" anchor="ctr"/>
-          <a:lstStyle/>
-          <a:p>
-            <a:pPr algn="ctr"/>
-          </a:p>
-        </p:txBody>
-      </p:sp>
-      <p:sp>
-        <p:nvSpPr>
-          <p:cNvPr id="17" name="TextBox 16"/>
-          <p:cNvSpPr txBox="1"/>
-          <p:nvPr/>
-        </p:nvSpPr>
-        <p:spPr>
-          <a:xfrm>
-            <a:off x="749808" y="6437376"/>
-            <a:ext cx="7772400" cy="274320"/>
-          </a:xfrm>
-          <a:prstGeom prst="rect">
-            <a:avLst/>
-          </a:prstGeom>
-          <a:noFill/>
-        </p:spPr>
-        <p:txBody>
-          <a:bodyPr wrap="square" anchor="t" lIns="0" rIns="0" tIns="0" bIns="0">
-            <a:spAutoFit/>
-          </a:bodyPr>
-          <a:lstStyle/>
-          <a:p>
-            <a:pPr algn="l"/>
-            <a:r>
-              <a:rPr sz="900" b="0">
-                <a:solidFill>
-                  <a:srgbClr val="6E6E6E"/>
-                </a:solidFill>
-                <a:latin typeface="Calibri"/>
-              </a:rPr>
-              <a:t>S13 — Herramientas para la Ciencia de Datos, UPC</a:t>
-            </a:r>
-          </a:p>
-        </p:txBody>
-      </p:sp>
-      <p:sp>
-        <p:nvSpPr>
-          <p:cNvPr id="18" name="TextBox 17"/>
-          <p:cNvSpPr txBox="1"/>
-          <p:nvPr/>
-        </p:nvSpPr>
-        <p:spPr>
-          <a:xfrm>
-            <a:off x="10180320" y="6437376"/>
-            <a:ext cx="1463040" cy="274320"/>
-          </a:xfrm>
-          <a:prstGeom prst="rect">
-            <a:avLst/>
-          </a:prstGeom>
-          <a:noFill/>
-        </p:spPr>
-        <p:txBody>
-          <a:bodyPr wrap="square" anchor="t" lIns="0" rIns="0" tIns="0" bIns="0">
-            <a:spAutoFit/>
-          </a:bodyPr>
-          <a:lstStyle/>
-          <a:p>
-            <a:pPr algn="r"/>
-            <a:r>
-              <a:rPr sz="900" b="0">
-                <a:solidFill>
-                  <a:srgbClr val="6E6E6E"/>
-                </a:solidFill>
-                <a:latin typeface="Calibri"/>
-              </a:rPr>
-              <a:t>19 / 19</a:t>
+              <a:t>14 / 14</a:t>
             </a:r>
           </a:p>
         </p:txBody>
@@ -10384,7 +8338,7 @@
                 </a:solidFill>
                 <a:latin typeface="Calibri"/>
               </a:rPr>
-              <a:t>2 / 19</a:t>
+              <a:t>2 / 14</a:t>
             </a:r>
           </a:p>
         </p:txBody>
@@ -10403,7 +8357,7 @@
     <p:bg>
       <p:bgPr>
         <a:solidFill>
-          <a:srgbClr val="9B1B30"/>
+          <a:srgbClr val="FFFFFF"/>
         </a:solidFill>
         <a:effectLst/>
       </p:bgPr>
@@ -10417,20 +8371,90 @@
       <p:grpSpPr/>
       <p:sp>
         <p:nvSpPr>
-          <p:cNvPr id="2" name="Oval 1"/>
+          <p:cNvPr id="2" name="TextBox 1"/>
+          <p:cNvSpPr txBox="1"/>
+          <p:nvPr/>
+        </p:nvSpPr>
+        <p:spPr>
+          <a:xfrm>
+            <a:off x="548640" y="411480"/>
+            <a:ext cx="11094720" cy="292608"/>
+          </a:xfrm>
+          <a:prstGeom prst="rect">
+            <a:avLst/>
+          </a:prstGeom>
+          <a:noFill/>
+        </p:spPr>
+        <p:txBody>
+          <a:bodyPr wrap="square" anchor="t" lIns="0" rIns="0" tIns="0" bIns="0">
+            <a:spAutoFit/>
+          </a:bodyPr>
+          <a:lstStyle/>
+          <a:p>
+            <a:pPr algn="l"/>
+            <a:r>
+              <a:rPr sz="1300" b="1">
+                <a:solidFill>
+                  <a:srgbClr val="9B1B30"/>
+                </a:solidFill>
+                <a:latin typeface="Calibri"/>
+              </a:rPr>
+              <a:t>DEFINICIONES — DIAGNÓSTICO DEL MODELO</a:t>
+            </a:r>
+          </a:p>
+        </p:txBody>
+      </p:sp>
+      <p:sp>
+        <p:nvSpPr>
+          <p:cNvPr id="3" name="TextBox 2"/>
+          <p:cNvSpPr txBox="1"/>
+          <p:nvPr/>
+        </p:nvSpPr>
+        <p:spPr>
+          <a:xfrm>
+            <a:off x="548640" y="731520"/>
+            <a:ext cx="11094720" cy="777240"/>
+          </a:xfrm>
+          <a:prstGeom prst="rect">
+            <a:avLst/>
+          </a:prstGeom>
+          <a:noFill/>
+        </p:spPr>
+        <p:txBody>
+          <a:bodyPr wrap="square" anchor="t" lIns="0" rIns="0" tIns="0" bIns="0">
+            <a:spAutoFit/>
+          </a:bodyPr>
+          <a:lstStyle/>
+          <a:p>
+            <a:pPr algn="l"/>
+            <a:r>
+              <a:rPr sz="4000" b="1">
+                <a:solidFill>
+                  <a:srgbClr val="2D2D2D"/>
+                </a:solidFill>
+                <a:latin typeface="Calibri"/>
+              </a:rPr>
+              <a:t>Schoenfeld revela si el HR cambia con el tiempo</a:t>
+            </a:r>
+          </a:p>
+        </p:txBody>
+      </p:sp>
+      <p:sp>
+        <p:nvSpPr>
+          <p:cNvPr id="4" name="Oval 3"/>
           <p:cNvSpPr/>
           <p:nvPr/>
         </p:nvSpPr>
         <p:spPr>
           <a:xfrm>
-            <a:off x="914400" y="2103120"/>
-            <a:ext cx="2377440" cy="2377440"/>
+            <a:off x="548640" y="2642616"/>
+            <a:ext cx="658368" cy="658368"/>
           </a:xfrm>
           <a:prstGeom prst="ellipse">
             <a:avLst/>
           </a:prstGeom>
           <a:solidFill>
-            <a:srgbClr val="FFFFFF"/>
+            <a:srgbClr val="E4002B"/>
           </a:solidFill>
           <a:ln>
             <a:noFill/>
@@ -10452,32 +8476,47 @@
           </a:fontRef>
         </p:style>
         <p:txBody>
-          <a:bodyPr rtlCol="0" anchor="ctr" lIns="0" rIns="0" tIns="0" bIns="0"/>
+          <a:bodyPr rtlCol="0" anchor="ctr"/>
           <a:lstStyle/>
           <a:p>
             <a:pPr algn="ctr"/>
-            <a:r>
-              <a:rPr sz="10000" b="1">
-                <a:solidFill>
-                  <a:srgbClr val="9B1B30"/>
-                </a:solidFill>
-                <a:latin typeface="Calibri"/>
-              </a:rPr>
-              <a:t>6</a:t>
-            </a:r>
-          </a:p>
-        </p:txBody>
-      </p:sp>
-      <p:sp>
-        <p:nvSpPr>
-          <p:cNvPr id="3" name="TextBox 2"/>
+          </a:p>
+        </p:txBody>
+      </p:sp>
+      <p:pic>
+        <p:nvPicPr>
+          <p:cNvPr id="5" name="Picture 4" descr="clock__FFFFFF.png"/>
+          <p:cNvPicPr>
+            <a:picLocks noChangeAspect="1"/>
+          </p:cNvPicPr>
+          <p:nvPr/>
+        </p:nvPicPr>
+        <p:blipFill>
+          <a:blip r:embed="rId2"/>
+          <a:stretch>
+            <a:fillRect/>
+          </a:stretch>
+        </p:blipFill>
+        <p:spPr>
+          <a:xfrm>
+            <a:off x="732983" y="2826959"/>
+            <a:ext cx="289682" cy="289682"/>
+          </a:xfrm>
+          <a:prstGeom prst="rect">
+            <a:avLst/>
+          </a:prstGeom>
+        </p:spPr>
+      </p:pic>
+      <p:sp>
+        <p:nvSpPr>
+          <p:cNvPr id="6" name="TextBox 5"/>
           <p:cNvSpPr txBox="1"/>
           <p:nvPr/>
         </p:nvSpPr>
         <p:spPr>
           <a:xfrm>
-            <a:off x="3931920" y="2651760"/>
-            <a:ext cx="7589520" cy="1371600"/>
+            <a:off x="1508760" y="1938528"/>
+            <a:ext cx="10134600" cy="411480"/>
           </a:xfrm>
           <a:prstGeom prst="rect">
             <a:avLst/>
@@ -10492,27 +8531,27 @@
           <a:p>
             <a:pPr algn="l"/>
             <a:r>
-              <a:rPr sz="4000" b="1">
-                <a:solidFill>
-                  <a:srgbClr val="FFFFFF"/>
+              <a:rPr sz="1800" b="1">
+                <a:solidFill>
+                  <a:srgbClr val="9B1B30"/>
                 </a:solidFill>
                 <a:latin typeface="Calibri"/>
               </a:rPr>
-              <a:t>¿Cuándo se puede confiar en un modelo de Cox?</a:t>
-            </a:r>
-          </a:p>
-        </p:txBody>
-      </p:sp>
-      <p:sp>
-        <p:nvSpPr>
-          <p:cNvPr id="4" name="TextBox 3"/>
+              <a:t>Supuesto de hazards proporcionales</a:t>
+            </a:r>
+          </a:p>
+        </p:txBody>
+      </p:sp>
+      <p:sp>
+        <p:nvSpPr>
+          <p:cNvPr id="7" name="TextBox 6"/>
           <p:cNvSpPr txBox="1"/>
           <p:nvPr/>
         </p:nvSpPr>
         <p:spPr>
           <a:xfrm>
-            <a:off x="3931920" y="3977639"/>
-            <a:ext cx="7589520" cy="914400"/>
+            <a:off x="1508760" y="2395728"/>
+            <a:ext cx="10134600" cy="1645920"/>
           </a:xfrm>
           <a:prstGeom prst="rect">
             <a:avLst/>
@@ -10525,15 +8564,309 @@
           </a:bodyPr>
           <a:lstStyle/>
           <a:p>
+            <a:pPr algn="l">
+              <a:lnSpc>
+                <a:spcPct val="110000"/>
+              </a:lnSpc>
+            </a:pPr>
+            <a:r>
+              <a:rPr sz="1400" b="0">
+                <a:solidFill>
+                  <a:srgbClr val="2D2D2D"/>
+                </a:solidFill>
+                <a:latin typeface="Calibri"/>
+              </a:rPr>
+              <a:t>El HR de cada covariable se asume constante en el tiempo: las curvas de hazard no se cruzan. Si no, induce a error.</a:t>
+            </a:r>
+          </a:p>
+        </p:txBody>
+      </p:sp>
+      <p:sp>
+        <p:nvSpPr>
+          <p:cNvPr id="8" name="Oval 7"/>
+          <p:cNvSpPr/>
+          <p:nvPr/>
+        </p:nvSpPr>
+        <p:spPr>
+          <a:xfrm>
+            <a:off x="548640" y="4928616"/>
+            <a:ext cx="658368" cy="658368"/>
+          </a:xfrm>
+          <a:prstGeom prst="ellipse">
+            <a:avLst/>
+          </a:prstGeom>
+          <a:solidFill>
+            <a:srgbClr val="E4002B"/>
+          </a:solidFill>
+          <a:ln>
+            <a:noFill/>
+          </a:ln>
+          <a:effectLst/>
+        </p:spPr>
+        <p:style>
+          <a:lnRef idx="1">
+            <a:schemeClr val="accent1"/>
+          </a:lnRef>
+          <a:fillRef idx="3">
+            <a:schemeClr val="accent1"/>
+          </a:fillRef>
+          <a:effectRef idx="2">
+            <a:schemeClr val="accent1"/>
+          </a:effectRef>
+          <a:fontRef idx="minor">
+            <a:schemeClr val="lt1"/>
+          </a:fontRef>
+        </p:style>
+        <p:txBody>
+          <a:bodyPr rtlCol="0" anchor="ctr"/>
+          <a:lstStyle/>
+          <a:p>
+            <a:pPr algn="ctr"/>
+          </a:p>
+        </p:txBody>
+      </p:sp>
+      <p:pic>
+        <p:nvPicPr>
+          <p:cNvPr id="9" name="Picture 8" descr="triangle-alert__FFFFFF.png"/>
+          <p:cNvPicPr>
+            <a:picLocks noChangeAspect="1"/>
+          </p:cNvPicPr>
+          <p:nvPr/>
+        </p:nvPicPr>
+        <p:blipFill>
+          <a:blip r:embed="rId3"/>
+          <a:stretch>
+            <a:fillRect/>
+          </a:stretch>
+        </p:blipFill>
+        <p:spPr>
+          <a:xfrm>
+            <a:off x="732983" y="5112959"/>
+            <a:ext cx="289682" cy="289682"/>
+          </a:xfrm>
+          <a:prstGeom prst="rect">
+            <a:avLst/>
+          </a:prstGeom>
+        </p:spPr>
+      </p:pic>
+      <p:sp>
+        <p:nvSpPr>
+          <p:cNvPr id="10" name="TextBox 9"/>
+          <p:cNvSpPr txBox="1"/>
+          <p:nvPr/>
+        </p:nvSpPr>
+        <p:spPr>
+          <a:xfrm>
+            <a:off x="1508760" y="4224528"/>
+            <a:ext cx="10134600" cy="411480"/>
+          </a:xfrm>
+          <a:prstGeom prst="rect">
+            <a:avLst/>
+          </a:prstGeom>
+          <a:noFill/>
+        </p:spPr>
+        <p:txBody>
+          <a:bodyPr wrap="square" anchor="t" lIns="0" rIns="0" tIns="0" bIns="0">
+            <a:spAutoFit/>
+          </a:bodyPr>
+          <a:lstStyle/>
+          <a:p>
             <a:pPr algn="l"/>
             <a:r>
-              <a:rPr sz="1700" b="0">
-                <a:solidFill>
-                  <a:srgbClr val="FCEDEE"/>
+              <a:rPr sz="1800" b="1">
+                <a:solidFill>
+                  <a:srgbClr val="9B1B30"/>
                 </a:solidFill>
                 <a:latin typeface="Calibri"/>
               </a:rPr>
-              <a:t>Capítulo 13.6 — viernes, bloque B</a:t>
+              <a:t>Residuales de Schoenfeld</a:t>
+            </a:r>
+          </a:p>
+        </p:txBody>
+      </p:sp>
+      <p:sp>
+        <p:nvSpPr>
+          <p:cNvPr id="11" name="TextBox 10"/>
+          <p:cNvSpPr txBox="1"/>
+          <p:nvPr/>
+        </p:nvSpPr>
+        <p:spPr>
+          <a:xfrm>
+            <a:off x="1508760" y="4681728"/>
+            <a:ext cx="10134600" cy="1645920"/>
+          </a:xfrm>
+          <a:prstGeom prst="rect">
+            <a:avLst/>
+          </a:prstGeom>
+          <a:noFill/>
+        </p:spPr>
+        <p:txBody>
+          <a:bodyPr wrap="square" anchor="t" lIns="0" rIns="0" tIns="0" bIns="0">
+            <a:spAutoFit/>
+          </a:bodyPr>
+          <a:lstStyle/>
+          <a:p>
+            <a:pPr algn="l">
+              <a:lnSpc>
+                <a:spcPct val="110000"/>
+              </a:lnSpc>
+            </a:pPr>
+            <a:r>
+              <a:rPr sz="1400" b="0">
+                <a:solidFill>
+                  <a:srgbClr val="2D2D2D"/>
+                </a:solidFill>
+                <a:latin typeface="Calibri"/>
+              </a:rPr>
+              <a:t>Si muestran tendencia temporal, el supuesto se viola. Un p bajo por variable señala que su efecto cambia con el tiempo.</a:t>
+            </a:r>
+          </a:p>
+        </p:txBody>
+      </p:sp>
+      <p:sp>
+        <p:nvSpPr>
+          <p:cNvPr id="12" name="TextBox 11"/>
+          <p:cNvSpPr txBox="1"/>
+          <p:nvPr/>
+        </p:nvSpPr>
+        <p:spPr>
+          <a:xfrm>
+            <a:off x="548640" y="5870448"/>
+            <a:ext cx="11064240" cy="320040"/>
+          </a:xfrm>
+          <a:prstGeom prst="rect">
+            <a:avLst/>
+          </a:prstGeom>
+          <a:noFill/>
+        </p:spPr>
+        <p:txBody>
+          <a:bodyPr wrap="square">
+            <a:spAutoFit/>
+          </a:bodyPr>
+          <a:lstStyle/>
+          <a:p>
+            <a:r>
+              <a:rPr sz="1000">
+                <a:solidFill>
+                  <a:srgbClr val="6E6E6E"/>
+                </a:solidFill>
+                <a:latin typeface="Calibri"/>
+              </a:rPr>
+              <a:t>DEFINICIONES punto 9, Therneau &amp; Grambsch (2000), Modeling Survival Data; Cox (1972). Se corrige estratificando o interactuando con el tiempo, no borrando.</a:t>
+            </a:r>
+          </a:p>
+        </p:txBody>
+      </p:sp>
+      <p:sp>
+        <p:nvSpPr>
+          <p:cNvPr id="13" name="Oval 12"/>
+          <p:cNvSpPr/>
+          <p:nvPr/>
+        </p:nvSpPr>
+        <p:spPr>
+          <a:xfrm>
+            <a:off x="548640" y="6473952"/>
+            <a:ext cx="100584" cy="100584"/>
+          </a:xfrm>
+          <a:prstGeom prst="ellipse">
+            <a:avLst/>
+          </a:prstGeom>
+          <a:solidFill>
+            <a:srgbClr val="E4002B"/>
+          </a:solidFill>
+          <a:ln>
+            <a:noFill/>
+          </a:ln>
+          <a:effectLst/>
+        </p:spPr>
+        <p:style>
+          <a:lnRef idx="1">
+            <a:schemeClr val="accent1"/>
+          </a:lnRef>
+          <a:fillRef idx="3">
+            <a:schemeClr val="accent1"/>
+          </a:fillRef>
+          <a:effectRef idx="2">
+            <a:schemeClr val="accent1"/>
+          </a:effectRef>
+          <a:fontRef idx="minor">
+            <a:schemeClr val="lt1"/>
+          </a:fontRef>
+        </p:style>
+        <p:txBody>
+          <a:bodyPr rtlCol="0" anchor="ctr"/>
+          <a:lstStyle/>
+          <a:p>
+            <a:pPr algn="ctr"/>
+          </a:p>
+        </p:txBody>
+      </p:sp>
+      <p:sp>
+        <p:nvSpPr>
+          <p:cNvPr id="14" name="TextBox 13"/>
+          <p:cNvSpPr txBox="1"/>
+          <p:nvPr/>
+        </p:nvSpPr>
+        <p:spPr>
+          <a:xfrm>
+            <a:off x="749808" y="6437376"/>
+            <a:ext cx="7772400" cy="274320"/>
+          </a:xfrm>
+          <a:prstGeom prst="rect">
+            <a:avLst/>
+          </a:prstGeom>
+          <a:noFill/>
+        </p:spPr>
+        <p:txBody>
+          <a:bodyPr wrap="square" anchor="t" lIns="0" rIns="0" tIns="0" bIns="0">
+            <a:spAutoFit/>
+          </a:bodyPr>
+          <a:lstStyle/>
+          <a:p>
+            <a:pPr algn="l"/>
+            <a:r>
+              <a:rPr sz="900" b="0">
+                <a:solidFill>
+                  <a:srgbClr val="6E6E6E"/>
+                </a:solidFill>
+                <a:latin typeface="Calibri"/>
+              </a:rPr>
+              <a:t>S13 — Herramientas para la Ciencia de Datos, UPC</a:t>
+            </a:r>
+          </a:p>
+        </p:txBody>
+      </p:sp>
+      <p:sp>
+        <p:nvSpPr>
+          <p:cNvPr id="15" name="TextBox 14"/>
+          <p:cNvSpPr txBox="1"/>
+          <p:nvPr/>
+        </p:nvSpPr>
+        <p:spPr>
+          <a:xfrm>
+            <a:off x="10180320" y="6437376"/>
+            <a:ext cx="1463040" cy="274320"/>
+          </a:xfrm>
+          <a:prstGeom prst="rect">
+            <a:avLst/>
+          </a:prstGeom>
+          <a:noFill/>
+        </p:spPr>
+        <p:txBody>
+          <a:bodyPr wrap="square" anchor="t" lIns="0" rIns="0" tIns="0" bIns="0">
+            <a:spAutoFit/>
+          </a:bodyPr>
+          <a:lstStyle/>
+          <a:p>
+            <a:pPr algn="r"/>
+            <a:r>
+              <a:rPr sz="900" b="0">
+                <a:solidFill>
+                  <a:srgbClr val="6E6E6E"/>
+                </a:solidFill>
+                <a:latin typeface="Calibri"/>
+              </a:rPr>
+              <a:t>3 / 14</a:t>
             </a:r>
           </a:p>
         </p:txBody>
@@ -10594,7 +8927,7 @@
                 </a:solidFill>
                 <a:latin typeface="Calibri"/>
               </a:rPr>
-              <a:t>DEFINICIONES — DIAGNÓSTICO DEL MODELO</a:t>
+              <a:t>DIAGNÓSTICO, LIFELINES, PROPORTIONAL_HAZARD_TEST</a:t>
             </a:r>
           </a:p>
         </p:txBody>
@@ -10629,21 +8962,371 @@
                 </a:solidFill>
                 <a:latin typeface="Calibri"/>
               </a:rPr>
-              <a:t>Schoenfeld revela si el HR cambia con el tiempo</a:t>
-            </a:r>
-          </a:p>
-        </p:txBody>
-      </p:sp>
-      <p:sp>
-        <p:nvSpPr>
-          <p:cNvPr id="4" name="Oval 3"/>
+              <a:t>Schoenfeld delata si el HR cambia con el tiempo</a:t>
+            </a:r>
+          </a:p>
+        </p:txBody>
+      </p:sp>
+      <p:sp>
+        <p:nvSpPr>
+          <p:cNvPr id="4" name="TextBox 3"/>
+          <p:cNvSpPr txBox="1"/>
+          <p:nvPr/>
+        </p:nvSpPr>
+        <p:spPr>
+          <a:xfrm>
+            <a:off x="548640" y="1755648"/>
+            <a:ext cx="11094720" cy="457200"/>
+          </a:xfrm>
+          <a:prstGeom prst="rect">
+            <a:avLst/>
+          </a:prstGeom>
+          <a:noFill/>
+        </p:spPr>
+        <p:txBody>
+          <a:bodyPr wrap="square" lIns="0" tIns="0" bIns="0">
+            <a:spAutoFit/>
+          </a:bodyPr>
+          <a:lstStyle/>
+          <a:p>
+            <a:r>
+              <a:rPr sz="1400" b="1">
+                <a:solidFill>
+                  <a:srgbClr val="9B1B30"/>
+                </a:solidFill>
+                <a:latin typeface="Calibri"/>
+              </a:rPr>
+              <a:t>▸ Qué hace:  </a:t>
+            </a:r>
+            <a:r>
+              <a:rPr sz="1400">
+                <a:solidFill>
+                  <a:srgbClr val="2D2D2D"/>
+                </a:solidFill>
+                <a:latin typeface="Calibri"/>
+              </a:rPr>
+              <a:t>contrasta hazards proporcionales con los residuales de Schoenfeld; un p bajo delata que el HR cambia.</a:t>
+            </a:r>
+          </a:p>
+        </p:txBody>
+      </p:sp>
+      <p:sp>
+        <p:nvSpPr>
+          <p:cNvPr id="5" name="Rounded Rectangle 4"/>
           <p:cNvSpPr/>
           <p:nvPr/>
         </p:nvSpPr>
         <p:spPr>
           <a:xfrm>
-            <a:off x="548640" y="2642616"/>
-            <a:ext cx="658368" cy="658368"/>
+            <a:off x="548640" y="2395728"/>
+            <a:ext cx="11094720" cy="2980944"/>
+          </a:xfrm>
+          <a:prstGeom prst="roundRect">
+            <a:avLst/>
+          </a:prstGeom>
+          <a:solidFill>
+            <a:srgbClr val="F4F4F4"/>
+          </a:solidFill>
+          <a:ln w="9525">
+            <a:solidFill>
+              <a:srgbClr val="DDDDDD"/>
+            </a:solidFill>
+          </a:ln>
+          <a:effectLst/>
+        </p:spPr>
+        <p:style>
+          <a:lnRef idx="1">
+            <a:schemeClr val="accent1"/>
+          </a:lnRef>
+          <a:fillRef idx="3">
+            <a:schemeClr val="accent1"/>
+          </a:fillRef>
+          <a:effectRef idx="2">
+            <a:schemeClr val="accent1"/>
+          </a:effectRef>
+          <a:fontRef idx="minor">
+            <a:schemeClr val="lt1"/>
+          </a:fontRef>
+        </p:style>
+        <p:txBody>
+          <a:bodyPr rtlCol="0" anchor="ctr"/>
+          <a:lstStyle/>
+          <a:p>
+            <a:pPr algn="ctr"/>
+          </a:p>
+        </p:txBody>
+      </p:sp>
+      <p:sp>
+        <p:nvSpPr>
+          <p:cNvPr id="6" name="TextBox 5"/>
+          <p:cNvSpPr txBox="1"/>
+          <p:nvPr/>
+        </p:nvSpPr>
+        <p:spPr>
+          <a:xfrm>
+            <a:off x="804672" y="2542032"/>
+            <a:ext cx="10637520" cy="256032"/>
+          </a:xfrm>
+          <a:prstGeom prst="rect">
+            <a:avLst/>
+          </a:prstGeom>
+          <a:noFill/>
+        </p:spPr>
+        <p:txBody>
+          <a:bodyPr wrap="none" lIns="0" tIns="0" bIns="0">
+            <a:spAutoFit/>
+          </a:bodyPr>
+          <a:lstStyle/>
+          <a:p>
+            <a:r>
+              <a:rPr sz="1050" b="1">
+                <a:solidFill>
+                  <a:srgbClr val="9B1B30"/>
+                </a:solidFill>
+                <a:latin typeface="Calibri"/>
+              </a:rPr>
+              <a:t>CÓDIGO REAL DEL CUADERNO</a:t>
+            </a:r>
+          </a:p>
+        </p:txBody>
+      </p:sp>
+      <p:sp>
+        <p:nvSpPr>
+          <p:cNvPr id="7" name="TextBox 6"/>
+          <p:cNvSpPr txBox="1"/>
+          <p:nvPr/>
+        </p:nvSpPr>
+        <p:spPr>
+          <a:xfrm>
+            <a:off x="859536" y="2926080"/>
+            <a:ext cx="10472928" cy="2377440"/>
+          </a:xfrm>
+          <a:prstGeom prst="rect">
+            <a:avLst/>
+          </a:prstGeom>
+          <a:noFill/>
+        </p:spPr>
+        <p:txBody>
+          <a:bodyPr wrap="square" lIns="0" tIns="0" bIns="0">
+            <a:spAutoFit/>
+          </a:bodyPr>
+          <a:lstStyle/>
+          <a:p>
+            <a:pPr>
+              <a:lnSpc>
+                <a:spcPct val="130000"/>
+              </a:lnSpc>
+              <a:spcAft>
+                <a:spcPts val="400"/>
+              </a:spcAft>
+            </a:pPr>
+            <a:r>
+              <a:rPr sz="1200">
+                <a:solidFill>
+                  <a:srgbClr val="2D2D2D"/>
+                </a:solidFill>
+                <a:latin typeface="Consolas"/>
+              </a:rPr>
+              <a:t>from lifelines.statistics import proportional_hazard_test</a:t>
+            </a:r>
+          </a:p>
+          <a:p>
+            <a:pPr>
+              <a:lnSpc>
+                <a:spcPct val="130000"/>
+              </a:lnSpc>
+              <a:spcAft>
+                <a:spcPts val="400"/>
+              </a:spcAft>
+            </a:pPr>
+            <a:r>
+              <a:rPr sz="1200">
+                <a:solidFill>
+                  <a:srgbClr val="2D2D2D"/>
+                </a:solidFill>
+                <a:latin typeface="Consolas"/>
+              </a:rPr>
+              <a:t/>
+            </a:r>
+          </a:p>
+          <a:p>
+            <a:pPr>
+              <a:lnSpc>
+                <a:spcPct val="130000"/>
+              </a:lnSpc>
+              <a:spcAft>
+                <a:spcPts val="400"/>
+              </a:spcAft>
+            </a:pPr>
+            <a:r>
+              <a:rPr sz="1200">
+                <a:solidFill>
+                  <a:srgbClr val="2D2D2D"/>
+                </a:solidFill>
+                <a:latin typeface="Consolas"/>
+              </a:rPr>
+              <a:t>zph = proportional_hazard_test(cph, rossi, time_transform="rank")</a:t>
+            </a:r>
+          </a:p>
+          <a:p>
+            <a:pPr>
+              <a:lnSpc>
+                <a:spcPct val="130000"/>
+              </a:lnSpc>
+              <a:spcAft>
+                <a:spcPts val="400"/>
+              </a:spcAft>
+            </a:pPr>
+            <a:r>
+              <a:rPr sz="1200">
+                <a:solidFill>
+                  <a:srgbClr val="2D2D2D"/>
+                </a:solidFill>
+                <a:latin typeface="Consolas"/>
+              </a:rPr>
+              <a:t>print(zph.summary[["test_statistic", "p"]].round(4).to_string())</a:t>
+            </a:r>
+          </a:p>
+          <a:p>
+            <a:pPr>
+              <a:lnSpc>
+                <a:spcPct val="130000"/>
+              </a:lnSpc>
+              <a:spcAft>
+                <a:spcPts val="400"/>
+              </a:spcAft>
+            </a:pPr>
+            <a:r>
+              <a:rPr sz="1200">
+                <a:solidFill>
+                  <a:srgbClr val="2D2D2D"/>
+                </a:solidFill>
+                <a:latin typeface="Consolas"/>
+              </a:rPr>
+              <a:t>p_age = float(zph.summary.loc["age", "p"])</a:t>
+            </a:r>
+          </a:p>
+          <a:p>
+            <a:pPr>
+              <a:lnSpc>
+                <a:spcPct val="130000"/>
+              </a:lnSpc>
+              <a:spcAft>
+                <a:spcPts val="400"/>
+              </a:spcAft>
+            </a:pPr>
+            <a:r>
+              <a:rPr sz="1200">
+                <a:solidFill>
+                  <a:srgbClr val="2D2D2D"/>
+                </a:solidFill>
+                <a:latin typeface="Consolas"/>
+              </a:rPr>
+              <a:t># age  p 0,0007  -&gt;  VIOLA PH (p &lt; 0,01);  fin/prio cumplen (p &gt; 0,10)</a:t>
+            </a:r>
+          </a:p>
+        </p:txBody>
+      </p:sp>
+      <p:sp>
+        <p:nvSpPr>
+          <p:cNvPr id="8" name="TextBox 7"/>
+          <p:cNvSpPr txBox="1"/>
+          <p:nvPr/>
+        </p:nvSpPr>
+        <p:spPr>
+          <a:xfrm>
+            <a:off x="548640" y="5961888"/>
+            <a:ext cx="11094720" cy="292608"/>
+          </a:xfrm>
+          <a:prstGeom prst="rect">
+            <a:avLst/>
+          </a:prstGeom>
+          <a:noFill/>
+        </p:spPr>
+        <p:txBody>
+          <a:bodyPr wrap="square" anchor="t" lIns="0" rIns="0" tIns="0" bIns="0">
+            <a:spAutoFit/>
+          </a:bodyPr>
+          <a:lstStyle/>
+          <a:p>
+            <a:pPr algn="l"/>
+            <a:r>
+              <a:rPr sz="1000" b="0">
+                <a:solidFill>
+                  <a:srgbClr val="6E6E6E"/>
+                </a:solidFill>
+                <a:latin typeface="Calibri"/>
+              </a:rPr>
+              <a:t>notebook Sección 2, diagnóstico de PH, age p → survival!B5 (viola PH), resto en la hoja schoenfeld — venv/Excel.</a:t>
+            </a:r>
+          </a:p>
+        </p:txBody>
+      </p:sp>
+      <p:sp>
+        <p:nvSpPr>
+          <p:cNvPr id="9" name="Rounded Rectangle 8"/>
+          <p:cNvSpPr/>
+          <p:nvPr/>
+        </p:nvSpPr>
+        <p:spPr>
+          <a:xfrm>
+            <a:off x="9098280" y="310896"/>
+            <a:ext cx="2560320" cy="402336"/>
+          </a:xfrm>
+          <a:prstGeom prst="roundRect">
+            <a:avLst/>
+          </a:prstGeom>
+          <a:solidFill>
+            <a:srgbClr val="FCEDEE"/>
+          </a:solidFill>
+          <a:ln w="15875">
+            <a:solidFill>
+              <a:srgbClr val="E4002B"/>
+            </a:solidFill>
+          </a:ln>
+          <a:effectLst/>
+        </p:spPr>
+        <p:style>
+          <a:lnRef idx="1">
+            <a:schemeClr val="accent1"/>
+          </a:lnRef>
+          <a:fillRef idx="3">
+            <a:schemeClr val="accent1"/>
+          </a:fillRef>
+          <a:effectRef idx="2">
+            <a:schemeClr val="accent1"/>
+          </a:effectRef>
+          <a:fontRef idx="minor">
+            <a:schemeClr val="lt1"/>
+          </a:fontRef>
+        </p:style>
+        <p:txBody>
+          <a:bodyPr rtlCol="0" anchor="ctr" lIns="54864" rIns="54864" tIns="0" bIns="0"/>
+          <a:lstStyle/>
+          <a:p>
+            <a:pPr algn="ctr"/>
+            <a:r>
+              <a:rPr sz="1300" b="1">
+                <a:solidFill>
+                  <a:srgbClr val="9B1B30"/>
+                </a:solidFill>
+                <a:latin typeface="Calibri"/>
+              </a:rPr>
+              <a:t>▶  Notebook, celda 11</a:t>
+            </a:r>
+          </a:p>
+        </p:txBody>
+      </p:sp>
+      <p:sp>
+        <p:nvSpPr>
+          <p:cNvPr id="10" name="Oval 9"/>
+          <p:cNvSpPr/>
+          <p:nvPr/>
+        </p:nvSpPr>
+        <p:spPr>
+          <a:xfrm>
+            <a:off x="548640" y="6473952"/>
+            <a:ext cx="100584" cy="100584"/>
           </a:xfrm>
           <a:prstGeom prst="ellipse">
             <a:avLst/>
@@ -10678,40 +9361,16 @@
           </a:p>
         </p:txBody>
       </p:sp>
-      <p:pic>
-        <p:nvPicPr>
-          <p:cNvPr id="5" name="Picture 4" descr="clock__FFFFFF.png"/>
-          <p:cNvPicPr>
-            <a:picLocks noChangeAspect="1"/>
-          </p:cNvPicPr>
-          <p:nvPr/>
-        </p:nvPicPr>
-        <p:blipFill>
-          <a:blip r:embed="rId2"/>
-          <a:stretch>
-            <a:fillRect/>
-          </a:stretch>
-        </p:blipFill>
-        <p:spPr>
-          <a:xfrm>
-            <a:off x="732983" y="2826959"/>
-            <a:ext cx="289682" cy="289682"/>
-          </a:xfrm>
-          <a:prstGeom prst="rect">
-            <a:avLst/>
-          </a:prstGeom>
-        </p:spPr>
-      </p:pic>
-      <p:sp>
-        <p:nvSpPr>
-          <p:cNvPr id="6" name="TextBox 5"/>
+      <p:sp>
+        <p:nvSpPr>
+          <p:cNvPr id="11" name="TextBox 10"/>
           <p:cNvSpPr txBox="1"/>
           <p:nvPr/>
         </p:nvSpPr>
         <p:spPr>
           <a:xfrm>
-            <a:off x="1508760" y="1938528"/>
-            <a:ext cx="10134600" cy="411480"/>
+            <a:off x="749808" y="6437376"/>
+            <a:ext cx="7772400" cy="274320"/>
           </a:xfrm>
           <a:prstGeom prst="rect">
             <a:avLst/>
@@ -10726,27 +9385,27 @@
           <a:p>
             <a:pPr algn="l"/>
             <a:r>
-              <a:rPr sz="1800" b="1">
-                <a:solidFill>
-                  <a:srgbClr val="9B1B30"/>
+              <a:rPr sz="900" b="0">
+                <a:solidFill>
+                  <a:srgbClr val="6E6E6E"/>
                 </a:solidFill>
                 <a:latin typeface="Calibri"/>
               </a:rPr>
-              <a:t>Supuesto de hazards proporcionales</a:t>
-            </a:r>
-          </a:p>
-        </p:txBody>
-      </p:sp>
-      <p:sp>
-        <p:nvSpPr>
-          <p:cNvPr id="7" name="TextBox 6"/>
+              <a:t>S13 — Herramientas para la Ciencia de Datos, UPC</a:t>
+            </a:r>
+          </a:p>
+        </p:txBody>
+      </p:sp>
+      <p:sp>
+        <p:nvSpPr>
+          <p:cNvPr id="12" name="TextBox 11"/>
           <p:cNvSpPr txBox="1"/>
           <p:nvPr/>
         </p:nvSpPr>
         <p:spPr>
           <a:xfrm>
-            <a:off x="1508760" y="2395728"/>
-            <a:ext cx="10134600" cy="1645920"/>
+            <a:off x="10180320" y="6437376"/>
+            <a:ext cx="1463040" cy="274320"/>
           </a:xfrm>
           <a:prstGeom prst="rect">
             <a:avLst/>
@@ -10759,309 +9418,15 @@
           </a:bodyPr>
           <a:lstStyle/>
           <a:p>
-            <a:pPr algn="l">
-              <a:lnSpc>
-                <a:spcPct val="110000"/>
-              </a:lnSpc>
-            </a:pPr>
-            <a:r>
-              <a:rPr sz="1400" b="0">
-                <a:solidFill>
-                  <a:srgbClr val="2D2D2D"/>
+            <a:pPr algn="r"/>
+            <a:r>
+              <a:rPr sz="900" b="0">
+                <a:solidFill>
+                  <a:srgbClr val="6E6E6E"/>
                 </a:solidFill>
                 <a:latin typeface="Calibri"/>
               </a:rPr>
-              <a:t>El HR de cada covariable se asume constante en el tiempo: las curvas de hazard no se cruzan. Si no, induce a error.</a:t>
-            </a:r>
-          </a:p>
-        </p:txBody>
-      </p:sp>
-      <p:sp>
-        <p:nvSpPr>
-          <p:cNvPr id="8" name="Oval 7"/>
-          <p:cNvSpPr/>
-          <p:nvPr/>
-        </p:nvSpPr>
-        <p:spPr>
-          <a:xfrm>
-            <a:off x="548640" y="4928616"/>
-            <a:ext cx="658368" cy="658368"/>
-          </a:xfrm>
-          <a:prstGeom prst="ellipse">
-            <a:avLst/>
-          </a:prstGeom>
-          <a:solidFill>
-            <a:srgbClr val="E4002B"/>
-          </a:solidFill>
-          <a:ln>
-            <a:noFill/>
-          </a:ln>
-          <a:effectLst/>
-        </p:spPr>
-        <p:style>
-          <a:lnRef idx="1">
-            <a:schemeClr val="accent1"/>
-          </a:lnRef>
-          <a:fillRef idx="3">
-            <a:schemeClr val="accent1"/>
-          </a:fillRef>
-          <a:effectRef idx="2">
-            <a:schemeClr val="accent1"/>
-          </a:effectRef>
-          <a:fontRef idx="minor">
-            <a:schemeClr val="lt1"/>
-          </a:fontRef>
-        </p:style>
-        <p:txBody>
-          <a:bodyPr rtlCol="0" anchor="ctr"/>
-          <a:lstStyle/>
-          <a:p>
-            <a:pPr algn="ctr"/>
-          </a:p>
-        </p:txBody>
-      </p:sp>
-      <p:pic>
-        <p:nvPicPr>
-          <p:cNvPr id="9" name="Picture 8" descr="triangle-alert__FFFFFF.png"/>
-          <p:cNvPicPr>
-            <a:picLocks noChangeAspect="1"/>
-          </p:cNvPicPr>
-          <p:nvPr/>
-        </p:nvPicPr>
-        <p:blipFill>
-          <a:blip r:embed="rId3"/>
-          <a:stretch>
-            <a:fillRect/>
-          </a:stretch>
-        </p:blipFill>
-        <p:spPr>
-          <a:xfrm>
-            <a:off x="732983" y="5112959"/>
-            <a:ext cx="289682" cy="289682"/>
-          </a:xfrm>
-          <a:prstGeom prst="rect">
-            <a:avLst/>
-          </a:prstGeom>
-        </p:spPr>
-      </p:pic>
-      <p:sp>
-        <p:nvSpPr>
-          <p:cNvPr id="10" name="TextBox 9"/>
-          <p:cNvSpPr txBox="1"/>
-          <p:nvPr/>
-        </p:nvSpPr>
-        <p:spPr>
-          <a:xfrm>
-            <a:off x="1508760" y="4224528"/>
-            <a:ext cx="10134600" cy="411480"/>
-          </a:xfrm>
-          <a:prstGeom prst="rect">
-            <a:avLst/>
-          </a:prstGeom>
-          <a:noFill/>
-        </p:spPr>
-        <p:txBody>
-          <a:bodyPr wrap="square" anchor="t" lIns="0" rIns="0" tIns="0" bIns="0">
-            <a:spAutoFit/>
-          </a:bodyPr>
-          <a:lstStyle/>
-          <a:p>
-            <a:pPr algn="l"/>
-            <a:r>
-              <a:rPr sz="1800" b="1">
-                <a:solidFill>
-                  <a:srgbClr val="9B1B30"/>
-                </a:solidFill>
-                <a:latin typeface="Calibri"/>
-              </a:rPr>
-              <a:t>Residuales de Schoenfeld</a:t>
-            </a:r>
-          </a:p>
-        </p:txBody>
-      </p:sp>
-      <p:sp>
-        <p:nvSpPr>
-          <p:cNvPr id="11" name="TextBox 10"/>
-          <p:cNvSpPr txBox="1"/>
-          <p:nvPr/>
-        </p:nvSpPr>
-        <p:spPr>
-          <a:xfrm>
-            <a:off x="1508760" y="4681728"/>
-            <a:ext cx="10134600" cy="1645920"/>
-          </a:xfrm>
-          <a:prstGeom prst="rect">
-            <a:avLst/>
-          </a:prstGeom>
-          <a:noFill/>
-        </p:spPr>
-        <p:txBody>
-          <a:bodyPr wrap="square" anchor="t" lIns="0" rIns="0" tIns="0" bIns="0">
-            <a:spAutoFit/>
-          </a:bodyPr>
-          <a:lstStyle/>
-          <a:p>
-            <a:pPr algn="l">
-              <a:lnSpc>
-                <a:spcPct val="110000"/>
-              </a:lnSpc>
-            </a:pPr>
-            <a:r>
-              <a:rPr sz="1400" b="0">
-                <a:solidFill>
-                  <a:srgbClr val="2D2D2D"/>
-                </a:solidFill>
-                <a:latin typeface="Calibri"/>
-              </a:rPr>
-              <a:t>Si muestran tendencia temporal, el supuesto se viola. Un p bajo por variable señala que su efecto cambia con el tiempo.</a:t>
-            </a:r>
-          </a:p>
-        </p:txBody>
-      </p:sp>
-      <p:sp>
-        <p:nvSpPr>
-          <p:cNvPr id="12" name="TextBox 11"/>
-          <p:cNvSpPr txBox="1"/>
-          <p:nvPr/>
-        </p:nvSpPr>
-        <p:spPr>
-          <a:xfrm>
-            <a:off x="548640" y="5870448"/>
-            <a:ext cx="11064240" cy="320040"/>
-          </a:xfrm>
-          <a:prstGeom prst="rect">
-            <a:avLst/>
-          </a:prstGeom>
-          <a:noFill/>
-        </p:spPr>
-        <p:txBody>
-          <a:bodyPr wrap="square">
-            <a:spAutoFit/>
-          </a:bodyPr>
-          <a:lstStyle/>
-          <a:p>
-            <a:r>
-              <a:rPr sz="1000">
-                <a:solidFill>
-                  <a:srgbClr val="6E6E6E"/>
-                </a:solidFill>
-                <a:latin typeface="Calibri"/>
-              </a:rPr>
-              <a:t>DEFINICIONES punto 9, Therneau &amp; Grambsch (2000), Modeling Survival Data; Cox (1972). Se corrige estratificando o interactuando con el tiempo, no borrando.</a:t>
-            </a:r>
-          </a:p>
-        </p:txBody>
-      </p:sp>
-      <p:sp>
-        <p:nvSpPr>
-          <p:cNvPr id="13" name="Oval 12"/>
-          <p:cNvSpPr/>
-          <p:nvPr/>
-        </p:nvSpPr>
-        <p:spPr>
-          <a:xfrm>
-            <a:off x="548640" y="6473952"/>
-            <a:ext cx="100584" cy="100584"/>
-          </a:xfrm>
-          <a:prstGeom prst="ellipse">
-            <a:avLst/>
-          </a:prstGeom>
-          <a:solidFill>
-            <a:srgbClr val="E4002B"/>
-          </a:solidFill>
-          <a:ln>
-            <a:noFill/>
-          </a:ln>
-          <a:effectLst/>
-        </p:spPr>
-        <p:style>
-          <a:lnRef idx="1">
-            <a:schemeClr val="accent1"/>
-          </a:lnRef>
-          <a:fillRef idx="3">
-            <a:schemeClr val="accent1"/>
-          </a:fillRef>
-          <a:effectRef idx="2">
-            <a:schemeClr val="accent1"/>
-          </a:effectRef>
-          <a:fontRef idx="minor">
-            <a:schemeClr val="lt1"/>
-          </a:fontRef>
-        </p:style>
-        <p:txBody>
-          <a:bodyPr rtlCol="0" anchor="ctr"/>
-          <a:lstStyle/>
-          <a:p>
-            <a:pPr algn="ctr"/>
-          </a:p>
-        </p:txBody>
-      </p:sp>
-      <p:sp>
-        <p:nvSpPr>
-          <p:cNvPr id="14" name="TextBox 13"/>
-          <p:cNvSpPr txBox="1"/>
-          <p:nvPr/>
-        </p:nvSpPr>
-        <p:spPr>
-          <a:xfrm>
-            <a:off x="749808" y="6437376"/>
-            <a:ext cx="7772400" cy="274320"/>
-          </a:xfrm>
-          <a:prstGeom prst="rect">
-            <a:avLst/>
-          </a:prstGeom>
-          <a:noFill/>
-        </p:spPr>
-        <p:txBody>
-          <a:bodyPr wrap="square" anchor="t" lIns="0" rIns="0" tIns="0" bIns="0">
-            <a:spAutoFit/>
-          </a:bodyPr>
-          <a:lstStyle/>
-          <a:p>
-            <a:pPr algn="l"/>
-            <a:r>
-              <a:rPr sz="900" b="0">
-                <a:solidFill>
-                  <a:srgbClr val="6E6E6E"/>
-                </a:solidFill>
-                <a:latin typeface="Calibri"/>
-              </a:rPr>
-              <a:t>S13 — Herramientas para la Ciencia de Datos, UPC</a:t>
-            </a:r>
-          </a:p>
-        </p:txBody>
-      </p:sp>
-      <p:sp>
-        <p:nvSpPr>
-          <p:cNvPr id="15" name="TextBox 14"/>
-          <p:cNvSpPr txBox="1"/>
-          <p:nvPr/>
-        </p:nvSpPr>
-        <p:spPr>
-          <a:xfrm>
-            <a:off x="10180320" y="6437376"/>
-            <a:ext cx="1463040" cy="274320"/>
-          </a:xfrm>
-          <a:prstGeom prst="rect">
-            <a:avLst/>
-          </a:prstGeom>
-          <a:noFill/>
-        </p:spPr>
-        <p:txBody>
-          <a:bodyPr wrap="square" anchor="t" lIns="0" rIns="0" tIns="0" bIns="0">
-            <a:spAutoFit/>
-          </a:bodyPr>
-          <a:lstStyle/>
-          <a:p>
-            <a:pPr algn="r"/>
-            <a:r>
-              <a:rPr sz="900" b="0">
-                <a:solidFill>
-                  <a:srgbClr val="6E6E6E"/>
-                </a:solidFill>
-                <a:latin typeface="Calibri"/>
-              </a:rPr>
-              <a:t>4 / 19</a:t>
+              <a:t>4 / 14</a:t>
             </a:r>
           </a:p>
         </p:txBody>
@@ -11101,7 +9466,7 @@
         <p:spPr>
           <a:xfrm>
             <a:off x="548640" y="411480"/>
-            <a:ext cx="11094720" cy="292608"/>
+            <a:ext cx="11094720" cy="777240"/>
           </a:xfrm>
           <a:prstGeom prst="rect">
             <a:avLst/>
@@ -11116,412 +9481,51 @@
           <a:p>
             <a:pPr algn="l"/>
             <a:r>
-              <a:rPr sz="1300" b="1">
-                <a:solidFill>
-                  <a:srgbClr val="9B1B30"/>
+              <a:rPr sz="4000" b="1">
+                <a:solidFill>
+                  <a:srgbClr val="2D2D2D"/>
                 </a:solidFill>
                 <a:latin typeface="Calibri"/>
               </a:rPr>
-              <a:t>DIAGNÓSTICO, LIFELINES, PROPORTIONAL_HAZARD_TEST</a:t>
-            </a:r>
-          </a:p>
-        </p:txBody>
-      </p:sp>
-      <p:sp>
-        <p:nvSpPr>
-          <p:cNvPr id="3" name="TextBox 2"/>
-          <p:cNvSpPr txBox="1"/>
-          <p:nvPr/>
-        </p:nvSpPr>
-        <p:spPr>
-          <a:xfrm>
-            <a:off x="548640" y="731520"/>
-            <a:ext cx="11094720" cy="777240"/>
-          </a:xfrm>
-          <a:prstGeom prst="rect">
-            <a:avLst/>
-          </a:prstGeom>
-          <a:noFill/>
-        </p:spPr>
-        <p:txBody>
-          <a:bodyPr wrap="square" anchor="t" lIns="0" rIns="0" tIns="0" bIns="0">
-            <a:spAutoFit/>
-          </a:bodyPr>
-          <a:lstStyle/>
-          <a:p>
-            <a:pPr algn="l"/>
-            <a:r>
-              <a:rPr sz="4000" b="1">
-                <a:solidFill>
-                  <a:srgbClr val="2D2D2D"/>
-                </a:solidFill>
-                <a:latin typeface="Calibri"/>
-              </a:rPr>
-              <a:t>Schoenfeld delata si el HR cambia con el tiempo</a:t>
-            </a:r>
-          </a:p>
-        </p:txBody>
-      </p:sp>
-      <p:sp>
-        <p:nvSpPr>
-          <p:cNvPr id="4" name="TextBox 3"/>
-          <p:cNvSpPr txBox="1"/>
-          <p:nvPr/>
-        </p:nvSpPr>
-        <p:spPr>
-          <a:xfrm>
-            <a:off x="548640" y="1755648"/>
-            <a:ext cx="11094720" cy="457200"/>
-          </a:xfrm>
-          <a:prstGeom prst="rect">
-            <a:avLst/>
-          </a:prstGeom>
-          <a:noFill/>
-        </p:spPr>
-        <p:txBody>
-          <a:bodyPr wrap="square" lIns="0" tIns="0" bIns="0">
-            <a:spAutoFit/>
-          </a:bodyPr>
-          <a:lstStyle/>
-          <a:p>
-            <a:r>
-              <a:rPr sz="1400" b="1">
-                <a:solidFill>
-                  <a:srgbClr val="9B1B30"/>
-                </a:solidFill>
-                <a:latin typeface="Calibri"/>
-              </a:rPr>
-              <a:t>▸ Qué hace:  </a:t>
-            </a:r>
-            <a:r>
-              <a:rPr sz="1400">
-                <a:solidFill>
-                  <a:srgbClr val="2D2D2D"/>
-                </a:solidFill>
-                <a:latin typeface="Calibri"/>
-              </a:rPr>
-              <a:t>contrasta hazards proporcionales con los residuales de Schoenfeld; un p bajo delata que el HR cambia.</a:t>
-            </a:r>
-          </a:p>
-        </p:txBody>
-      </p:sp>
-      <p:sp>
-        <p:nvSpPr>
-          <p:cNvPr id="5" name="Rounded Rectangle 4"/>
+              <a:t>El efecto de la edad cambia con el tiempo: 'age' viola PH (p = 0,0007)</a:t>
+            </a:r>
+          </a:p>
+        </p:txBody>
+      </p:sp>
+      <p:pic>
+        <p:nvPicPr>
+          <p:cNvPr id="3" name="Picture 2" descr="S13deck_schoenfeld.png"/>
+          <p:cNvPicPr>
+            <a:picLocks noChangeAspect="1"/>
+          </p:cNvPicPr>
+          <p:nvPr/>
+        </p:nvPicPr>
+        <p:blipFill>
+          <a:blip r:embed="rId2"/>
+          <a:stretch>
+            <a:fillRect/>
+          </a:stretch>
+        </p:blipFill>
+        <p:spPr>
+          <a:xfrm>
+            <a:off x="548640" y="1828800"/>
+            <a:ext cx="6949440" cy="3773407"/>
+          </a:xfrm>
+          <a:prstGeom prst="rect">
+            <a:avLst/>
+          </a:prstGeom>
+        </p:spPr>
+      </p:pic>
+      <p:sp>
+        <p:nvSpPr>
+          <p:cNvPr id="4" name="Oval 3"/>
           <p:cNvSpPr/>
           <p:nvPr/>
         </p:nvSpPr>
         <p:spPr>
           <a:xfrm>
-            <a:off x="548640" y="2395728"/>
-            <a:ext cx="11094720" cy="2980944"/>
-          </a:xfrm>
-          <a:prstGeom prst="roundRect">
-            <a:avLst/>
-          </a:prstGeom>
-          <a:solidFill>
-            <a:srgbClr val="F4F4F4"/>
-          </a:solidFill>
-          <a:ln w="9525">
-            <a:solidFill>
-              <a:srgbClr val="DDDDDD"/>
-            </a:solidFill>
-          </a:ln>
-          <a:effectLst/>
-        </p:spPr>
-        <p:style>
-          <a:lnRef idx="1">
-            <a:schemeClr val="accent1"/>
-          </a:lnRef>
-          <a:fillRef idx="3">
-            <a:schemeClr val="accent1"/>
-          </a:fillRef>
-          <a:effectRef idx="2">
-            <a:schemeClr val="accent1"/>
-          </a:effectRef>
-          <a:fontRef idx="minor">
-            <a:schemeClr val="lt1"/>
-          </a:fontRef>
-        </p:style>
-        <p:txBody>
-          <a:bodyPr rtlCol="0" anchor="ctr"/>
-          <a:lstStyle/>
-          <a:p>
-            <a:pPr algn="ctr"/>
-          </a:p>
-        </p:txBody>
-      </p:sp>
-      <p:sp>
-        <p:nvSpPr>
-          <p:cNvPr id="6" name="TextBox 5"/>
-          <p:cNvSpPr txBox="1"/>
-          <p:nvPr/>
-        </p:nvSpPr>
-        <p:spPr>
-          <a:xfrm>
-            <a:off x="804672" y="2542032"/>
-            <a:ext cx="10637520" cy="256032"/>
-          </a:xfrm>
-          <a:prstGeom prst="rect">
-            <a:avLst/>
-          </a:prstGeom>
-          <a:noFill/>
-        </p:spPr>
-        <p:txBody>
-          <a:bodyPr wrap="none" lIns="0" tIns="0" bIns="0">
-            <a:spAutoFit/>
-          </a:bodyPr>
-          <a:lstStyle/>
-          <a:p>
-            <a:r>
-              <a:rPr sz="1050" b="1">
-                <a:solidFill>
-                  <a:srgbClr val="9B1B30"/>
-                </a:solidFill>
-                <a:latin typeface="Calibri"/>
-              </a:rPr>
-              <a:t>CÓDIGO REAL DEL CUADERNO</a:t>
-            </a:r>
-          </a:p>
-        </p:txBody>
-      </p:sp>
-      <p:sp>
-        <p:nvSpPr>
-          <p:cNvPr id="7" name="TextBox 6"/>
-          <p:cNvSpPr txBox="1"/>
-          <p:nvPr/>
-        </p:nvSpPr>
-        <p:spPr>
-          <a:xfrm>
-            <a:off x="859536" y="2926080"/>
-            <a:ext cx="10472928" cy="2377440"/>
-          </a:xfrm>
-          <a:prstGeom prst="rect">
-            <a:avLst/>
-          </a:prstGeom>
-          <a:noFill/>
-        </p:spPr>
-        <p:txBody>
-          <a:bodyPr wrap="square" lIns="0" tIns="0" bIns="0">
-            <a:spAutoFit/>
-          </a:bodyPr>
-          <a:lstStyle/>
-          <a:p>
-            <a:pPr>
-              <a:lnSpc>
-                <a:spcPct val="130000"/>
-              </a:lnSpc>
-              <a:spcAft>
-                <a:spcPts val="400"/>
-              </a:spcAft>
-            </a:pPr>
-            <a:r>
-              <a:rPr sz="1200">
-                <a:solidFill>
-                  <a:srgbClr val="2D2D2D"/>
-                </a:solidFill>
-                <a:latin typeface="Consolas"/>
-              </a:rPr>
-              <a:t>from lifelines.statistics import proportional_hazard_test</a:t>
-            </a:r>
-          </a:p>
-          <a:p>
-            <a:pPr>
-              <a:lnSpc>
-                <a:spcPct val="130000"/>
-              </a:lnSpc>
-              <a:spcAft>
-                <a:spcPts val="400"/>
-              </a:spcAft>
-            </a:pPr>
-            <a:r>
-              <a:rPr sz="1200">
-                <a:solidFill>
-                  <a:srgbClr val="2D2D2D"/>
-                </a:solidFill>
-                <a:latin typeface="Consolas"/>
-              </a:rPr>
-              <a:t/>
-            </a:r>
-          </a:p>
-          <a:p>
-            <a:pPr>
-              <a:lnSpc>
-                <a:spcPct val="130000"/>
-              </a:lnSpc>
-              <a:spcAft>
-                <a:spcPts val="400"/>
-              </a:spcAft>
-            </a:pPr>
-            <a:r>
-              <a:rPr sz="1200">
-                <a:solidFill>
-                  <a:srgbClr val="2D2D2D"/>
-                </a:solidFill>
-                <a:latin typeface="Consolas"/>
-              </a:rPr>
-              <a:t>zph = proportional_hazard_test(cph, rossi, time_transform="rank")</a:t>
-            </a:r>
-          </a:p>
-          <a:p>
-            <a:pPr>
-              <a:lnSpc>
-                <a:spcPct val="130000"/>
-              </a:lnSpc>
-              <a:spcAft>
-                <a:spcPts val="400"/>
-              </a:spcAft>
-            </a:pPr>
-            <a:r>
-              <a:rPr sz="1200">
-                <a:solidFill>
-                  <a:srgbClr val="2D2D2D"/>
-                </a:solidFill>
-                <a:latin typeface="Consolas"/>
-              </a:rPr>
-              <a:t>print(zph.summary[["test_statistic", "p"]].round(4).to_string())</a:t>
-            </a:r>
-          </a:p>
-          <a:p>
-            <a:pPr>
-              <a:lnSpc>
-                <a:spcPct val="130000"/>
-              </a:lnSpc>
-              <a:spcAft>
-                <a:spcPts val="400"/>
-              </a:spcAft>
-            </a:pPr>
-            <a:r>
-              <a:rPr sz="1200">
-                <a:solidFill>
-                  <a:srgbClr val="2D2D2D"/>
-                </a:solidFill>
-                <a:latin typeface="Consolas"/>
-              </a:rPr>
-              <a:t>p_age = float(zph.summary.loc["age", "p"])</a:t>
-            </a:r>
-          </a:p>
-          <a:p>
-            <a:pPr>
-              <a:lnSpc>
-                <a:spcPct val="130000"/>
-              </a:lnSpc>
-              <a:spcAft>
-                <a:spcPts val="400"/>
-              </a:spcAft>
-            </a:pPr>
-            <a:r>
-              <a:rPr sz="1200">
-                <a:solidFill>
-                  <a:srgbClr val="2D2D2D"/>
-                </a:solidFill>
-                <a:latin typeface="Consolas"/>
-              </a:rPr>
-              <a:t># age  p 0,0007  -&gt;  VIOLA PH (p &lt; 0,01);  fin/prio cumplen (p &gt; 0,10)</a:t>
-            </a:r>
-          </a:p>
-        </p:txBody>
-      </p:sp>
-      <p:sp>
-        <p:nvSpPr>
-          <p:cNvPr id="8" name="TextBox 7"/>
-          <p:cNvSpPr txBox="1"/>
-          <p:nvPr/>
-        </p:nvSpPr>
-        <p:spPr>
-          <a:xfrm>
-            <a:off x="548640" y="5961888"/>
-            <a:ext cx="11094720" cy="292608"/>
-          </a:xfrm>
-          <a:prstGeom prst="rect">
-            <a:avLst/>
-          </a:prstGeom>
-          <a:noFill/>
-        </p:spPr>
-        <p:txBody>
-          <a:bodyPr wrap="square" anchor="t" lIns="0" rIns="0" tIns="0" bIns="0">
-            <a:spAutoFit/>
-          </a:bodyPr>
-          <a:lstStyle/>
-          <a:p>
-            <a:pPr algn="l"/>
-            <a:r>
-              <a:rPr sz="1000" b="0">
-                <a:solidFill>
-                  <a:srgbClr val="6E6E6E"/>
-                </a:solidFill>
-                <a:latin typeface="Calibri"/>
-              </a:rPr>
-              <a:t>notebook Sección 2, diagnóstico de PH, age p → survival!B5 (viola PH), resto en la hoja schoenfeld — venv/Excel.</a:t>
-            </a:r>
-          </a:p>
-        </p:txBody>
-      </p:sp>
-      <p:sp>
-        <p:nvSpPr>
-          <p:cNvPr id="9" name="Rounded Rectangle 8"/>
-          <p:cNvSpPr/>
-          <p:nvPr/>
-        </p:nvSpPr>
-        <p:spPr>
-          <a:xfrm>
-            <a:off x="9098280" y="310896"/>
-            <a:ext cx="2560320" cy="402336"/>
-          </a:xfrm>
-          <a:prstGeom prst="roundRect">
-            <a:avLst/>
-          </a:prstGeom>
-          <a:solidFill>
-            <a:srgbClr val="FCEDEE"/>
-          </a:solidFill>
-          <a:ln w="15875">
-            <a:solidFill>
-              <a:srgbClr val="E4002B"/>
-            </a:solidFill>
-          </a:ln>
-          <a:effectLst/>
-        </p:spPr>
-        <p:style>
-          <a:lnRef idx="1">
-            <a:schemeClr val="accent1"/>
-          </a:lnRef>
-          <a:fillRef idx="3">
-            <a:schemeClr val="accent1"/>
-          </a:fillRef>
-          <a:effectRef idx="2">
-            <a:schemeClr val="accent1"/>
-          </a:effectRef>
-          <a:fontRef idx="minor">
-            <a:schemeClr val="lt1"/>
-          </a:fontRef>
-        </p:style>
-        <p:txBody>
-          <a:bodyPr rtlCol="0" anchor="ctr" lIns="54864" rIns="54864" tIns="0" bIns="0"/>
-          <a:lstStyle/>
-          <a:p>
-            <a:pPr algn="ctr"/>
-            <a:r>
-              <a:rPr sz="1300" b="1">
-                <a:solidFill>
-                  <a:srgbClr val="9B1B30"/>
-                </a:solidFill>
-                <a:latin typeface="Calibri"/>
-              </a:rPr>
-              <a:t>▶  Notebook, celda 11</a:t>
-            </a:r>
-          </a:p>
-        </p:txBody>
-      </p:sp>
-      <p:sp>
-        <p:nvSpPr>
-          <p:cNvPr id="10" name="Oval 9"/>
-          <p:cNvSpPr/>
-          <p:nvPr/>
-        </p:nvSpPr>
-        <p:spPr>
-          <a:xfrm>
-            <a:off x="548640" y="6473952"/>
-            <a:ext cx="100584" cy="100584"/>
+            <a:off x="7955279" y="2011680"/>
+            <a:ext cx="548640" cy="548640"/>
           </a:xfrm>
           <a:prstGeom prst="ellipse">
             <a:avLst/>
@@ -11556,16 +9560,40 @@
           </a:p>
         </p:txBody>
       </p:sp>
-      <p:sp>
-        <p:nvSpPr>
-          <p:cNvPr id="11" name="TextBox 10"/>
+      <p:pic>
+        <p:nvPicPr>
+          <p:cNvPr id="5" name="Picture 4" descr="lightbulb__FFFFFF.png"/>
+          <p:cNvPicPr>
+            <a:picLocks noChangeAspect="1"/>
+          </p:cNvPicPr>
+          <p:nvPr/>
+        </p:nvPicPr>
+        <p:blipFill>
+          <a:blip r:embed="rId3"/>
+          <a:stretch>
+            <a:fillRect/>
+          </a:stretch>
+        </p:blipFill>
+        <p:spPr>
+          <a:xfrm>
+            <a:off x="8108898" y="2165299"/>
+            <a:ext cx="241402" cy="241402"/>
+          </a:xfrm>
+          <a:prstGeom prst="rect">
+            <a:avLst/>
+          </a:prstGeom>
+        </p:spPr>
+      </p:pic>
+      <p:sp>
+        <p:nvSpPr>
+          <p:cNvPr id="6" name="TextBox 5"/>
           <p:cNvSpPr txBox="1"/>
           <p:nvPr/>
         </p:nvSpPr>
         <p:spPr>
           <a:xfrm>
-            <a:off x="749808" y="6437376"/>
-            <a:ext cx="7772400" cy="274320"/>
+            <a:off x="8686800" y="2057400"/>
+            <a:ext cx="2926080" cy="548640"/>
           </a:xfrm>
           <a:prstGeom prst="rect">
             <a:avLst/>
@@ -11580,27 +9608,27 @@
           <a:p>
             <a:pPr algn="l"/>
             <a:r>
-              <a:rPr sz="900" b="0">
-                <a:solidFill>
-                  <a:srgbClr val="6E6E6E"/>
+              <a:rPr sz="1500" b="1">
+                <a:solidFill>
+                  <a:srgbClr val="9B1B30"/>
                 </a:solidFill>
                 <a:latin typeface="Calibri"/>
               </a:rPr>
-              <a:t>S13 — Herramientas para la Ciencia de Datos, UPC</a:t>
-            </a:r>
-          </a:p>
-        </p:txBody>
-      </p:sp>
-      <p:sp>
-        <p:nvSpPr>
-          <p:cNvPr id="12" name="TextBox 11"/>
+              <a:t>Lectura de negocio</a:t>
+            </a:r>
+          </a:p>
+        </p:txBody>
+      </p:sp>
+      <p:sp>
+        <p:nvSpPr>
+          <p:cNvPr id="7" name="TextBox 6"/>
           <p:cNvSpPr txBox="1"/>
           <p:nvPr/>
         </p:nvSpPr>
         <p:spPr>
           <a:xfrm>
-            <a:off x="10180320" y="6437376"/>
-            <a:ext cx="1463040" cy="274320"/>
+            <a:off x="7955279" y="2880360"/>
+            <a:ext cx="3657600" cy="3108960"/>
           </a:xfrm>
           <a:prstGeom prst="rect">
             <a:avLst/>
@@ -11613,6 +9641,159 @@
           </a:bodyPr>
           <a:lstStyle/>
           <a:p>
+            <a:pPr algn="l">
+              <a:lnSpc>
+                <a:spcPct val="125000"/>
+              </a:lnSpc>
+            </a:pPr>
+            <a:r>
+              <a:rPr sz="1500" b="0">
+                <a:solidFill>
+                  <a:srgbClr val="2D2D2D"/>
+                </a:solidFill>
+                <a:latin typeface="Calibri"/>
+              </a:rPr>
+              <a:t>La pendiente de los residuales no es cero: age protege más a largo plazo. Es el caso a corregir, no a ignorar.</a:t>
+            </a:r>
+          </a:p>
+        </p:txBody>
+      </p:sp>
+      <p:sp>
+        <p:nvSpPr>
+          <p:cNvPr id="8" name="TextBox 7"/>
+          <p:cNvSpPr txBox="1"/>
+          <p:nvPr/>
+        </p:nvSpPr>
+        <p:spPr>
+          <a:xfrm>
+            <a:off x="548640" y="5961888"/>
+            <a:ext cx="11094720" cy="292608"/>
+          </a:xfrm>
+          <a:prstGeom prst="rect">
+            <a:avLst/>
+          </a:prstGeom>
+          <a:noFill/>
+        </p:spPr>
+        <p:txBody>
+          <a:bodyPr wrap="square" anchor="t" lIns="0" rIns="0" tIns="0" bIns="0">
+            <a:spAutoFit/>
+          </a:bodyPr>
+          <a:lstStyle/>
+          <a:p>
+            <a:pPr algn="l"/>
+            <a:r>
+              <a:rPr sz="1000" b="0">
+                <a:solidFill>
+                  <a:srgbClr val="6E6E6E"/>
+                </a:solidFill>
+                <a:latin typeface="Calibri"/>
+              </a:rPr>
+              <a:t>Diagnóstico de Schoenfeld sobre la Cox/Rossi — age test 11,45, p ≈ 0,0007 (viola PH); resto cumple — venv/Excel (schoenfeld_age, schoenfeld, survival).</a:t>
+            </a:r>
+          </a:p>
+        </p:txBody>
+      </p:sp>
+      <p:sp>
+        <p:nvSpPr>
+          <p:cNvPr id="9" name="Oval 8"/>
+          <p:cNvSpPr/>
+          <p:nvPr/>
+        </p:nvSpPr>
+        <p:spPr>
+          <a:xfrm>
+            <a:off x="548640" y="6473952"/>
+            <a:ext cx="100584" cy="100584"/>
+          </a:xfrm>
+          <a:prstGeom prst="ellipse">
+            <a:avLst/>
+          </a:prstGeom>
+          <a:solidFill>
+            <a:srgbClr val="E4002B"/>
+          </a:solidFill>
+          <a:ln>
+            <a:noFill/>
+          </a:ln>
+          <a:effectLst/>
+        </p:spPr>
+        <p:style>
+          <a:lnRef idx="1">
+            <a:schemeClr val="accent1"/>
+          </a:lnRef>
+          <a:fillRef idx="3">
+            <a:schemeClr val="accent1"/>
+          </a:fillRef>
+          <a:effectRef idx="2">
+            <a:schemeClr val="accent1"/>
+          </a:effectRef>
+          <a:fontRef idx="minor">
+            <a:schemeClr val="lt1"/>
+          </a:fontRef>
+        </p:style>
+        <p:txBody>
+          <a:bodyPr rtlCol="0" anchor="ctr"/>
+          <a:lstStyle/>
+          <a:p>
+            <a:pPr algn="ctr"/>
+          </a:p>
+        </p:txBody>
+      </p:sp>
+      <p:sp>
+        <p:nvSpPr>
+          <p:cNvPr id="10" name="TextBox 9"/>
+          <p:cNvSpPr txBox="1"/>
+          <p:nvPr/>
+        </p:nvSpPr>
+        <p:spPr>
+          <a:xfrm>
+            <a:off x="749808" y="6437376"/>
+            <a:ext cx="7772400" cy="274320"/>
+          </a:xfrm>
+          <a:prstGeom prst="rect">
+            <a:avLst/>
+          </a:prstGeom>
+          <a:noFill/>
+        </p:spPr>
+        <p:txBody>
+          <a:bodyPr wrap="square" anchor="t" lIns="0" rIns="0" tIns="0" bIns="0">
+            <a:spAutoFit/>
+          </a:bodyPr>
+          <a:lstStyle/>
+          <a:p>
+            <a:pPr algn="l"/>
+            <a:r>
+              <a:rPr sz="900" b="0">
+                <a:solidFill>
+                  <a:srgbClr val="6E6E6E"/>
+                </a:solidFill>
+                <a:latin typeface="Calibri"/>
+              </a:rPr>
+              <a:t>S13 — Herramientas para la Ciencia de Datos, UPC</a:t>
+            </a:r>
+          </a:p>
+        </p:txBody>
+      </p:sp>
+      <p:sp>
+        <p:nvSpPr>
+          <p:cNvPr id="11" name="TextBox 10"/>
+          <p:cNvSpPr txBox="1"/>
+          <p:nvPr/>
+        </p:nvSpPr>
+        <p:spPr>
+          <a:xfrm>
+            <a:off x="10180320" y="6437376"/>
+            <a:ext cx="1463040" cy="274320"/>
+          </a:xfrm>
+          <a:prstGeom prst="rect">
+            <a:avLst/>
+          </a:prstGeom>
+          <a:noFill/>
+        </p:spPr>
+        <p:txBody>
+          <a:bodyPr wrap="square" anchor="t" lIns="0" rIns="0" tIns="0" bIns="0">
+            <a:spAutoFit/>
+          </a:bodyPr>
+          <a:lstStyle/>
+          <a:p>
             <a:pPr algn="r"/>
             <a:r>
               <a:rPr sz="900" b="0">
@@ -11621,7 +9802,7 @@
                 </a:solidFill>
                 <a:latin typeface="Calibri"/>
               </a:rPr>
-              <a:t>5 / 19</a:t>
+              <a:t>5 / 14</a:t>
             </a:r>
           </a:p>
         </p:txBody>
@@ -11635,531 +9816,6 @@
 </file>
 
 <file path=ppt/slides/slide6.xml><?xml version="1.0" encoding="utf-8"?>
-<p:sld xmlns:a="http://schemas.openxmlformats.org/drawingml/2006/main" xmlns:p="http://schemas.openxmlformats.org/presentationml/2006/main" xmlns:r="http://schemas.openxmlformats.org/officeDocument/2006/relationships">
-  <p:cSld>
-    <p:bg>
-      <p:bgPr>
-        <a:solidFill>
-          <a:srgbClr val="FFFFFF"/>
-        </a:solidFill>
-        <a:effectLst/>
-      </p:bgPr>
-    </p:bg>
-    <p:spTree>
-      <p:nvGrpSpPr>
-        <p:cNvPr id="1" name=""/>
-        <p:cNvGrpSpPr/>
-        <p:nvPr/>
-      </p:nvGrpSpPr>
-      <p:grpSpPr/>
-      <p:sp>
-        <p:nvSpPr>
-          <p:cNvPr id="2" name="TextBox 1"/>
-          <p:cNvSpPr txBox="1"/>
-          <p:nvPr/>
-        </p:nvSpPr>
-        <p:spPr>
-          <a:xfrm>
-            <a:off x="548640" y="411480"/>
-            <a:ext cx="11094720" cy="777240"/>
-          </a:xfrm>
-          <a:prstGeom prst="rect">
-            <a:avLst/>
-          </a:prstGeom>
-          <a:noFill/>
-        </p:spPr>
-        <p:txBody>
-          <a:bodyPr wrap="square" anchor="t" lIns="0" rIns="0" tIns="0" bIns="0">
-            <a:spAutoFit/>
-          </a:bodyPr>
-          <a:lstStyle/>
-          <a:p>
-            <a:pPr algn="l"/>
-            <a:r>
-              <a:rPr sz="4000" b="1">
-                <a:solidFill>
-                  <a:srgbClr val="2D2D2D"/>
-                </a:solidFill>
-                <a:latin typeface="Calibri"/>
-              </a:rPr>
-              <a:t>El efecto de la edad cambia con el tiempo: 'age' viola PH (p = 0,0007)</a:t>
-            </a:r>
-          </a:p>
-        </p:txBody>
-      </p:sp>
-      <p:pic>
-        <p:nvPicPr>
-          <p:cNvPr id="3" name="Picture 2" descr="S13deck_schoenfeld.png"/>
-          <p:cNvPicPr>
-            <a:picLocks noChangeAspect="1"/>
-          </p:cNvPicPr>
-          <p:nvPr/>
-        </p:nvPicPr>
-        <p:blipFill>
-          <a:blip r:embed="rId2"/>
-          <a:stretch>
-            <a:fillRect/>
-          </a:stretch>
-        </p:blipFill>
-        <p:spPr>
-          <a:xfrm>
-            <a:off x="548640" y="1828800"/>
-            <a:ext cx="6949440" cy="3773407"/>
-          </a:xfrm>
-          <a:prstGeom prst="rect">
-            <a:avLst/>
-          </a:prstGeom>
-        </p:spPr>
-      </p:pic>
-      <p:sp>
-        <p:nvSpPr>
-          <p:cNvPr id="4" name="Oval 3"/>
-          <p:cNvSpPr/>
-          <p:nvPr/>
-        </p:nvSpPr>
-        <p:spPr>
-          <a:xfrm>
-            <a:off x="7955279" y="2011680"/>
-            <a:ext cx="548640" cy="548640"/>
-          </a:xfrm>
-          <a:prstGeom prst="ellipse">
-            <a:avLst/>
-          </a:prstGeom>
-          <a:solidFill>
-            <a:srgbClr val="E4002B"/>
-          </a:solidFill>
-          <a:ln>
-            <a:noFill/>
-          </a:ln>
-          <a:effectLst/>
-        </p:spPr>
-        <p:style>
-          <a:lnRef idx="1">
-            <a:schemeClr val="accent1"/>
-          </a:lnRef>
-          <a:fillRef idx="3">
-            <a:schemeClr val="accent1"/>
-          </a:fillRef>
-          <a:effectRef idx="2">
-            <a:schemeClr val="accent1"/>
-          </a:effectRef>
-          <a:fontRef idx="minor">
-            <a:schemeClr val="lt1"/>
-          </a:fontRef>
-        </p:style>
-        <p:txBody>
-          <a:bodyPr rtlCol="0" anchor="ctr"/>
-          <a:lstStyle/>
-          <a:p>
-            <a:pPr algn="ctr"/>
-          </a:p>
-        </p:txBody>
-      </p:sp>
-      <p:pic>
-        <p:nvPicPr>
-          <p:cNvPr id="5" name="Picture 4" descr="lightbulb__FFFFFF.png"/>
-          <p:cNvPicPr>
-            <a:picLocks noChangeAspect="1"/>
-          </p:cNvPicPr>
-          <p:nvPr/>
-        </p:nvPicPr>
-        <p:blipFill>
-          <a:blip r:embed="rId3"/>
-          <a:stretch>
-            <a:fillRect/>
-          </a:stretch>
-        </p:blipFill>
-        <p:spPr>
-          <a:xfrm>
-            <a:off x="8108898" y="2165299"/>
-            <a:ext cx="241402" cy="241402"/>
-          </a:xfrm>
-          <a:prstGeom prst="rect">
-            <a:avLst/>
-          </a:prstGeom>
-        </p:spPr>
-      </p:pic>
-      <p:sp>
-        <p:nvSpPr>
-          <p:cNvPr id="6" name="TextBox 5"/>
-          <p:cNvSpPr txBox="1"/>
-          <p:nvPr/>
-        </p:nvSpPr>
-        <p:spPr>
-          <a:xfrm>
-            <a:off x="8686800" y="2057400"/>
-            <a:ext cx="2926080" cy="548640"/>
-          </a:xfrm>
-          <a:prstGeom prst="rect">
-            <a:avLst/>
-          </a:prstGeom>
-          <a:noFill/>
-        </p:spPr>
-        <p:txBody>
-          <a:bodyPr wrap="square" anchor="t" lIns="0" rIns="0" tIns="0" bIns="0">
-            <a:spAutoFit/>
-          </a:bodyPr>
-          <a:lstStyle/>
-          <a:p>
-            <a:pPr algn="l"/>
-            <a:r>
-              <a:rPr sz="1500" b="1">
-                <a:solidFill>
-                  <a:srgbClr val="9B1B30"/>
-                </a:solidFill>
-                <a:latin typeface="Calibri"/>
-              </a:rPr>
-              <a:t>Lectura de negocio</a:t>
-            </a:r>
-          </a:p>
-        </p:txBody>
-      </p:sp>
-      <p:sp>
-        <p:nvSpPr>
-          <p:cNvPr id="7" name="TextBox 6"/>
-          <p:cNvSpPr txBox="1"/>
-          <p:nvPr/>
-        </p:nvSpPr>
-        <p:spPr>
-          <a:xfrm>
-            <a:off x="7955279" y="2880360"/>
-            <a:ext cx="3657600" cy="3108960"/>
-          </a:xfrm>
-          <a:prstGeom prst="rect">
-            <a:avLst/>
-          </a:prstGeom>
-          <a:noFill/>
-        </p:spPr>
-        <p:txBody>
-          <a:bodyPr wrap="square" anchor="t" lIns="0" rIns="0" tIns="0" bIns="0">
-            <a:spAutoFit/>
-          </a:bodyPr>
-          <a:lstStyle/>
-          <a:p>
-            <a:pPr algn="l">
-              <a:lnSpc>
-                <a:spcPct val="125000"/>
-              </a:lnSpc>
-            </a:pPr>
-            <a:r>
-              <a:rPr sz="1500" b="0">
-                <a:solidFill>
-                  <a:srgbClr val="2D2D2D"/>
-                </a:solidFill>
-                <a:latin typeface="Calibri"/>
-              </a:rPr>
-              <a:t>La pendiente de los residuales no es cero: age protege más a largo plazo. Es el caso a corregir, no a ignorar.</a:t>
-            </a:r>
-          </a:p>
-        </p:txBody>
-      </p:sp>
-      <p:sp>
-        <p:nvSpPr>
-          <p:cNvPr id="8" name="TextBox 7"/>
-          <p:cNvSpPr txBox="1"/>
-          <p:nvPr/>
-        </p:nvSpPr>
-        <p:spPr>
-          <a:xfrm>
-            <a:off x="548640" y="5961888"/>
-            <a:ext cx="11094720" cy="292608"/>
-          </a:xfrm>
-          <a:prstGeom prst="rect">
-            <a:avLst/>
-          </a:prstGeom>
-          <a:noFill/>
-        </p:spPr>
-        <p:txBody>
-          <a:bodyPr wrap="square" anchor="t" lIns="0" rIns="0" tIns="0" bIns="0">
-            <a:spAutoFit/>
-          </a:bodyPr>
-          <a:lstStyle/>
-          <a:p>
-            <a:pPr algn="l"/>
-            <a:r>
-              <a:rPr sz="1000" b="0">
-                <a:solidFill>
-                  <a:srgbClr val="6E6E6E"/>
-                </a:solidFill>
-                <a:latin typeface="Calibri"/>
-              </a:rPr>
-              <a:t>Diagnóstico de Schoenfeld sobre la Cox/Rossi — age test 11,45, p ≈ 0,0007 (viola PH); resto cumple — venv/Excel (schoenfeld_age, schoenfeld, survival).</a:t>
-            </a:r>
-          </a:p>
-        </p:txBody>
-      </p:sp>
-      <p:sp>
-        <p:nvSpPr>
-          <p:cNvPr id="9" name="Oval 8"/>
-          <p:cNvSpPr/>
-          <p:nvPr/>
-        </p:nvSpPr>
-        <p:spPr>
-          <a:xfrm>
-            <a:off x="548640" y="6473952"/>
-            <a:ext cx="100584" cy="100584"/>
-          </a:xfrm>
-          <a:prstGeom prst="ellipse">
-            <a:avLst/>
-          </a:prstGeom>
-          <a:solidFill>
-            <a:srgbClr val="E4002B"/>
-          </a:solidFill>
-          <a:ln>
-            <a:noFill/>
-          </a:ln>
-          <a:effectLst/>
-        </p:spPr>
-        <p:style>
-          <a:lnRef idx="1">
-            <a:schemeClr val="accent1"/>
-          </a:lnRef>
-          <a:fillRef idx="3">
-            <a:schemeClr val="accent1"/>
-          </a:fillRef>
-          <a:effectRef idx="2">
-            <a:schemeClr val="accent1"/>
-          </a:effectRef>
-          <a:fontRef idx="minor">
-            <a:schemeClr val="lt1"/>
-          </a:fontRef>
-        </p:style>
-        <p:txBody>
-          <a:bodyPr rtlCol="0" anchor="ctr"/>
-          <a:lstStyle/>
-          <a:p>
-            <a:pPr algn="ctr"/>
-          </a:p>
-        </p:txBody>
-      </p:sp>
-      <p:sp>
-        <p:nvSpPr>
-          <p:cNvPr id="10" name="TextBox 9"/>
-          <p:cNvSpPr txBox="1"/>
-          <p:nvPr/>
-        </p:nvSpPr>
-        <p:spPr>
-          <a:xfrm>
-            <a:off x="749808" y="6437376"/>
-            <a:ext cx="7772400" cy="274320"/>
-          </a:xfrm>
-          <a:prstGeom prst="rect">
-            <a:avLst/>
-          </a:prstGeom>
-          <a:noFill/>
-        </p:spPr>
-        <p:txBody>
-          <a:bodyPr wrap="square" anchor="t" lIns="0" rIns="0" tIns="0" bIns="0">
-            <a:spAutoFit/>
-          </a:bodyPr>
-          <a:lstStyle/>
-          <a:p>
-            <a:pPr algn="l"/>
-            <a:r>
-              <a:rPr sz="900" b="0">
-                <a:solidFill>
-                  <a:srgbClr val="6E6E6E"/>
-                </a:solidFill>
-                <a:latin typeface="Calibri"/>
-              </a:rPr>
-              <a:t>S13 — Herramientas para la Ciencia de Datos, UPC</a:t>
-            </a:r>
-          </a:p>
-        </p:txBody>
-      </p:sp>
-      <p:sp>
-        <p:nvSpPr>
-          <p:cNvPr id="11" name="TextBox 10"/>
-          <p:cNvSpPr txBox="1"/>
-          <p:nvPr/>
-        </p:nvSpPr>
-        <p:spPr>
-          <a:xfrm>
-            <a:off x="10180320" y="6437376"/>
-            <a:ext cx="1463040" cy="274320"/>
-          </a:xfrm>
-          <a:prstGeom prst="rect">
-            <a:avLst/>
-          </a:prstGeom>
-          <a:noFill/>
-        </p:spPr>
-        <p:txBody>
-          <a:bodyPr wrap="square" anchor="t" lIns="0" rIns="0" tIns="0" bIns="0">
-            <a:spAutoFit/>
-          </a:bodyPr>
-          <a:lstStyle/>
-          <a:p>
-            <a:pPr algn="r"/>
-            <a:r>
-              <a:rPr sz="900" b="0">
-                <a:solidFill>
-                  <a:srgbClr val="6E6E6E"/>
-                </a:solidFill>
-                <a:latin typeface="Calibri"/>
-              </a:rPr>
-              <a:t>6 / 19</a:t>
-            </a:r>
-          </a:p>
-        </p:txBody>
-      </p:sp>
-    </p:spTree>
-  </p:cSld>
-  <p:clrMapOvr>
-    <a:masterClrMapping/>
-  </p:clrMapOvr>
-</p:sld>
-</file>
-
-<file path=ppt/slides/slide7.xml><?xml version="1.0" encoding="utf-8"?>
-<p:sld xmlns:a="http://schemas.openxmlformats.org/drawingml/2006/main" xmlns:p="http://schemas.openxmlformats.org/presentationml/2006/main" xmlns:r="http://schemas.openxmlformats.org/officeDocument/2006/relationships">
-  <p:cSld>
-    <p:bg>
-      <p:bgPr>
-        <a:solidFill>
-          <a:srgbClr val="9B1B30"/>
-        </a:solidFill>
-        <a:effectLst/>
-      </p:bgPr>
-    </p:bg>
-    <p:spTree>
-      <p:nvGrpSpPr>
-        <p:cNvPr id="1" name=""/>
-        <p:cNvGrpSpPr/>
-        <p:nvPr/>
-      </p:nvGrpSpPr>
-      <p:grpSpPr/>
-      <p:sp>
-        <p:nvSpPr>
-          <p:cNvPr id="2" name="Oval 1"/>
-          <p:cNvSpPr/>
-          <p:nvPr/>
-        </p:nvSpPr>
-        <p:spPr>
-          <a:xfrm>
-            <a:off x="914400" y="2103120"/>
-            <a:ext cx="2377440" cy="2377440"/>
-          </a:xfrm>
-          <a:prstGeom prst="ellipse">
-            <a:avLst/>
-          </a:prstGeom>
-          <a:solidFill>
-            <a:srgbClr val="FFFFFF"/>
-          </a:solidFill>
-          <a:ln>
-            <a:noFill/>
-          </a:ln>
-          <a:effectLst/>
-        </p:spPr>
-        <p:style>
-          <a:lnRef idx="1">
-            <a:schemeClr val="accent1"/>
-          </a:lnRef>
-          <a:fillRef idx="3">
-            <a:schemeClr val="accent1"/>
-          </a:fillRef>
-          <a:effectRef idx="2">
-            <a:schemeClr val="accent1"/>
-          </a:effectRef>
-          <a:fontRef idx="minor">
-            <a:schemeClr val="lt1"/>
-          </a:fontRef>
-        </p:style>
-        <p:txBody>
-          <a:bodyPr rtlCol="0" anchor="ctr" lIns="0" rIns="0" tIns="0" bIns="0"/>
-          <a:lstStyle/>
-          <a:p>
-            <a:pPr algn="ctr"/>
-            <a:r>
-              <a:rPr sz="10000" b="1">
-                <a:solidFill>
-                  <a:srgbClr val="9B1B30"/>
-                </a:solidFill>
-                <a:latin typeface="Calibri"/>
-              </a:rPr>
-              <a:t>7</a:t>
-            </a:r>
-          </a:p>
-        </p:txBody>
-      </p:sp>
-      <p:sp>
-        <p:nvSpPr>
-          <p:cNvPr id="3" name="TextBox 2"/>
-          <p:cNvSpPr txBox="1"/>
-          <p:nvPr/>
-        </p:nvSpPr>
-        <p:spPr>
-          <a:xfrm>
-            <a:off x="3931920" y="2651760"/>
-            <a:ext cx="7589520" cy="1371600"/>
-          </a:xfrm>
-          <a:prstGeom prst="rect">
-            <a:avLst/>
-          </a:prstGeom>
-          <a:noFill/>
-        </p:spPr>
-        <p:txBody>
-          <a:bodyPr wrap="square" anchor="t" lIns="0" rIns="0" tIns="0" bIns="0">
-            <a:spAutoFit/>
-          </a:bodyPr>
-          <a:lstStyle/>
-          <a:p>
-            <a:pPr algn="l"/>
-            <a:r>
-              <a:rPr sz="4000" b="1">
-                <a:solidFill>
-                  <a:srgbClr val="FFFFFF"/>
-                </a:solidFill>
-                <a:latin typeface="Calibri"/>
-              </a:rPr>
-              <a:t>¿Cómo se verifica que el resultado es real?</a:t>
-            </a:r>
-          </a:p>
-        </p:txBody>
-      </p:sp>
-      <p:sp>
-        <p:nvSpPr>
-          <p:cNvPr id="4" name="TextBox 3"/>
-          <p:cNvSpPr txBox="1"/>
-          <p:nvPr/>
-        </p:nvSpPr>
-        <p:spPr>
-          <a:xfrm>
-            <a:off x="3931920" y="3977639"/>
-            <a:ext cx="7589520" cy="914400"/>
-          </a:xfrm>
-          <a:prstGeom prst="rect">
-            <a:avLst/>
-          </a:prstGeom>
-          <a:noFill/>
-        </p:spPr>
-        <p:txBody>
-          <a:bodyPr wrap="square" anchor="t" lIns="0" rIns="0" tIns="0" bIns="0">
-            <a:spAutoFit/>
-          </a:bodyPr>
-          <a:lstStyle/>
-          <a:p>
-            <a:pPr algn="l"/>
-            <a:r>
-              <a:rPr sz="1700" b="0">
-                <a:solidFill>
-                  <a:srgbClr val="FCEDEE"/>
-                </a:solidFill>
-                <a:latin typeface="Calibri"/>
-              </a:rPr>
-              <a:t>Capítulo 13.7 — viernes, bloque B</a:t>
-            </a:r>
-          </a:p>
-        </p:txBody>
-      </p:sp>
-    </p:spTree>
-  </p:cSld>
-  <p:clrMapOvr>
-    <a:masterClrMapping/>
-  </p:clrMapOvr>
-</p:sld>
-</file>
-
-<file path=ppt/slides/slide8.xml><?xml version="1.0" encoding="utf-8"?>
 <p:sld xmlns:a="http://schemas.openxmlformats.org/drawingml/2006/main" xmlns:p="http://schemas.openxmlformats.org/presentationml/2006/main" xmlns:r="http://schemas.openxmlformats.org/officeDocument/2006/relationships">
   <p:cSld>
     <p:bg>
@@ -12778,7 +10434,708 @@
                 </a:solidFill>
                 <a:latin typeface="Calibri"/>
               </a:rPr>
-              <a:t>8 / 19</a:t>
+              <a:t>6 / 14</a:t>
+            </a:r>
+          </a:p>
+        </p:txBody>
+      </p:sp>
+    </p:spTree>
+  </p:cSld>
+  <p:clrMapOvr>
+    <a:masterClrMapping/>
+  </p:clrMapOvr>
+</p:sld>
+</file>
+
+<file path=ppt/slides/slide7.xml><?xml version="1.0" encoding="utf-8"?>
+<p:sld xmlns:a="http://schemas.openxmlformats.org/drawingml/2006/main" xmlns:p="http://schemas.openxmlformats.org/presentationml/2006/main" xmlns:r="http://schemas.openxmlformats.org/officeDocument/2006/relationships">
+  <p:cSld>
+    <p:bg>
+      <p:bgPr>
+        <a:solidFill>
+          <a:srgbClr val="9B1B30"/>
+        </a:solidFill>
+        <a:effectLst/>
+      </p:bgPr>
+    </p:bg>
+    <p:spTree>
+      <p:nvGrpSpPr>
+        <p:cNvPr id="1" name=""/>
+        <p:cNvGrpSpPr/>
+        <p:nvPr/>
+      </p:nvGrpSpPr>
+      <p:grpSpPr/>
+      <p:sp>
+        <p:nvSpPr>
+          <p:cNvPr id="2" name="Oval 1"/>
+          <p:cNvSpPr/>
+          <p:nvPr/>
+        </p:nvSpPr>
+        <p:spPr>
+          <a:xfrm>
+            <a:off x="914400" y="2103120"/>
+            <a:ext cx="2377440" cy="2377440"/>
+          </a:xfrm>
+          <a:prstGeom prst="ellipse">
+            <a:avLst/>
+          </a:prstGeom>
+          <a:solidFill>
+            <a:srgbClr val="FFFFFF"/>
+          </a:solidFill>
+          <a:ln>
+            <a:noFill/>
+          </a:ln>
+          <a:effectLst/>
+        </p:spPr>
+        <p:style>
+          <a:lnRef idx="1">
+            <a:schemeClr val="accent1"/>
+          </a:lnRef>
+          <a:fillRef idx="3">
+            <a:schemeClr val="accent1"/>
+          </a:fillRef>
+          <a:effectRef idx="2">
+            <a:schemeClr val="accent1"/>
+          </a:effectRef>
+          <a:fontRef idx="minor">
+            <a:schemeClr val="lt1"/>
+          </a:fontRef>
+        </p:style>
+        <p:txBody>
+          <a:bodyPr rtlCol="0" anchor="ctr" lIns="0" rIns="0" tIns="0" bIns="0"/>
+          <a:lstStyle/>
+          <a:p>
+            <a:pPr algn="ctr"/>
+            <a:r>
+              <a:rPr sz="10000" b="1">
+                <a:solidFill>
+                  <a:srgbClr val="9B1B30"/>
+                </a:solidFill>
+                <a:latin typeface="Calibri"/>
+              </a:rPr>
+              <a:t>4</a:t>
+            </a:r>
+          </a:p>
+        </p:txBody>
+      </p:sp>
+      <p:sp>
+        <p:nvSpPr>
+          <p:cNvPr id="3" name="TextBox 2"/>
+          <p:cNvSpPr txBox="1"/>
+          <p:nvPr/>
+        </p:nvSpPr>
+        <p:spPr>
+          <a:xfrm>
+            <a:off x="3931920" y="2651760"/>
+            <a:ext cx="7589520" cy="1371600"/>
+          </a:xfrm>
+          <a:prstGeom prst="rect">
+            <a:avLst/>
+          </a:prstGeom>
+          <a:noFill/>
+        </p:spPr>
+        <p:txBody>
+          <a:bodyPr wrap="square" anchor="t" lIns="0" rIns="0" tIns="0" bIns="0">
+            <a:spAutoFit/>
+          </a:bodyPr>
+          <a:lstStyle/>
+          <a:p>
+            <a:pPr algn="l"/>
+            <a:r>
+              <a:rPr sz="4000" b="1">
+                <a:solidFill>
+                  <a:srgbClr val="FFFFFF"/>
+                </a:solidFill>
+                <a:latin typeface="Calibri"/>
+              </a:rPr>
+              <a:t>Del riesgo al valor</a:t>
+            </a:r>
+          </a:p>
+        </p:txBody>
+      </p:sp>
+      <p:sp>
+        <p:nvSpPr>
+          <p:cNvPr id="4" name="TextBox 3"/>
+          <p:cNvSpPr txBox="1"/>
+          <p:nvPr/>
+        </p:nvSpPr>
+        <p:spPr>
+          <a:xfrm>
+            <a:off x="3931920" y="3977639"/>
+            <a:ext cx="7589520" cy="914400"/>
+          </a:xfrm>
+          <a:prstGeom prst="rect">
+            <a:avLst/>
+          </a:prstGeom>
+          <a:noFill/>
+        </p:spPr>
+        <p:txBody>
+          <a:bodyPr wrap="square" anchor="t" lIns="0" rIns="0" tIns="0" bIns="0">
+            <a:spAutoFit/>
+          </a:bodyPr>
+          <a:lstStyle/>
+          <a:p>
+            <a:pPr algn="l"/>
+            <a:r>
+              <a:rPr sz="1700" b="0">
+                <a:solidFill>
+                  <a:srgbClr val="FCEDEE"/>
+                </a:solidFill>
+                <a:latin typeface="Calibri"/>
+              </a:rPr>
+              <a:t>Generalizar a otro dataset y convertir la retención en dinero (CLV)</a:t>
+            </a:r>
+          </a:p>
+        </p:txBody>
+      </p:sp>
+      <p:pic>
+        <p:nvPicPr>
+          <p:cNvPr id="5" name="Picture 4" descr="briefcase__FFFFFF.png"/>
+          <p:cNvPicPr>
+            <a:picLocks noChangeAspect="1"/>
+          </p:cNvPicPr>
+          <p:nvPr/>
+        </p:nvPicPr>
+        <p:blipFill>
+          <a:blip r:embed="rId2"/>
+          <a:stretch>
+            <a:fillRect/>
+          </a:stretch>
+        </p:blipFill>
+        <p:spPr>
+          <a:xfrm>
+            <a:off x="10195560" y="640080"/>
+            <a:ext cx="1051560" cy="1051560"/>
+          </a:xfrm>
+          <a:prstGeom prst="rect">
+            <a:avLst/>
+          </a:prstGeom>
+        </p:spPr>
+      </p:pic>
+    </p:spTree>
+  </p:cSld>
+  <p:clrMapOvr>
+    <a:masterClrMapping/>
+  </p:clrMapOvr>
+</p:sld>
+</file>
+
+<file path=ppt/slides/slide8.xml><?xml version="1.0" encoding="utf-8"?>
+<p:sld xmlns:a="http://schemas.openxmlformats.org/drawingml/2006/main" xmlns:p="http://schemas.openxmlformats.org/presentationml/2006/main" xmlns:r="http://schemas.openxmlformats.org/officeDocument/2006/relationships">
+  <p:cSld>
+    <p:bg>
+      <p:bgPr>
+        <a:solidFill>
+          <a:srgbClr val="FFFFFF"/>
+        </a:solidFill>
+        <a:effectLst/>
+      </p:bgPr>
+    </p:bg>
+    <p:spTree>
+      <p:nvGrpSpPr>
+        <p:cNvPr id="1" name=""/>
+        <p:cNvGrpSpPr/>
+        <p:nvPr/>
+      </p:nvGrpSpPr>
+      <p:grpSpPr/>
+      <p:sp>
+        <p:nvSpPr>
+          <p:cNvPr id="2" name="TextBox 1"/>
+          <p:cNvSpPr txBox="1"/>
+          <p:nvPr/>
+        </p:nvSpPr>
+        <p:spPr>
+          <a:xfrm>
+            <a:off x="548640" y="411480"/>
+            <a:ext cx="11094720" cy="292608"/>
+          </a:xfrm>
+          <a:prstGeom prst="rect">
+            <a:avLst/>
+          </a:prstGeom>
+          <a:noFill/>
+        </p:spPr>
+        <p:txBody>
+          <a:bodyPr wrap="square" anchor="t" lIns="0" rIns="0" tIns="0" bIns="0">
+            <a:spAutoFit/>
+          </a:bodyPr>
+          <a:lstStyle/>
+          <a:p>
+            <a:pPr algn="l"/>
+            <a:r>
+              <a:rPr sz="1300" b="1">
+                <a:solidFill>
+                  <a:srgbClr val="9B1B30"/>
+                </a:solidFill>
+                <a:latin typeface="Calibri"/>
+              </a:rPr>
+              <a:t>DEFINICIONES — EL PUENTE AL NEGOCIO</a:t>
+            </a:r>
+          </a:p>
+        </p:txBody>
+      </p:sp>
+      <p:sp>
+        <p:nvSpPr>
+          <p:cNvPr id="3" name="TextBox 2"/>
+          <p:cNvSpPr txBox="1"/>
+          <p:nvPr/>
+        </p:nvSpPr>
+        <p:spPr>
+          <a:xfrm>
+            <a:off x="548640" y="731520"/>
+            <a:ext cx="11094720" cy="777240"/>
+          </a:xfrm>
+          <a:prstGeom prst="rect">
+            <a:avLst/>
+          </a:prstGeom>
+          <a:noFill/>
+        </p:spPr>
+        <p:txBody>
+          <a:bodyPr wrap="square" anchor="t" lIns="0" rIns="0" tIns="0" bIns="0">
+            <a:spAutoFit/>
+          </a:bodyPr>
+          <a:lstStyle/>
+          <a:p>
+            <a:pPr algn="l"/>
+            <a:r>
+              <a:rPr sz="4000" b="1">
+                <a:solidFill>
+                  <a:srgbClr val="2D2D2D"/>
+                </a:solidFill>
+                <a:latin typeface="Calibri"/>
+              </a:rPr>
+              <a:t>El CLV convierte la supervivencia en dinero</a:t>
+            </a:r>
+          </a:p>
+        </p:txBody>
+      </p:sp>
+      <p:sp>
+        <p:nvSpPr>
+          <p:cNvPr id="4" name="Oval 3"/>
+          <p:cNvSpPr/>
+          <p:nvPr/>
+        </p:nvSpPr>
+        <p:spPr>
+          <a:xfrm>
+            <a:off x="548640" y="2642616"/>
+            <a:ext cx="658368" cy="658368"/>
+          </a:xfrm>
+          <a:prstGeom prst="ellipse">
+            <a:avLst/>
+          </a:prstGeom>
+          <a:solidFill>
+            <a:srgbClr val="E4002B"/>
+          </a:solidFill>
+          <a:ln>
+            <a:noFill/>
+          </a:ln>
+          <a:effectLst/>
+        </p:spPr>
+        <p:style>
+          <a:lnRef idx="1">
+            <a:schemeClr val="accent1"/>
+          </a:lnRef>
+          <a:fillRef idx="3">
+            <a:schemeClr val="accent1"/>
+          </a:fillRef>
+          <a:effectRef idx="2">
+            <a:schemeClr val="accent1"/>
+          </a:effectRef>
+          <a:fontRef idx="minor">
+            <a:schemeClr val="lt1"/>
+          </a:fontRef>
+        </p:style>
+        <p:txBody>
+          <a:bodyPr rtlCol="0" anchor="ctr"/>
+          <a:lstStyle/>
+          <a:p>
+            <a:pPr algn="ctr"/>
+          </a:p>
+        </p:txBody>
+      </p:sp>
+      <p:pic>
+        <p:nvPicPr>
+          <p:cNvPr id="5" name="Picture 4" descr="target__FFFFFF.png"/>
+          <p:cNvPicPr>
+            <a:picLocks noChangeAspect="1"/>
+          </p:cNvPicPr>
+          <p:nvPr/>
+        </p:nvPicPr>
+        <p:blipFill>
+          <a:blip r:embed="rId2"/>
+          <a:stretch>
+            <a:fillRect/>
+          </a:stretch>
+        </p:blipFill>
+        <p:spPr>
+          <a:xfrm>
+            <a:off x="732983" y="2826959"/>
+            <a:ext cx="289682" cy="289682"/>
+          </a:xfrm>
+          <a:prstGeom prst="rect">
+            <a:avLst/>
+          </a:prstGeom>
+        </p:spPr>
+      </p:pic>
+      <p:sp>
+        <p:nvSpPr>
+          <p:cNvPr id="6" name="TextBox 5"/>
+          <p:cNvSpPr txBox="1"/>
+          <p:nvPr/>
+        </p:nvSpPr>
+        <p:spPr>
+          <a:xfrm>
+            <a:off x="1508760" y="1938528"/>
+            <a:ext cx="10134600" cy="411480"/>
+          </a:xfrm>
+          <a:prstGeom prst="rect">
+            <a:avLst/>
+          </a:prstGeom>
+          <a:noFill/>
+        </p:spPr>
+        <p:txBody>
+          <a:bodyPr wrap="square" anchor="t" lIns="0" rIns="0" tIns="0" bIns="0">
+            <a:spAutoFit/>
+          </a:bodyPr>
+          <a:lstStyle/>
+          <a:p>
+            <a:pPr algn="l"/>
+            <a:r>
+              <a:rPr sz="1800" b="1">
+                <a:solidFill>
+                  <a:srgbClr val="9B1B30"/>
+                </a:solidFill>
+                <a:latin typeface="Calibri"/>
+              </a:rPr>
+              <a:t>CLV desde supervivencia</a:t>
+            </a:r>
+          </a:p>
+        </p:txBody>
+      </p:sp>
+      <p:sp>
+        <p:nvSpPr>
+          <p:cNvPr id="7" name="TextBox 6"/>
+          <p:cNvSpPr txBox="1"/>
+          <p:nvPr/>
+        </p:nvSpPr>
+        <p:spPr>
+          <a:xfrm>
+            <a:off x="1508760" y="2395728"/>
+            <a:ext cx="10134600" cy="1645920"/>
+          </a:xfrm>
+          <a:prstGeom prst="rect">
+            <a:avLst/>
+          </a:prstGeom>
+          <a:noFill/>
+        </p:spPr>
+        <p:txBody>
+          <a:bodyPr wrap="square" anchor="t" lIns="0" rIns="0" tIns="0" bIns="0">
+            <a:spAutoFit/>
+          </a:bodyPr>
+          <a:lstStyle/>
+          <a:p>
+            <a:pPr algn="l">
+              <a:lnSpc>
+                <a:spcPct val="110000"/>
+              </a:lnSpc>
+            </a:pPr>
+            <a:r>
+              <a:rPr sz="1400" b="0">
+                <a:solidFill>
+                  <a:srgbClr val="2D2D2D"/>
+                </a:solidFill>
+                <a:latin typeface="Calibri"/>
+              </a:rPr>
+              <a:t>CLV = Σ m·S(t)/(1+d)ᵗ: descuenta el margen por la probabilidad de seguir activo cada periodo, no una vida fija.</a:t>
+            </a:r>
+          </a:p>
+        </p:txBody>
+      </p:sp>
+      <p:sp>
+        <p:nvSpPr>
+          <p:cNvPr id="8" name="Oval 7"/>
+          <p:cNvSpPr/>
+          <p:nvPr/>
+        </p:nvSpPr>
+        <p:spPr>
+          <a:xfrm>
+            <a:off x="548640" y="4928616"/>
+            <a:ext cx="658368" cy="658368"/>
+          </a:xfrm>
+          <a:prstGeom prst="ellipse">
+            <a:avLst/>
+          </a:prstGeom>
+          <a:solidFill>
+            <a:srgbClr val="E4002B"/>
+          </a:solidFill>
+          <a:ln>
+            <a:noFill/>
+          </a:ln>
+          <a:effectLst/>
+        </p:spPr>
+        <p:style>
+          <a:lnRef idx="1">
+            <a:schemeClr val="accent1"/>
+          </a:lnRef>
+          <a:fillRef idx="3">
+            <a:schemeClr val="accent1"/>
+          </a:fillRef>
+          <a:effectRef idx="2">
+            <a:schemeClr val="accent1"/>
+          </a:effectRef>
+          <a:fontRef idx="minor">
+            <a:schemeClr val="lt1"/>
+          </a:fontRef>
+        </p:style>
+        <p:txBody>
+          <a:bodyPr rtlCol="0" anchor="ctr"/>
+          <a:lstStyle/>
+          <a:p>
+            <a:pPr algn="ctr"/>
+          </a:p>
+        </p:txBody>
+      </p:sp>
+      <p:pic>
+        <p:nvPicPr>
+          <p:cNvPr id="9" name="Picture 8" descr="trending-up__FFFFFF.png"/>
+          <p:cNvPicPr>
+            <a:picLocks noChangeAspect="1"/>
+          </p:cNvPicPr>
+          <p:nvPr/>
+        </p:nvPicPr>
+        <p:blipFill>
+          <a:blip r:embed="rId3"/>
+          <a:stretch>
+            <a:fillRect/>
+          </a:stretch>
+        </p:blipFill>
+        <p:spPr>
+          <a:xfrm>
+            <a:off x="732983" y="5112959"/>
+            <a:ext cx="289682" cy="289682"/>
+          </a:xfrm>
+          <a:prstGeom prst="rect">
+            <a:avLst/>
+          </a:prstGeom>
+        </p:spPr>
+      </p:pic>
+      <p:sp>
+        <p:nvSpPr>
+          <p:cNvPr id="10" name="TextBox 9"/>
+          <p:cNvSpPr txBox="1"/>
+          <p:nvPr/>
+        </p:nvSpPr>
+        <p:spPr>
+          <a:xfrm>
+            <a:off x="1508760" y="4224528"/>
+            <a:ext cx="10134600" cy="411480"/>
+          </a:xfrm>
+          <a:prstGeom prst="rect">
+            <a:avLst/>
+          </a:prstGeom>
+          <a:noFill/>
+        </p:spPr>
+        <p:txBody>
+          <a:bodyPr wrap="square" anchor="t" lIns="0" rIns="0" tIns="0" bIns="0">
+            <a:spAutoFit/>
+          </a:bodyPr>
+          <a:lstStyle/>
+          <a:p>
+            <a:pPr algn="l"/>
+            <a:r>
+              <a:rPr sz="1800" b="1">
+                <a:solidFill>
+                  <a:srgbClr val="9B1B30"/>
+                </a:solidFill>
+                <a:latin typeface="Calibri"/>
+              </a:rPr>
+              <a:t>Weibull para extrapolar (mención)</a:t>
+            </a:r>
+          </a:p>
+        </p:txBody>
+      </p:sp>
+      <p:sp>
+        <p:nvSpPr>
+          <p:cNvPr id="11" name="TextBox 10"/>
+          <p:cNvSpPr txBox="1"/>
+          <p:nvPr/>
+        </p:nvSpPr>
+        <p:spPr>
+          <a:xfrm>
+            <a:off x="1508760" y="4681728"/>
+            <a:ext cx="10134600" cy="1645920"/>
+          </a:xfrm>
+          <a:prstGeom prst="rect">
+            <a:avLst/>
+          </a:prstGeom>
+          <a:noFill/>
+        </p:spPr>
+        <p:txBody>
+          <a:bodyPr wrap="square" anchor="t" lIns="0" rIns="0" tIns="0" bIns="0">
+            <a:spAutoFit/>
+          </a:bodyPr>
+          <a:lstStyle/>
+          <a:p>
+            <a:pPr algn="l">
+              <a:lnSpc>
+                <a:spcPct val="110000"/>
+              </a:lnSpc>
+            </a:pPr>
+            <a:r>
+              <a:rPr sz="1400" b="0">
+                <a:solidFill>
+                  <a:srgbClr val="2D2D2D"/>
+                </a:solidFill>
+                <a:latin typeface="Calibri"/>
+              </a:rPr>
+              <a:t>Modelo paramétrico que fija la forma del hazard (ρ = 1,37 → desgaste) y permite proyectar el CLV más allá del horizonte observado.</a:t>
+            </a:r>
+          </a:p>
+        </p:txBody>
+      </p:sp>
+      <p:sp>
+        <p:nvSpPr>
+          <p:cNvPr id="12" name="TextBox 11"/>
+          <p:cNvSpPr txBox="1"/>
+          <p:nvPr/>
+        </p:nvSpPr>
+        <p:spPr>
+          <a:xfrm>
+            <a:off x="548640" y="5870448"/>
+            <a:ext cx="11064240" cy="320040"/>
+          </a:xfrm>
+          <a:prstGeom prst="rect">
+            <a:avLst/>
+          </a:prstGeom>
+          <a:noFill/>
+        </p:spPr>
+        <p:txBody>
+          <a:bodyPr wrap="square">
+            <a:spAutoFit/>
+          </a:bodyPr>
+          <a:lstStyle/>
+          <a:p>
+            <a:r>
+              <a:rPr sz="1000">
+                <a:solidFill>
+                  <a:srgbClr val="6E6E6E"/>
+                </a:solidFill>
+                <a:latin typeface="Calibri"/>
+              </a:rPr>
+              <a:t>DEFINICIONES puntos 11, 12, Fader, Hardie &amp; Lee (2005), JMR 42(4):415-430; lifelines.WeibullFitter. Extrapolar con Weibull, no con la cola plana de la KM.</a:t>
+            </a:r>
+          </a:p>
+        </p:txBody>
+      </p:sp>
+      <p:sp>
+        <p:nvSpPr>
+          <p:cNvPr id="13" name="Oval 12"/>
+          <p:cNvSpPr/>
+          <p:nvPr/>
+        </p:nvSpPr>
+        <p:spPr>
+          <a:xfrm>
+            <a:off x="548640" y="6473952"/>
+            <a:ext cx="100584" cy="100584"/>
+          </a:xfrm>
+          <a:prstGeom prst="ellipse">
+            <a:avLst/>
+          </a:prstGeom>
+          <a:solidFill>
+            <a:srgbClr val="E4002B"/>
+          </a:solidFill>
+          <a:ln>
+            <a:noFill/>
+          </a:ln>
+          <a:effectLst/>
+        </p:spPr>
+        <p:style>
+          <a:lnRef idx="1">
+            <a:schemeClr val="accent1"/>
+          </a:lnRef>
+          <a:fillRef idx="3">
+            <a:schemeClr val="accent1"/>
+          </a:fillRef>
+          <a:effectRef idx="2">
+            <a:schemeClr val="accent1"/>
+          </a:effectRef>
+          <a:fontRef idx="minor">
+            <a:schemeClr val="lt1"/>
+          </a:fontRef>
+        </p:style>
+        <p:txBody>
+          <a:bodyPr rtlCol="0" anchor="ctr"/>
+          <a:lstStyle/>
+          <a:p>
+            <a:pPr algn="ctr"/>
+          </a:p>
+        </p:txBody>
+      </p:sp>
+      <p:sp>
+        <p:nvSpPr>
+          <p:cNvPr id="14" name="TextBox 13"/>
+          <p:cNvSpPr txBox="1"/>
+          <p:nvPr/>
+        </p:nvSpPr>
+        <p:spPr>
+          <a:xfrm>
+            <a:off x="749808" y="6437376"/>
+            <a:ext cx="7772400" cy="274320"/>
+          </a:xfrm>
+          <a:prstGeom prst="rect">
+            <a:avLst/>
+          </a:prstGeom>
+          <a:noFill/>
+        </p:spPr>
+        <p:txBody>
+          <a:bodyPr wrap="square" anchor="t" lIns="0" rIns="0" tIns="0" bIns="0">
+            <a:spAutoFit/>
+          </a:bodyPr>
+          <a:lstStyle/>
+          <a:p>
+            <a:pPr algn="l"/>
+            <a:r>
+              <a:rPr sz="900" b="0">
+                <a:solidFill>
+                  <a:srgbClr val="6E6E6E"/>
+                </a:solidFill>
+                <a:latin typeface="Calibri"/>
+              </a:rPr>
+              <a:t>S13 — Herramientas para la Ciencia de Datos, UPC</a:t>
+            </a:r>
+          </a:p>
+        </p:txBody>
+      </p:sp>
+      <p:sp>
+        <p:nvSpPr>
+          <p:cNvPr id="15" name="TextBox 14"/>
+          <p:cNvSpPr txBox="1"/>
+          <p:nvPr/>
+        </p:nvSpPr>
+        <p:spPr>
+          <a:xfrm>
+            <a:off x="10180320" y="6437376"/>
+            <a:ext cx="1463040" cy="274320"/>
+          </a:xfrm>
+          <a:prstGeom prst="rect">
+            <a:avLst/>
+          </a:prstGeom>
+          <a:noFill/>
+        </p:spPr>
+        <p:txBody>
+          <a:bodyPr wrap="square" anchor="t" lIns="0" rIns="0" tIns="0" bIns="0">
+            <a:spAutoFit/>
+          </a:bodyPr>
+          <a:lstStyle/>
+          <a:p>
+            <a:pPr algn="r"/>
+            <a:r>
+              <a:rPr sz="900" b="0">
+                <a:solidFill>
+                  <a:srgbClr val="6E6E6E"/>
+                </a:solidFill>
+                <a:latin typeface="Calibri"/>
+              </a:rPr>
+              <a:t>8 / 14</a:t>
             </a:r>
           </a:p>
         </p:txBody>
@@ -12797,7 +11154,7 @@
     <p:bg>
       <p:bgPr>
         <a:solidFill>
-          <a:srgbClr val="FCEDEE"/>
+          <a:srgbClr val="FFFFFF"/>
         </a:solidFill>
         <a:effectLst/>
       </p:bgPr>
@@ -12811,14 +11168,73 @@
       <p:grpSpPr/>
       <p:sp>
         <p:nvSpPr>
-          <p:cNvPr id="2" name="Oval 1"/>
+          <p:cNvPr id="2" name="TextBox 1"/>
+          <p:cNvSpPr txBox="1"/>
+          <p:nvPr/>
+        </p:nvSpPr>
+        <p:spPr>
+          <a:xfrm>
+            <a:off x="548640" y="411480"/>
+            <a:ext cx="11094720" cy="777240"/>
+          </a:xfrm>
+          <a:prstGeom prst="rect">
+            <a:avLst/>
+          </a:prstGeom>
+          <a:noFill/>
+        </p:spPr>
+        <p:txBody>
+          <a:bodyPr wrap="square" anchor="t" lIns="0" rIns="0" tIns="0" bIns="0">
+            <a:spAutoFit/>
+          </a:bodyPr>
+          <a:lstStyle/>
+          <a:p>
+            <a:pPr algn="l"/>
+            <a:r>
+              <a:rPr sz="4000" b="1">
+                <a:solidFill>
+                  <a:srgbClr val="2D2D2D"/>
+                </a:solidFill>
+                <a:latin typeface="Calibri"/>
+              </a:rPr>
+              <a:t>El contrato mensual pierde clientes mucho antes que el anual</a:t>
+            </a:r>
+          </a:p>
+        </p:txBody>
+      </p:sp>
+      <p:pic>
+        <p:nvPicPr>
+          <p:cNvPr id="3" name="Picture 2" descr="S13deck_km_telco.png"/>
+          <p:cNvPicPr>
+            <a:picLocks noChangeAspect="1"/>
+          </p:cNvPicPr>
+          <p:nvPr/>
+        </p:nvPicPr>
+        <p:blipFill>
+          <a:blip r:embed="rId2"/>
+          <a:stretch>
+            <a:fillRect/>
+          </a:stretch>
+        </p:blipFill>
+        <p:spPr>
+          <a:xfrm>
+            <a:off x="548640" y="1828800"/>
+            <a:ext cx="6949440" cy="3883511"/>
+          </a:xfrm>
+          <a:prstGeom prst="rect">
+            <a:avLst/>
+          </a:prstGeom>
+        </p:spPr>
+      </p:pic>
+      <p:sp>
+        <p:nvSpPr>
+          <p:cNvPr id="4" name="Oval 3"/>
           <p:cNvSpPr/>
           <p:nvPr/>
         </p:nvSpPr>
         <p:spPr>
           <a:xfrm>
-            <a:off x="5593080" y="914400"/>
-            <a:ext cx="1005840" cy="1005840"/>
+            <a:off x="7955279" y="2011680"/>
+            <a:ext cx="548640" cy="548640"/>
           </a:xfrm>
           <a:prstGeom prst="ellipse">
             <a:avLst/>
@@ -12846,32 +11262,47 @@
           </a:fontRef>
         </p:style>
         <p:txBody>
-          <a:bodyPr rtlCol="0" anchor="ctr" lIns="0" rIns="0" tIns="0" bIns="0"/>
+          <a:bodyPr rtlCol="0" anchor="ctr"/>
           <a:lstStyle/>
           <a:p>
             <a:pPr algn="ctr"/>
-            <a:r>
-              <a:rPr sz="4400" b="1">
-                <a:solidFill>
-                  <a:srgbClr val="FFFFFF"/>
-                </a:solidFill>
-                <a:latin typeface="Calibri"/>
-              </a:rPr>
-              <a:t>?</a:t>
-            </a:r>
-          </a:p>
-        </p:txBody>
-      </p:sp>
-      <p:sp>
-        <p:nvSpPr>
-          <p:cNvPr id="3" name="TextBox 2"/>
+          </a:p>
+        </p:txBody>
+      </p:sp>
+      <p:pic>
+        <p:nvPicPr>
+          <p:cNvPr id="5" name="Picture 4" descr="lightbulb__FFFFFF.png"/>
+          <p:cNvPicPr>
+            <a:picLocks noChangeAspect="1"/>
+          </p:cNvPicPr>
+          <p:nvPr/>
+        </p:nvPicPr>
+        <p:blipFill>
+          <a:blip r:embed="rId3"/>
+          <a:stretch>
+            <a:fillRect/>
+          </a:stretch>
+        </p:blipFill>
+        <p:spPr>
+          <a:xfrm>
+            <a:off x="8108898" y="2165299"/>
+            <a:ext cx="241402" cy="241402"/>
+          </a:xfrm>
+          <a:prstGeom prst="rect">
+            <a:avLst/>
+          </a:prstGeom>
+        </p:spPr>
+      </p:pic>
+      <p:sp>
+        <p:nvSpPr>
+          <p:cNvPr id="6" name="TextBox 5"/>
           <p:cNvSpPr txBox="1"/>
           <p:nvPr/>
         </p:nvSpPr>
         <p:spPr>
           <a:xfrm>
-            <a:off x="1371600" y="2468880"/>
-            <a:ext cx="9448800" cy="2011680"/>
+            <a:off x="8686800" y="2057400"/>
+            <a:ext cx="2926080" cy="548640"/>
           </a:xfrm>
           <a:prstGeom prst="rect">
             <a:avLst/>
@@ -12884,29 +11315,29 @@
           </a:bodyPr>
           <a:lstStyle/>
           <a:p>
-            <a:pPr algn="ctr"/>
-            <a:r>
-              <a:rPr sz="3200" b="1">
+            <a:pPr algn="l"/>
+            <a:r>
+              <a:rPr sz="1500" b="1">
                 <a:solidFill>
                   <a:srgbClr val="9B1B30"/>
                 </a:solidFill>
                 <a:latin typeface="Calibri"/>
               </a:rPr>
-              <a:t>¿Cuánto conviene gastar hoy en retener a un cliente de contrato mensual?</a:t>
-            </a:r>
-          </a:p>
-        </p:txBody>
-      </p:sp>
-      <p:sp>
-        <p:nvSpPr>
-          <p:cNvPr id="4" name="TextBox 3"/>
+              <a:t>Lectura de negocio</a:t>
+            </a:r>
+          </a:p>
+        </p:txBody>
+      </p:sp>
+      <p:sp>
+        <p:nvSpPr>
+          <p:cNvPr id="7" name="TextBox 6"/>
           <p:cNvSpPr txBox="1"/>
           <p:nvPr/>
         </p:nvSpPr>
         <p:spPr>
           <a:xfrm>
-            <a:off x="2011680" y="4754880"/>
-            <a:ext cx="8168640" cy="1280160"/>
+            <a:off x="7955279" y="2880360"/>
+            <a:ext cx="3657600" cy="3108960"/>
           </a:xfrm>
           <a:prstGeom prst="rect">
             <a:avLst/>
@@ -12919,15 +11350,168 @@
           </a:bodyPr>
           <a:lstStyle/>
           <a:p>
+            <a:pPr algn="l">
+              <a:lnSpc>
+                <a:spcPct val="125000"/>
+              </a:lnSpc>
+            </a:pPr>
+            <a:r>
+              <a:rPr sz="1500" b="0">
+                <a:solidFill>
+                  <a:srgbClr val="2D2D2D"/>
+                </a:solidFill>
+                <a:latin typeface="Calibri"/>
+              </a:rPr>
+              <a:t>A 12 meses el mes a mes retiene 70 % frente a 99 % del anual: la ventana de riesgo es temprana.</a:t>
+            </a:r>
+          </a:p>
+        </p:txBody>
+      </p:sp>
+      <p:sp>
+        <p:nvSpPr>
+          <p:cNvPr id="8" name="TextBox 7"/>
+          <p:cNvSpPr txBox="1"/>
+          <p:nvPr/>
+        </p:nvSpPr>
+        <p:spPr>
+          <a:xfrm>
+            <a:off x="548640" y="5961888"/>
+            <a:ext cx="11094720" cy="292608"/>
+          </a:xfrm>
+          <a:prstGeom prst="rect">
+            <a:avLst/>
+          </a:prstGeom>
+          <a:noFill/>
+        </p:spPr>
+        <p:txBody>
+          <a:bodyPr wrap="square" anchor="t" lIns="0" rIns="0" tIns="0" bIns="0">
+            <a:spAutoFit/>
+          </a:bodyPr>
+          <a:lstStyle/>
+          <a:p>
+            <a:pPr algn="l"/>
+            <a:r>
+              <a:rPr sz="1000" b="0">
+                <a:solidFill>
+                  <a:srgbClr val="6E6E6E"/>
+                </a:solidFill>
+                <a:latin typeface="Calibri"/>
+              </a:rPr>
+              <a:t>Negocio (Telco, dataset exclusivo del entregable desde el 13-14/09/2026), KM por contrato, tenure de los activos = tiempo censurado — recalculado en frío por _recomputar_telco (data/telco_churn.csv). Churn global 27 %.</a:t>
+            </a:r>
+          </a:p>
+        </p:txBody>
+      </p:sp>
+      <p:sp>
+        <p:nvSpPr>
+          <p:cNvPr id="9" name="Oval 8"/>
+          <p:cNvSpPr/>
+          <p:nvPr/>
+        </p:nvSpPr>
+        <p:spPr>
+          <a:xfrm>
+            <a:off x="548640" y="6473952"/>
+            <a:ext cx="100584" cy="100584"/>
+          </a:xfrm>
+          <a:prstGeom prst="ellipse">
+            <a:avLst/>
+          </a:prstGeom>
+          <a:solidFill>
+            <a:srgbClr val="E4002B"/>
+          </a:solidFill>
+          <a:ln>
+            <a:noFill/>
+          </a:ln>
+          <a:effectLst/>
+        </p:spPr>
+        <p:style>
+          <a:lnRef idx="1">
+            <a:schemeClr val="accent1"/>
+          </a:lnRef>
+          <a:fillRef idx="3">
+            <a:schemeClr val="accent1"/>
+          </a:fillRef>
+          <a:effectRef idx="2">
+            <a:schemeClr val="accent1"/>
+          </a:effectRef>
+          <a:fontRef idx="minor">
+            <a:schemeClr val="lt1"/>
+          </a:fontRef>
+        </p:style>
+        <p:txBody>
+          <a:bodyPr rtlCol="0" anchor="ctr"/>
+          <a:lstStyle/>
+          <a:p>
             <a:pPr algn="ctr"/>
-            <a:r>
-              <a:rPr sz="1500" b="0">
-                <a:solidFill>
-                  <a:srgbClr val="2D2D2D"/>
+          </a:p>
+        </p:txBody>
+      </p:sp>
+      <p:sp>
+        <p:nvSpPr>
+          <p:cNvPr id="10" name="TextBox 9"/>
+          <p:cNvSpPr txBox="1"/>
+          <p:nvPr/>
+        </p:nvSpPr>
+        <p:spPr>
+          <a:xfrm>
+            <a:off x="749808" y="6437376"/>
+            <a:ext cx="7772400" cy="274320"/>
+          </a:xfrm>
+          <a:prstGeom prst="rect">
+            <a:avLst/>
+          </a:prstGeom>
+          <a:noFill/>
+        </p:spPr>
+        <p:txBody>
+          <a:bodyPr wrap="square" anchor="t" lIns="0" rIns="0" tIns="0" bIns="0">
+            <a:spAutoFit/>
+          </a:bodyPr>
+          <a:lstStyle/>
+          <a:p>
+            <a:pPr algn="l"/>
+            <a:r>
+              <a:rPr sz="900" b="0">
+                <a:solidFill>
+                  <a:srgbClr val="6E6E6E"/>
                 </a:solidFill>
                 <a:latin typeface="Calibri"/>
               </a:rPr>
-              <a:t>Su CLV es ~1 804 USD y la retención cae temprano: la decisión pesa el HR, su IC y el CLV.</a:t>
+              <a:t>S13 — Herramientas para la Ciencia de Datos, UPC</a:t>
+            </a:r>
+          </a:p>
+        </p:txBody>
+      </p:sp>
+      <p:sp>
+        <p:nvSpPr>
+          <p:cNvPr id="11" name="TextBox 10"/>
+          <p:cNvSpPr txBox="1"/>
+          <p:nvPr/>
+        </p:nvSpPr>
+        <p:spPr>
+          <a:xfrm>
+            <a:off x="10180320" y="6437376"/>
+            <a:ext cx="1463040" cy="274320"/>
+          </a:xfrm>
+          <a:prstGeom prst="rect">
+            <a:avLst/>
+          </a:prstGeom>
+          <a:noFill/>
+        </p:spPr>
+        <p:txBody>
+          <a:bodyPr wrap="square" anchor="t" lIns="0" rIns="0" tIns="0" bIns="0">
+            <a:spAutoFit/>
+          </a:bodyPr>
+          <a:lstStyle/>
+          <a:p>
+            <a:pPr algn="r"/>
+            <a:r>
+              <a:rPr sz="900" b="0">
+                <a:solidFill>
+                  <a:srgbClr val="6E6E6E"/>
+                </a:solidFill>
+                <a:latin typeface="Calibri"/>
+              </a:rPr>
+              <a:t>9 / 14</a:t>
             </a:r>
           </a:p>
         </p:txBody>
